--- a/docs/pptx/carbo/jx-carbo-linsubhr-sens-anemia2.pptx
+++ b/docs/pptx/carbo/jx-carbo-linsubhr-sens-anemia2.pptx
@@ -5339,7 +5339,7 @@
           <p:spPr>
             <a:xfrm>
               <a:off x="817517" y="1896563"/>
-              <a:ext cx="6169365" cy="82021"/>
+              <a:ext cx="6833128" cy="82021"/>
             </a:xfrm>
             <a:prstGeom prst="rect">
               <a:avLst/>
@@ -5371,7 +5371,7 @@
                   <a:latin typeface="Helvetica"/>
                   <a:cs typeface="Helvetica"/>
                 </a:rPr>
-                <a:t>subHR per 0.1 ratio decline: 1.13 (1.05-1.21), p = 0.001  |  per IQR decline (Δ = 0.28): 1.40 (1.14-1.71)  |  IQR: [0.70, 0.98]</a:t>
+                <a:t>subHR per 0.1 ratio decline: 1.13 (1.05-1.21), p_Bonf = 0.008 (n = 6)  |  per IQR decline (Δ = 0.28): 1.40 (1.14-1.71)  |  IQR: [0.70, 0.98]</a:t>
               </a:r>
             </a:p>
           </p:txBody>

--- a/docs/pptx/carbo/jx-carbo-linsubhr-sens-anemia2.pptx
+++ b/docs/pptx/carbo/jx-carbo-linsubhr-sens-anemia2.pptx
@@ -5062,8 +5062,8 @@
           </p:nvSpPr>
           <p:spPr>
             <a:xfrm>
-              <a:off x="2155289" y="5785772"/>
-              <a:ext cx="155356" cy="80101"/>
+              <a:off x="2152181" y="5785772"/>
+              <a:ext cx="161574" cy="80101"/>
             </a:xfrm>
             <a:prstGeom prst="rect">
               <a:avLst/>
@@ -5095,7 +5095,7 @@
                   <a:latin typeface="Helvetica"/>
                   <a:cs typeface="Helvetica"/>
                 </a:rPr>
-                <a:t>0.6</a:t>
+                <a:t>-40</a:t>
               </a:r>
             </a:p>
           </p:txBody>
@@ -5108,8 +5108,8 @@
           </p:nvSpPr>
           <p:spPr>
             <a:xfrm>
-              <a:off x="3887213" y="5785772"/>
-              <a:ext cx="155356" cy="80101"/>
+              <a:off x="3884104" y="5785772"/>
+              <a:ext cx="161574" cy="80101"/>
             </a:xfrm>
             <a:prstGeom prst="rect">
               <a:avLst/>
@@ -5141,7 +5141,7 @@
                   <a:latin typeface="Helvetica"/>
                   <a:cs typeface="Helvetica"/>
                 </a:rPr>
-                <a:t>0.8</a:t>
+                <a:t>-20</a:t>
               </a:r>
             </a:p>
           </p:txBody>
@@ -5154,8 +5154,8 @@
           </p:nvSpPr>
           <p:spPr>
             <a:xfrm>
-              <a:off x="5619136" y="5785772"/>
-              <a:ext cx="155356" cy="80101"/>
+              <a:off x="5665725" y="5785772"/>
+              <a:ext cx="62179" cy="80101"/>
             </a:xfrm>
             <a:prstGeom prst="rect">
               <a:avLst/>
@@ -5187,7 +5187,7 @@
                   <a:latin typeface="Helvetica"/>
                   <a:cs typeface="Helvetica"/>
                 </a:rPr>
-                <a:t>1.0</a:t>
+                <a:t>0</a:t>
               </a:r>
             </a:p>
           </p:txBody>
@@ -5200,8 +5200,8 @@
           </p:nvSpPr>
           <p:spPr>
             <a:xfrm>
-              <a:off x="7351060" y="5785772"/>
-              <a:ext cx="155356" cy="80101"/>
+              <a:off x="7366559" y="5785772"/>
+              <a:ext cx="124358" cy="80101"/>
             </a:xfrm>
             <a:prstGeom prst="rect">
               <a:avLst/>
@@ -5233,7 +5233,7 @@
                   <a:latin typeface="Helvetica"/>
                   <a:cs typeface="Helvetica"/>
                 </a:rPr>
-                <a:t>1.2</a:t>
+                <a:t>20</a:t>
               </a:r>
             </a:p>
           </p:txBody>
@@ -5246,8 +5246,8 @@
           </p:nvSpPr>
           <p:spPr>
             <a:xfrm>
-              <a:off x="2691419" y="5925448"/>
-              <a:ext cx="4051889" cy="100218"/>
+              <a:off x="1561815" y="5925448"/>
+              <a:ext cx="6311097" cy="100218"/>
             </a:xfrm>
             <a:prstGeom prst="rect">
               <a:avLst/>
@@ -5279,7 +5279,7 @@
                   <a:latin typeface="Helvetica"/>
                   <a:cs typeface="Helvetica"/>
                 </a:rPr>
-                <a:t>Sensitivity eGFR Ratio (CKD-EPI 2012 CysC / CKD-EPI 2021 Cr)</a:t>
+                <a:t>Sensitivity eGFR Difference (%): 100 × (CKD-EPI 2012 CysC − CKD-EPI 2021 Cr) / CKD-EPI 2021 Cr</a:t>
               </a:r>
             </a:p>
           </p:txBody>
@@ -5339,7 +5339,7 @@
           <p:spPr>
             <a:xfrm>
               <a:off x="817517" y="1896563"/>
-              <a:ext cx="6833128" cy="82021"/>
+              <a:ext cx="6959864" cy="82021"/>
             </a:xfrm>
             <a:prstGeom prst="rect">
               <a:avLst/>
@@ -5371,7 +5371,7 @@
                   <a:latin typeface="Helvetica"/>
                   <a:cs typeface="Helvetica"/>
                 </a:rPr>
-                <a:t>subHR per 0.1 ratio decline: 1.13 (1.05-1.21), p_Bonf = 0.008 (n = 6)  |  per IQR decline (Δ = 0.28): 1.40 (1.14-1.71)  |  IQR: [0.70, 0.98]</a:t>
+                <a:t>subHR per 10 % decline: 1.13 (1.05-1.21), p_Bonf = 0.008 (n = 6)  |  per IQR decline (Δ = 28.0 %): 1.40 (1.14-1.71)  |  IQR: [-30.0, -2.0] %</a:t>
               </a:r>
             </a:p>
           </p:txBody>

--- a/docs/pptx/carbo/jx-carbo-linsubhr-sens-anemia2.pptx
+++ b/docs/pptx/carbo/jx-carbo-linsubhr-sens-anemia2.pptx
@@ -2265,34 +2265,26 @@
         </p:sp>
         <p:sp>
           <p:nvSpPr>
-            <p:cNvPr id="4" name="pl4"/>
+            <p:cNvPr id="4" name="rc4"/>
             <p:cNvSpPr/>
             <p:nvPr/>
           </p:nvSpPr>
           <p:spPr>
             <a:xfrm>
-              <a:off x="817517" y="5142518"/>
-              <a:ext cx="7799693" cy="0"/>
+              <a:off x="457200" y="1600200"/>
+              <a:ext cx="8229600" cy="4525962"/>
             </a:xfrm>
-            <a:custGeom>
+            <a:prstGeom prst="rect">
               <a:avLst/>
-              <a:pathLst>
-                <a:path w="7799693" h="0">
-                  <a:moveTo>
-                    <a:pt x="0" y="0"/>
-                  </a:moveTo>
-                  <a:lnTo>
-                    <a:pt x="7799693" y="0"/>
-                  </a:lnTo>
-                  <a:lnTo>
-                    <a:pt x="7799693" y="0"/>
-                  </a:lnTo>
-                </a:path>
-              </a:pathLst>
-            </a:custGeom>
-            <a:ln w="6775" cap="flat">
+            </a:prstGeom>
+            <a:solidFill>
+              <a:srgbClr val="FFFFFF">
+                <a:alpha val="100000"/>
+              </a:srgbClr>
+            </a:solidFill>
+            <a:ln w="13550" cap="rnd">
               <a:solidFill>
-                <a:srgbClr val="EBEBEB">
+                <a:srgbClr val="FFFFFF">
                   <a:alpha val="100000"/>
                 </a:srgbClr>
               </a:solidFill>
@@ -2314,21 +2306,21 @@
           </p:nvSpPr>
           <p:spPr>
             <a:xfrm>
-              <a:off x="817517" y="4313054"/>
-              <a:ext cx="7799693" cy="0"/>
+              <a:off x="887106" y="3250627"/>
+              <a:ext cx="7660515" cy="0"/>
             </a:xfrm>
             <a:custGeom>
               <a:avLst/>
               <a:pathLst>
-                <a:path w="7799693" h="0">
+                <a:path w="7660515" h="0">
                   <a:moveTo>
                     <a:pt x="0" y="0"/>
                   </a:moveTo>
                   <a:lnTo>
-                    <a:pt x="7799693" y="0"/>
-                  </a:lnTo>
-                  <a:lnTo>
-                    <a:pt x="7799693" y="0"/>
+                    <a:pt x="7660515" y="0"/>
+                  </a:lnTo>
+                  <a:lnTo>
+                    <a:pt x="7660515" y="0"/>
                   </a:lnTo>
                 </a:path>
               </a:pathLst>
@@ -2357,21 +2349,21 @@
           </p:nvSpPr>
           <p:spPr>
             <a:xfrm>
-              <a:off x="817517" y="3483591"/>
-              <a:ext cx="7799693" cy="0"/>
+              <a:off x="887106" y="2951293"/>
+              <a:ext cx="7660515" cy="0"/>
             </a:xfrm>
             <a:custGeom>
               <a:avLst/>
               <a:pathLst>
-                <a:path w="7799693" h="0">
+                <a:path w="7660515" h="0">
                   <a:moveTo>
                     <a:pt x="0" y="0"/>
                   </a:moveTo>
                   <a:lnTo>
-                    <a:pt x="7799693" y="0"/>
-                  </a:lnTo>
-                  <a:lnTo>
-                    <a:pt x="7799693" y="0"/>
+                    <a:pt x="7660515" y="0"/>
+                  </a:lnTo>
+                  <a:lnTo>
+                    <a:pt x="7660515" y="0"/>
                   </a:lnTo>
                 </a:path>
               </a:pathLst>
@@ -2400,21 +2392,21 @@
           </p:nvSpPr>
           <p:spPr>
             <a:xfrm>
-              <a:off x="817517" y="2654127"/>
-              <a:ext cx="7799693" cy="0"/>
+              <a:off x="887106" y="2651959"/>
+              <a:ext cx="7660515" cy="0"/>
             </a:xfrm>
             <a:custGeom>
               <a:avLst/>
               <a:pathLst>
-                <a:path w="7799693" h="0">
+                <a:path w="7660515" h="0">
                   <a:moveTo>
                     <a:pt x="0" y="0"/>
                   </a:moveTo>
                   <a:lnTo>
-                    <a:pt x="7799693" y="0"/>
-                  </a:lnTo>
-                  <a:lnTo>
-                    <a:pt x="7799693" y="0"/>
+                    <a:pt x="7660515" y="0"/>
+                  </a:lnTo>
+                  <a:lnTo>
+                    <a:pt x="7660515" y="0"/>
                   </a:lnTo>
                 </a:path>
               </a:pathLst>
@@ -2443,21 +2435,21 @@
           </p:nvSpPr>
           <p:spPr>
             <a:xfrm>
-              <a:off x="1367006" y="2073503"/>
-              <a:ext cx="0" cy="3649639"/>
+              <a:off x="887106" y="2352625"/>
+              <a:ext cx="7660515" cy="0"/>
             </a:xfrm>
             <a:custGeom>
               <a:avLst/>
               <a:pathLst>
-                <a:path w="0" h="3649639">
+                <a:path w="7660515" h="0">
                   <a:moveTo>
-                    <a:pt x="0" y="3649639"/>
+                    <a:pt x="0" y="0"/>
                   </a:moveTo>
                   <a:lnTo>
-                    <a:pt x="0" y="0"/>
-                  </a:lnTo>
-                  <a:lnTo>
-                    <a:pt x="0" y="0"/>
+                    <a:pt x="7660515" y="0"/>
+                  </a:lnTo>
+                  <a:lnTo>
+                    <a:pt x="7660515" y="0"/>
                   </a:lnTo>
                 </a:path>
               </a:pathLst>
@@ -2486,15 +2478,15 @@
           </p:nvSpPr>
           <p:spPr>
             <a:xfrm>
-              <a:off x="3098929" y="2073503"/>
-              <a:ext cx="0" cy="3649639"/>
+              <a:off x="1426790" y="2143092"/>
+              <a:ext cx="0" cy="1317069"/>
             </a:xfrm>
             <a:custGeom>
               <a:avLst/>
               <a:pathLst>
-                <a:path w="0" h="3649639">
+                <a:path w="0" h="1317069">
                   <a:moveTo>
-                    <a:pt x="0" y="3649639"/>
+                    <a:pt x="0" y="1317069"/>
                   </a:moveTo>
                   <a:lnTo>
                     <a:pt x="0" y="0"/>
@@ -2529,15 +2521,15 @@
           </p:nvSpPr>
           <p:spPr>
             <a:xfrm>
-              <a:off x="4830853" y="2073503"/>
-              <a:ext cx="0" cy="3649639"/>
+              <a:off x="3127809" y="2143092"/>
+              <a:ext cx="0" cy="1317069"/>
             </a:xfrm>
             <a:custGeom>
               <a:avLst/>
               <a:pathLst>
-                <a:path w="0" h="3649639">
+                <a:path w="0" h="1317069">
                   <a:moveTo>
-                    <a:pt x="0" y="3649639"/>
+                    <a:pt x="0" y="1317069"/>
                   </a:moveTo>
                   <a:lnTo>
                     <a:pt x="0" y="0"/>
@@ -2572,15 +2564,15 @@
           </p:nvSpPr>
           <p:spPr>
             <a:xfrm>
-              <a:off x="6562776" y="2073503"/>
-              <a:ext cx="0" cy="3649639"/>
+              <a:off x="4828828" y="2143092"/>
+              <a:ext cx="0" cy="1317069"/>
             </a:xfrm>
             <a:custGeom>
               <a:avLst/>
               <a:pathLst>
-                <a:path w="0" h="3649639">
+                <a:path w="0" h="1317069">
                   <a:moveTo>
-                    <a:pt x="0" y="3649639"/>
+                    <a:pt x="0" y="1317069"/>
                   </a:moveTo>
                   <a:lnTo>
                     <a:pt x="0" y="0"/>
@@ -2615,15 +2607,15 @@
           </p:nvSpPr>
           <p:spPr>
             <a:xfrm>
-              <a:off x="8294700" y="2073503"/>
-              <a:ext cx="0" cy="3649639"/>
+              <a:off x="6529847" y="2143092"/>
+              <a:ext cx="0" cy="1317069"/>
             </a:xfrm>
             <a:custGeom>
               <a:avLst/>
               <a:pathLst>
-                <a:path w="0" h="3649639">
+                <a:path w="0" h="1317069">
                   <a:moveTo>
-                    <a:pt x="0" y="3649639"/>
+                    <a:pt x="0" y="1317069"/>
                   </a:moveTo>
                   <a:lnTo>
                     <a:pt x="0" y="0"/>
@@ -2658,26 +2650,26 @@
           </p:nvSpPr>
           <p:spPr>
             <a:xfrm>
-              <a:off x="817517" y="5557249"/>
-              <a:ext cx="7799693" cy="0"/>
+              <a:off x="8230866" y="2143092"/>
+              <a:ext cx="0" cy="1317069"/>
             </a:xfrm>
             <a:custGeom>
               <a:avLst/>
               <a:pathLst>
-                <a:path w="7799693" h="0">
+                <a:path w="0" h="1317069">
                   <a:moveTo>
+                    <a:pt x="0" y="1317069"/>
+                  </a:moveTo>
+                  <a:lnTo>
                     <a:pt x="0" y="0"/>
-                  </a:moveTo>
-                  <a:lnTo>
-                    <a:pt x="7799693" y="0"/>
-                  </a:lnTo>
-                  <a:lnTo>
-                    <a:pt x="7799693" y="0"/>
+                  </a:lnTo>
+                  <a:lnTo>
+                    <a:pt x="0" y="0"/>
                   </a:lnTo>
                 </a:path>
               </a:pathLst>
             </a:custGeom>
-            <a:ln w="13550" cap="flat">
+            <a:ln w="6775" cap="flat">
               <a:solidFill>
                 <a:srgbClr val="EBEBEB">
                   <a:alpha val="100000"/>
@@ -2701,21 +2693,21 @@
           </p:nvSpPr>
           <p:spPr>
             <a:xfrm>
-              <a:off x="817517" y="4727786"/>
-              <a:ext cx="7799693" cy="0"/>
+              <a:off x="887106" y="3400294"/>
+              <a:ext cx="7660515" cy="0"/>
             </a:xfrm>
             <a:custGeom>
               <a:avLst/>
               <a:pathLst>
-                <a:path w="7799693" h="0">
+                <a:path w="7660515" h="0">
                   <a:moveTo>
                     <a:pt x="0" y="0"/>
                   </a:moveTo>
                   <a:lnTo>
-                    <a:pt x="7799693" y="0"/>
-                  </a:lnTo>
-                  <a:lnTo>
-                    <a:pt x="7799693" y="0"/>
+                    <a:pt x="7660515" y="0"/>
+                  </a:lnTo>
+                  <a:lnTo>
+                    <a:pt x="7660515" y="0"/>
                   </a:lnTo>
                 </a:path>
               </a:pathLst>
@@ -2744,21 +2736,21 @@
           </p:nvSpPr>
           <p:spPr>
             <a:xfrm>
-              <a:off x="817517" y="3898322"/>
-              <a:ext cx="7799693" cy="0"/>
+              <a:off x="887106" y="3100960"/>
+              <a:ext cx="7660515" cy="0"/>
             </a:xfrm>
             <a:custGeom>
               <a:avLst/>
               <a:pathLst>
-                <a:path w="7799693" h="0">
+                <a:path w="7660515" h="0">
                   <a:moveTo>
                     <a:pt x="0" y="0"/>
                   </a:moveTo>
                   <a:lnTo>
-                    <a:pt x="7799693" y="0"/>
-                  </a:lnTo>
-                  <a:lnTo>
-                    <a:pt x="7799693" y="0"/>
+                    <a:pt x="7660515" y="0"/>
+                  </a:lnTo>
+                  <a:lnTo>
+                    <a:pt x="7660515" y="0"/>
                   </a:lnTo>
                 </a:path>
               </a:pathLst>
@@ -2787,21 +2779,21 @@
           </p:nvSpPr>
           <p:spPr>
             <a:xfrm>
-              <a:off x="817517" y="3068859"/>
-              <a:ext cx="7799693" cy="0"/>
+              <a:off x="887106" y="2801626"/>
+              <a:ext cx="7660515" cy="0"/>
             </a:xfrm>
             <a:custGeom>
               <a:avLst/>
               <a:pathLst>
-                <a:path w="7799693" h="0">
+                <a:path w="7660515" h="0">
                   <a:moveTo>
                     <a:pt x="0" y="0"/>
                   </a:moveTo>
                   <a:lnTo>
-                    <a:pt x="7799693" y="0"/>
-                  </a:lnTo>
-                  <a:lnTo>
-                    <a:pt x="7799693" y="0"/>
+                    <a:pt x="7660515" y="0"/>
+                  </a:lnTo>
+                  <a:lnTo>
+                    <a:pt x="7660515" y="0"/>
                   </a:lnTo>
                 </a:path>
               </a:pathLst>
@@ -2830,21 +2822,21 @@
           </p:nvSpPr>
           <p:spPr>
             <a:xfrm>
-              <a:off x="817517" y="2239395"/>
-              <a:ext cx="7799693" cy="0"/>
+              <a:off x="887106" y="2502292"/>
+              <a:ext cx="7660515" cy="0"/>
             </a:xfrm>
             <a:custGeom>
               <a:avLst/>
               <a:pathLst>
-                <a:path w="7799693" h="0">
+                <a:path w="7660515" h="0">
                   <a:moveTo>
                     <a:pt x="0" y="0"/>
                   </a:moveTo>
                   <a:lnTo>
-                    <a:pt x="7799693" y="0"/>
-                  </a:lnTo>
-                  <a:lnTo>
-                    <a:pt x="7799693" y="0"/>
+                    <a:pt x="7660515" y="0"/>
+                  </a:lnTo>
+                  <a:lnTo>
+                    <a:pt x="7660515" y="0"/>
                   </a:lnTo>
                 </a:path>
               </a:pathLst>
@@ -2873,21 +2865,21 @@
           </p:nvSpPr>
           <p:spPr>
             <a:xfrm>
-              <a:off x="2232968" y="2073503"/>
-              <a:ext cx="0" cy="3649639"/>
+              <a:off x="887106" y="2202958"/>
+              <a:ext cx="7660515" cy="0"/>
             </a:xfrm>
             <a:custGeom>
               <a:avLst/>
               <a:pathLst>
-                <a:path w="0" h="3649639">
+                <a:path w="7660515" h="0">
                   <a:moveTo>
-                    <a:pt x="0" y="3649639"/>
+                    <a:pt x="0" y="0"/>
                   </a:moveTo>
                   <a:lnTo>
-                    <a:pt x="0" y="0"/>
-                  </a:lnTo>
-                  <a:lnTo>
-                    <a:pt x="0" y="0"/>
+                    <a:pt x="7660515" y="0"/>
+                  </a:lnTo>
+                  <a:lnTo>
+                    <a:pt x="7660515" y="0"/>
                   </a:lnTo>
                 </a:path>
               </a:pathLst>
@@ -2916,15 +2908,15 @@
           </p:nvSpPr>
           <p:spPr>
             <a:xfrm>
-              <a:off x="3964891" y="2073503"/>
-              <a:ext cx="0" cy="3649639"/>
+              <a:off x="2277299" y="2143092"/>
+              <a:ext cx="0" cy="1317069"/>
             </a:xfrm>
             <a:custGeom>
               <a:avLst/>
               <a:pathLst>
-                <a:path w="0" h="3649639">
+                <a:path w="0" h="1317069">
                   <a:moveTo>
-                    <a:pt x="0" y="3649639"/>
+                    <a:pt x="0" y="1317069"/>
                   </a:moveTo>
                   <a:lnTo>
                     <a:pt x="0" y="0"/>
@@ -2959,15 +2951,15 @@
           </p:nvSpPr>
           <p:spPr>
             <a:xfrm>
-              <a:off x="5696815" y="2073503"/>
-              <a:ext cx="0" cy="3649639"/>
+              <a:off x="3978318" y="2143092"/>
+              <a:ext cx="0" cy="1317069"/>
             </a:xfrm>
             <a:custGeom>
               <a:avLst/>
               <a:pathLst>
-                <a:path w="0" h="3649639">
+                <a:path w="0" h="1317069">
                   <a:moveTo>
-                    <a:pt x="0" y="3649639"/>
+                    <a:pt x="0" y="1317069"/>
                   </a:moveTo>
                   <a:lnTo>
                     <a:pt x="0" y="0"/>
@@ -3002,15 +2994,15 @@
           </p:nvSpPr>
           <p:spPr>
             <a:xfrm>
-              <a:off x="7428738" y="2073503"/>
-              <a:ext cx="0" cy="3649639"/>
+              <a:off x="5679337" y="2143092"/>
+              <a:ext cx="0" cy="1317069"/>
             </a:xfrm>
             <a:custGeom>
               <a:avLst/>
               <a:pathLst>
-                <a:path w="0" h="3649639">
+                <a:path w="0" h="1317069">
                   <a:moveTo>
-                    <a:pt x="0" y="3649639"/>
+                    <a:pt x="0" y="1317069"/>
                   </a:moveTo>
                   <a:lnTo>
                     <a:pt x="0" y="0"/>
@@ -3039,618 +3031,661 @@
         </p:sp>
         <p:sp>
           <p:nvSpPr>
-            <p:cNvPr id="22" name="pg22"/>
+            <p:cNvPr id="22" name="pl22"/>
             <p:cNvSpPr/>
             <p:nvPr/>
           </p:nvSpPr>
           <p:spPr>
             <a:xfrm>
-              <a:off x="1172049" y="3902882"/>
-              <a:ext cx="7090630" cy="1311106"/>
+              <a:off x="7380356" y="2143092"/>
+              <a:ext cx="0" cy="1317069"/>
             </a:xfrm>
             <a:custGeom>
               <a:avLst/>
               <a:pathLst>
-                <a:path w="7090630" h="1311106">
+                <a:path w="0" h="1317069">
+                  <a:moveTo>
+                    <a:pt x="0" y="1317069"/>
+                  </a:moveTo>
+                  <a:lnTo>
+                    <a:pt x="0" y="0"/>
+                  </a:lnTo>
+                  <a:lnTo>
+                    <a:pt x="0" y="0"/>
+                  </a:lnTo>
+                </a:path>
+              </a:pathLst>
+            </a:custGeom>
+            <a:ln w="13550" cap="flat">
+              <a:solidFill>
+                <a:srgbClr val="EBEBEB">
+                  <a:alpha val="100000"/>
+                </a:srgbClr>
+              </a:solidFill>
+              <a:prstDash val="solid"/>
+              <a:round/>
+            </a:ln>
+          </p:spPr>
+          <p:txBody>
+            <a:bodyPr/>
+            <a:lstStyle/>
+            <a:p/>
+          </p:txBody>
+        </p:sp>
+        <p:sp>
+          <p:nvSpPr>
+            <p:cNvPr id="23" name="pg23"/>
+            <p:cNvSpPr/>
+            <p:nvPr/>
+          </p:nvSpPr>
+          <p:spPr>
+            <a:xfrm>
+              <a:off x="1235312" y="2803271"/>
+              <a:ext cx="6964104" cy="473147"/>
+            </a:xfrm>
+            <a:custGeom>
+              <a:avLst/>
+              <a:pathLst>
+                <a:path w="6964104" h="473147">
                   <a:moveTo>
                     <a:pt x="0" y="0"/>
                   </a:moveTo>
                   <a:lnTo>
-                    <a:pt x="71622" y="26073"/>
-                  </a:lnTo>
-                  <a:lnTo>
-                    <a:pt x="143245" y="51735"/>
-                  </a:lnTo>
-                  <a:lnTo>
-                    <a:pt x="214867" y="76993"/>
-                  </a:lnTo>
-                  <a:lnTo>
-                    <a:pt x="286490" y="101852"/>
-                  </a:lnTo>
-                  <a:lnTo>
-                    <a:pt x="358112" y="126320"/>
-                  </a:lnTo>
-                  <a:lnTo>
-                    <a:pt x="429735" y="150402"/>
-                  </a:lnTo>
-                  <a:lnTo>
-                    <a:pt x="501357" y="174105"/>
-                  </a:lnTo>
-                  <a:lnTo>
-                    <a:pt x="572980" y="197434"/>
-                  </a:lnTo>
-                  <a:lnTo>
-                    <a:pt x="644602" y="220396"/>
-                  </a:lnTo>
-                  <a:lnTo>
-                    <a:pt x="716225" y="242995"/>
-                  </a:lnTo>
-                  <a:lnTo>
-                    <a:pt x="787847" y="265239"/>
-                  </a:lnTo>
-                  <a:lnTo>
-                    <a:pt x="859470" y="287132"/>
-                  </a:lnTo>
-                  <a:lnTo>
-                    <a:pt x="931092" y="308680"/>
-                  </a:lnTo>
-                  <a:lnTo>
-                    <a:pt x="1002715" y="329888"/>
-                  </a:lnTo>
-                  <a:lnTo>
-                    <a:pt x="1074337" y="350762"/>
-                  </a:lnTo>
-                  <a:lnTo>
-                    <a:pt x="1145960" y="371307"/>
-                  </a:lnTo>
-                  <a:lnTo>
-                    <a:pt x="1217582" y="391528"/>
-                  </a:lnTo>
-                  <a:lnTo>
-                    <a:pt x="1289205" y="411431"/>
-                  </a:lnTo>
-                  <a:lnTo>
-                    <a:pt x="1360827" y="431020"/>
-                  </a:lnTo>
-                  <a:lnTo>
-                    <a:pt x="1432450" y="450300"/>
-                  </a:lnTo>
-                  <a:lnTo>
-                    <a:pt x="1504073" y="469276"/>
-                  </a:lnTo>
-                  <a:lnTo>
-                    <a:pt x="1575695" y="487953"/>
-                  </a:lnTo>
-                  <a:lnTo>
-                    <a:pt x="1647318" y="506336"/>
-                  </a:lnTo>
-                  <a:lnTo>
-                    <a:pt x="1718940" y="524429"/>
-                  </a:lnTo>
-                  <a:lnTo>
-                    <a:pt x="1790563" y="542237"/>
-                  </a:lnTo>
-                  <a:lnTo>
-                    <a:pt x="1862185" y="559765"/>
-                  </a:lnTo>
-                  <a:lnTo>
-                    <a:pt x="1933808" y="577016"/>
-                  </a:lnTo>
-                  <a:lnTo>
-                    <a:pt x="2005430" y="593995"/>
-                  </a:lnTo>
-                  <a:lnTo>
-                    <a:pt x="2077053" y="610707"/>
-                  </a:lnTo>
-                  <a:lnTo>
-                    <a:pt x="2148675" y="627155"/>
-                  </a:lnTo>
-                  <a:lnTo>
-                    <a:pt x="2220298" y="643344"/>
-                  </a:lnTo>
-                  <a:lnTo>
-                    <a:pt x="2291920" y="659278"/>
-                  </a:lnTo>
-                  <a:lnTo>
-                    <a:pt x="2363543" y="674961"/>
-                  </a:lnTo>
-                  <a:lnTo>
-                    <a:pt x="2435165" y="690396"/>
-                  </a:lnTo>
-                  <a:lnTo>
-                    <a:pt x="2506788" y="705588"/>
-                  </a:lnTo>
-                  <a:lnTo>
-                    <a:pt x="2578410" y="720541"/>
-                  </a:lnTo>
-                  <a:lnTo>
-                    <a:pt x="2650033" y="735259"/>
-                  </a:lnTo>
-                  <a:lnTo>
-                    <a:pt x="2721655" y="749744"/>
-                  </a:lnTo>
-                  <a:lnTo>
-                    <a:pt x="2793278" y="764001"/>
-                  </a:lnTo>
-                  <a:lnTo>
-                    <a:pt x="2864901" y="778033"/>
-                  </a:lnTo>
-                  <a:lnTo>
-                    <a:pt x="2936523" y="791844"/>
-                  </a:lnTo>
-                  <a:lnTo>
-                    <a:pt x="3008146" y="805438"/>
-                  </a:lnTo>
-                  <a:lnTo>
-                    <a:pt x="3079768" y="818817"/>
-                  </a:lnTo>
-                  <a:lnTo>
-                    <a:pt x="3151391" y="826614"/>
-                  </a:lnTo>
-                  <a:lnTo>
-                    <a:pt x="3223013" y="829774"/>
-                  </a:lnTo>
-                  <a:lnTo>
-                    <a:pt x="3294636" y="832922"/>
-                  </a:lnTo>
-                  <a:lnTo>
-                    <a:pt x="3366258" y="836058"/>
-                  </a:lnTo>
-                  <a:lnTo>
-                    <a:pt x="3437881" y="839181"/>
-                  </a:lnTo>
-                  <a:lnTo>
-                    <a:pt x="3509503" y="842293"/>
-                  </a:lnTo>
-                  <a:lnTo>
-                    <a:pt x="3581126" y="845393"/>
-                  </a:lnTo>
-                  <a:lnTo>
-                    <a:pt x="3652748" y="848481"/>
-                  </a:lnTo>
-                  <a:lnTo>
-                    <a:pt x="3724371" y="851557"/>
-                  </a:lnTo>
-                  <a:lnTo>
-                    <a:pt x="3795993" y="854622"/>
-                  </a:lnTo>
-                  <a:lnTo>
-                    <a:pt x="3867616" y="857675"/>
-                  </a:lnTo>
-                  <a:lnTo>
-                    <a:pt x="3939238" y="860716"/>
-                  </a:lnTo>
-                  <a:lnTo>
-                    <a:pt x="4010861" y="863746"/>
-                  </a:lnTo>
-                  <a:lnTo>
-                    <a:pt x="4082483" y="866764"/>
-                  </a:lnTo>
-                  <a:lnTo>
-                    <a:pt x="4154106" y="869770"/>
-                  </a:lnTo>
-                  <a:lnTo>
-                    <a:pt x="4225729" y="872765"/>
-                  </a:lnTo>
-                  <a:lnTo>
-                    <a:pt x="4297351" y="875749"/>
-                  </a:lnTo>
-                  <a:lnTo>
-                    <a:pt x="4368974" y="878721"/>
-                  </a:lnTo>
-                  <a:lnTo>
-                    <a:pt x="4440596" y="881682"/>
-                  </a:lnTo>
-                  <a:lnTo>
-                    <a:pt x="4512219" y="884632"/>
-                  </a:lnTo>
-                  <a:lnTo>
-                    <a:pt x="4583841" y="887570"/>
-                  </a:lnTo>
-                  <a:lnTo>
-                    <a:pt x="4655464" y="890497"/>
-                  </a:lnTo>
-                  <a:lnTo>
-                    <a:pt x="4727086" y="893413"/>
-                  </a:lnTo>
-                  <a:lnTo>
-                    <a:pt x="4798709" y="896318"/>
-                  </a:lnTo>
-                  <a:lnTo>
-                    <a:pt x="4870331" y="899211"/>
-                  </a:lnTo>
-                  <a:lnTo>
-                    <a:pt x="4941954" y="902094"/>
-                  </a:lnTo>
-                  <a:lnTo>
-                    <a:pt x="5013576" y="904966"/>
-                  </a:lnTo>
-                  <a:lnTo>
-                    <a:pt x="5085199" y="907826"/>
-                  </a:lnTo>
-                  <a:lnTo>
-                    <a:pt x="5156821" y="910676"/>
-                  </a:lnTo>
-                  <a:lnTo>
-                    <a:pt x="5228444" y="913515"/>
-                  </a:lnTo>
-                  <a:lnTo>
-                    <a:pt x="5300066" y="916343"/>
-                  </a:lnTo>
-                  <a:lnTo>
-                    <a:pt x="5371689" y="919160"/>
-                  </a:lnTo>
-                  <a:lnTo>
-                    <a:pt x="5443311" y="921967"/>
-                  </a:lnTo>
-                  <a:lnTo>
-                    <a:pt x="5514934" y="924763"/>
-                  </a:lnTo>
-                  <a:lnTo>
-                    <a:pt x="5586557" y="927548"/>
-                  </a:lnTo>
-                  <a:lnTo>
-                    <a:pt x="5658179" y="930322"/>
-                  </a:lnTo>
-                  <a:lnTo>
-                    <a:pt x="5729802" y="933086"/>
-                  </a:lnTo>
-                  <a:lnTo>
-                    <a:pt x="5801424" y="935839"/>
-                  </a:lnTo>
-                  <a:lnTo>
-                    <a:pt x="5873047" y="938582"/>
-                  </a:lnTo>
-                  <a:lnTo>
-                    <a:pt x="5944669" y="941315"/>
-                  </a:lnTo>
-                  <a:lnTo>
-                    <a:pt x="6016292" y="944037"/>
-                  </a:lnTo>
-                  <a:lnTo>
-                    <a:pt x="6087914" y="946748"/>
-                  </a:lnTo>
-                  <a:lnTo>
-                    <a:pt x="6159537" y="949449"/>
-                  </a:lnTo>
-                  <a:lnTo>
-                    <a:pt x="6231159" y="952140"/>
-                  </a:lnTo>
-                  <a:lnTo>
-                    <a:pt x="6302782" y="954821"/>
-                  </a:lnTo>
-                  <a:lnTo>
-                    <a:pt x="6374404" y="957491"/>
-                  </a:lnTo>
-                  <a:lnTo>
-                    <a:pt x="6446027" y="960151"/>
-                  </a:lnTo>
-                  <a:lnTo>
-                    <a:pt x="6517649" y="962801"/>
-                  </a:lnTo>
-                  <a:lnTo>
-                    <a:pt x="6589272" y="965441"/>
-                  </a:lnTo>
-                  <a:lnTo>
-                    <a:pt x="6660894" y="968071"/>
-                  </a:lnTo>
-                  <a:lnTo>
-                    <a:pt x="6732517" y="970691"/>
-                  </a:lnTo>
-                  <a:lnTo>
-                    <a:pt x="6804139" y="973301"/>
-                  </a:lnTo>
-                  <a:lnTo>
-                    <a:pt x="6875762" y="975901"/>
-                  </a:lnTo>
-                  <a:lnTo>
-                    <a:pt x="6947385" y="978491"/>
-                  </a:lnTo>
-                  <a:lnTo>
-                    <a:pt x="7019007" y="981071"/>
-                  </a:lnTo>
-                  <a:lnTo>
-                    <a:pt x="7090630" y="983641"/>
-                  </a:lnTo>
-                  <a:lnTo>
-                    <a:pt x="7090630" y="1311106"/>
-                  </a:lnTo>
-                  <a:lnTo>
-                    <a:pt x="7019007" y="1305609"/>
-                  </a:lnTo>
-                  <a:lnTo>
-                    <a:pt x="6947385" y="1300025"/>
-                  </a:lnTo>
-                  <a:lnTo>
-                    <a:pt x="6875762" y="1294351"/>
-                  </a:lnTo>
-                  <a:lnTo>
-                    <a:pt x="6804139" y="1288586"/>
-                  </a:lnTo>
-                  <a:lnTo>
-                    <a:pt x="6732517" y="1282729"/>
-                  </a:lnTo>
-                  <a:lnTo>
-                    <a:pt x="6660894" y="1276778"/>
-                  </a:lnTo>
-                  <a:lnTo>
-                    <a:pt x="6589272" y="1270732"/>
-                  </a:lnTo>
-                  <a:lnTo>
-                    <a:pt x="6517649" y="1264589"/>
-                  </a:lnTo>
-                  <a:lnTo>
-                    <a:pt x="6446027" y="1258348"/>
-                  </a:lnTo>
-                  <a:lnTo>
-                    <a:pt x="6374404" y="1252006"/>
-                  </a:lnTo>
-                  <a:lnTo>
-                    <a:pt x="6302782" y="1245564"/>
-                  </a:lnTo>
-                  <a:lnTo>
-                    <a:pt x="6231159" y="1239018"/>
-                  </a:lnTo>
-                  <a:lnTo>
-                    <a:pt x="6159537" y="1232367"/>
-                  </a:lnTo>
-                  <a:lnTo>
-                    <a:pt x="6087914" y="1225610"/>
-                  </a:lnTo>
-                  <a:lnTo>
-                    <a:pt x="6016292" y="1218744"/>
-                  </a:lnTo>
-                  <a:lnTo>
-                    <a:pt x="5944669" y="1211769"/>
-                  </a:lnTo>
-                  <a:lnTo>
-                    <a:pt x="5873047" y="1204682"/>
-                  </a:lnTo>
-                  <a:lnTo>
-                    <a:pt x="5801424" y="1197481"/>
-                  </a:lnTo>
-                  <a:lnTo>
-                    <a:pt x="5729802" y="1190165"/>
-                  </a:lnTo>
-                  <a:lnTo>
-                    <a:pt x="5658179" y="1182732"/>
-                  </a:lnTo>
-                  <a:lnTo>
-                    <a:pt x="5586557" y="1175180"/>
-                  </a:lnTo>
-                  <a:lnTo>
-                    <a:pt x="5514934" y="1167507"/>
-                  </a:lnTo>
-                  <a:lnTo>
-                    <a:pt x="5443311" y="1159711"/>
-                  </a:lnTo>
-                  <a:lnTo>
-                    <a:pt x="5371689" y="1151790"/>
-                  </a:lnTo>
-                  <a:lnTo>
-                    <a:pt x="5300066" y="1143743"/>
-                  </a:lnTo>
-                  <a:lnTo>
-                    <a:pt x="5228444" y="1135566"/>
-                  </a:lnTo>
-                  <a:lnTo>
-                    <a:pt x="5156821" y="1127259"/>
-                  </a:lnTo>
-                  <a:lnTo>
-                    <a:pt x="5085199" y="1118819"/>
-                  </a:lnTo>
-                  <a:lnTo>
-                    <a:pt x="5013576" y="1110243"/>
-                  </a:lnTo>
-                  <a:lnTo>
-                    <a:pt x="4941954" y="1101530"/>
-                  </a:lnTo>
-                  <a:lnTo>
-                    <a:pt x="4870331" y="1092678"/>
-                  </a:lnTo>
-                  <a:lnTo>
-                    <a:pt x="4798709" y="1083684"/>
-                  </a:lnTo>
-                  <a:lnTo>
-                    <a:pt x="4727086" y="1074546"/>
-                  </a:lnTo>
-                  <a:lnTo>
-                    <a:pt x="4655464" y="1065262"/>
-                  </a:lnTo>
-                  <a:lnTo>
-                    <a:pt x="4583841" y="1055829"/>
-                  </a:lnTo>
-                  <a:lnTo>
-                    <a:pt x="4512219" y="1046244"/>
-                  </a:lnTo>
-                  <a:lnTo>
-                    <a:pt x="4440596" y="1036507"/>
-                  </a:lnTo>
-                  <a:lnTo>
-                    <a:pt x="4368974" y="1026613"/>
-                  </a:lnTo>
-                  <a:lnTo>
-                    <a:pt x="4297351" y="1016561"/>
-                  </a:lnTo>
-                  <a:lnTo>
-                    <a:pt x="4225729" y="1006349"/>
-                  </a:lnTo>
-                  <a:lnTo>
-                    <a:pt x="4154106" y="995972"/>
-                  </a:lnTo>
-                  <a:lnTo>
-                    <a:pt x="4082483" y="985430"/>
-                  </a:lnTo>
-                  <a:lnTo>
-                    <a:pt x="4010861" y="974718"/>
-                  </a:lnTo>
-                  <a:lnTo>
-                    <a:pt x="3939238" y="963835"/>
-                  </a:lnTo>
-                  <a:lnTo>
-                    <a:pt x="3867616" y="952778"/>
-                  </a:lnTo>
-                  <a:lnTo>
-                    <a:pt x="3795993" y="941544"/>
-                  </a:lnTo>
-                  <a:lnTo>
-                    <a:pt x="3724371" y="930130"/>
-                  </a:lnTo>
-                  <a:lnTo>
-                    <a:pt x="3652748" y="918533"/>
-                  </a:lnTo>
-                  <a:lnTo>
-                    <a:pt x="3581126" y="906750"/>
-                  </a:lnTo>
-                  <a:lnTo>
-                    <a:pt x="3509503" y="894779"/>
-                  </a:lnTo>
-                  <a:lnTo>
-                    <a:pt x="3437881" y="882616"/>
-                  </a:lnTo>
-                  <a:lnTo>
-                    <a:pt x="3366258" y="870259"/>
-                  </a:lnTo>
-                  <a:lnTo>
-                    <a:pt x="3294636" y="857703"/>
-                  </a:lnTo>
-                  <a:lnTo>
-                    <a:pt x="3223013" y="844946"/>
-                  </a:lnTo>
-                  <a:lnTo>
-                    <a:pt x="3151391" y="831986"/>
-                  </a:lnTo>
-                  <a:lnTo>
-                    <a:pt x="3079768" y="823442"/>
-                  </a:lnTo>
-                  <a:lnTo>
-                    <a:pt x="3008146" y="820258"/>
-                  </a:lnTo>
-                  <a:lnTo>
-                    <a:pt x="2936523" y="817062"/>
-                  </a:lnTo>
-                  <a:lnTo>
-                    <a:pt x="2864901" y="813854"/>
-                  </a:lnTo>
-                  <a:lnTo>
-                    <a:pt x="2793278" y="810633"/>
-                  </a:lnTo>
-                  <a:lnTo>
-                    <a:pt x="2721655" y="807400"/>
-                  </a:lnTo>
-                  <a:lnTo>
-                    <a:pt x="2650033" y="804154"/>
-                  </a:lnTo>
-                  <a:lnTo>
-                    <a:pt x="2578410" y="800896"/>
-                  </a:lnTo>
-                  <a:lnTo>
-                    <a:pt x="2506788" y="797626"/>
-                  </a:lnTo>
-                  <a:lnTo>
-                    <a:pt x="2435165" y="794343"/>
-                  </a:lnTo>
-                  <a:lnTo>
-                    <a:pt x="2363543" y="791047"/>
-                  </a:lnTo>
-                  <a:lnTo>
-                    <a:pt x="2291920" y="787739"/>
-                  </a:lnTo>
-                  <a:lnTo>
-                    <a:pt x="2220298" y="784418"/>
-                  </a:lnTo>
-                  <a:lnTo>
-                    <a:pt x="2148675" y="781085"/>
-                  </a:lnTo>
-                  <a:lnTo>
-                    <a:pt x="2077053" y="777738"/>
-                  </a:lnTo>
-                  <a:lnTo>
-                    <a:pt x="2005430" y="774379"/>
-                  </a:lnTo>
-                  <a:lnTo>
-                    <a:pt x="1933808" y="771007"/>
-                  </a:lnTo>
-                  <a:lnTo>
-                    <a:pt x="1862185" y="767622"/>
-                  </a:lnTo>
-                  <a:lnTo>
-                    <a:pt x="1790563" y="764224"/>
-                  </a:lnTo>
-                  <a:lnTo>
-                    <a:pt x="1718940" y="760813"/>
-                  </a:lnTo>
-                  <a:lnTo>
-                    <a:pt x="1647318" y="757389"/>
-                  </a:lnTo>
-                  <a:lnTo>
-                    <a:pt x="1575695" y="753952"/>
-                  </a:lnTo>
-                  <a:lnTo>
-                    <a:pt x="1504073" y="750502"/>
-                  </a:lnTo>
-                  <a:lnTo>
-                    <a:pt x="1432450" y="747038"/>
-                  </a:lnTo>
-                  <a:lnTo>
-                    <a:pt x="1360827" y="743561"/>
-                  </a:lnTo>
-                  <a:lnTo>
-                    <a:pt x="1289205" y="740071"/>
-                  </a:lnTo>
-                  <a:lnTo>
-                    <a:pt x="1217582" y="736568"/>
-                  </a:lnTo>
-                  <a:lnTo>
-                    <a:pt x="1145960" y="733051"/>
-                  </a:lnTo>
-                  <a:lnTo>
-                    <a:pt x="1074337" y="729520"/>
-                  </a:lnTo>
-                  <a:lnTo>
-                    <a:pt x="1002715" y="725976"/>
-                  </a:lnTo>
-                  <a:lnTo>
-                    <a:pt x="931092" y="722419"/>
-                  </a:lnTo>
-                  <a:lnTo>
-                    <a:pt x="859470" y="718848"/>
-                  </a:lnTo>
-                  <a:lnTo>
-                    <a:pt x="787847" y="715263"/>
-                  </a:lnTo>
-                  <a:lnTo>
-                    <a:pt x="716225" y="711664"/>
-                  </a:lnTo>
-                  <a:lnTo>
-                    <a:pt x="644602" y="708052"/>
-                  </a:lnTo>
-                  <a:lnTo>
-                    <a:pt x="572980" y="704426"/>
-                  </a:lnTo>
-                  <a:lnTo>
-                    <a:pt x="501357" y="700786"/>
-                  </a:lnTo>
-                  <a:lnTo>
-                    <a:pt x="429735" y="697132"/>
-                  </a:lnTo>
-                  <a:lnTo>
-                    <a:pt x="358112" y="693464"/>
-                  </a:lnTo>
-                  <a:lnTo>
-                    <a:pt x="286490" y="689781"/>
-                  </a:lnTo>
-                  <a:lnTo>
-                    <a:pt x="214867" y="686085"/>
-                  </a:lnTo>
-                  <a:lnTo>
-                    <a:pt x="143245" y="682375"/>
-                  </a:lnTo>
-                  <a:lnTo>
-                    <a:pt x="71622" y="678650"/>
-                  </a:lnTo>
-                  <a:lnTo>
-                    <a:pt x="0" y="674911"/>
+                    <a:pt x="70344" y="9409"/>
+                  </a:lnTo>
+                  <a:lnTo>
+                    <a:pt x="140688" y="18670"/>
+                  </a:lnTo>
+                  <a:lnTo>
+                    <a:pt x="211033" y="27784"/>
+                  </a:lnTo>
+                  <a:lnTo>
+                    <a:pt x="281377" y="36756"/>
+                  </a:lnTo>
+                  <a:lnTo>
+                    <a:pt x="351722" y="45586"/>
+                  </a:lnTo>
+                  <a:lnTo>
+                    <a:pt x="422066" y="54276"/>
+                  </a:lnTo>
+                  <a:lnTo>
+                    <a:pt x="492411" y="62830"/>
+                  </a:lnTo>
+                  <a:lnTo>
+                    <a:pt x="562755" y="71249"/>
+                  </a:lnTo>
+                  <a:lnTo>
+                    <a:pt x="633100" y="79535"/>
+                  </a:lnTo>
+                  <a:lnTo>
+                    <a:pt x="703444" y="87691"/>
+                  </a:lnTo>
+                  <a:lnTo>
+                    <a:pt x="773789" y="95718"/>
+                  </a:lnTo>
+                  <a:lnTo>
+                    <a:pt x="844133" y="103619"/>
+                  </a:lnTo>
+                  <a:lnTo>
+                    <a:pt x="914478" y="111395"/>
+                  </a:lnTo>
+                  <a:lnTo>
+                    <a:pt x="984822" y="119048"/>
+                  </a:lnTo>
+                  <a:lnTo>
+                    <a:pt x="1055167" y="126581"/>
+                  </a:lnTo>
+                  <a:lnTo>
+                    <a:pt x="1125511" y="133996"/>
+                  </a:lnTo>
+                  <a:lnTo>
+                    <a:pt x="1195856" y="141293"/>
+                  </a:lnTo>
+                  <a:lnTo>
+                    <a:pt x="1266200" y="148475"/>
+                  </a:lnTo>
+                  <a:lnTo>
+                    <a:pt x="1336545" y="155544"/>
+                  </a:lnTo>
+                  <a:lnTo>
+                    <a:pt x="1406889" y="162502"/>
+                  </a:lnTo>
+                  <a:lnTo>
+                    <a:pt x="1477234" y="169350"/>
+                  </a:lnTo>
+                  <a:lnTo>
+                    <a:pt x="1547578" y="176091"/>
+                  </a:lnTo>
+                  <a:lnTo>
+                    <a:pt x="1617923" y="182724"/>
+                  </a:lnTo>
+                  <a:lnTo>
+                    <a:pt x="1688267" y="189254"/>
+                  </a:lnTo>
+                  <a:lnTo>
+                    <a:pt x="1758612" y="195680"/>
+                  </a:lnTo>
+                  <a:lnTo>
+                    <a:pt x="1828956" y="202006"/>
+                  </a:lnTo>
+                  <a:lnTo>
+                    <a:pt x="1899301" y="208231"/>
+                  </a:lnTo>
+                  <a:lnTo>
+                    <a:pt x="1969645" y="214358"/>
+                  </a:lnTo>
+                  <a:lnTo>
+                    <a:pt x="2039990" y="220389"/>
+                  </a:lnTo>
+                  <a:lnTo>
+                    <a:pt x="2110334" y="226325"/>
+                  </a:lnTo>
+                  <a:lnTo>
+                    <a:pt x="2180679" y="232167"/>
+                  </a:lnTo>
+                  <a:lnTo>
+                    <a:pt x="2251023" y="237918"/>
+                  </a:lnTo>
+                  <a:lnTo>
+                    <a:pt x="2321368" y="243577"/>
+                  </a:lnTo>
+                  <a:lnTo>
+                    <a:pt x="2391712" y="249147"/>
+                  </a:lnTo>
+                  <a:lnTo>
+                    <a:pt x="2462057" y="254630"/>
+                  </a:lnTo>
+                  <a:lnTo>
+                    <a:pt x="2532401" y="260026"/>
+                  </a:lnTo>
+                  <a:lnTo>
+                    <a:pt x="2602746" y="265337"/>
+                  </a:lnTo>
+                  <a:lnTo>
+                    <a:pt x="2673090" y="270565"/>
+                  </a:lnTo>
+                  <a:lnTo>
+                    <a:pt x="2743435" y="275710"/>
+                  </a:lnTo>
+                  <a:lnTo>
+                    <a:pt x="2813779" y="280774"/>
+                  </a:lnTo>
+                  <a:lnTo>
+                    <a:pt x="2884124" y="285758"/>
+                  </a:lnTo>
+                  <a:lnTo>
+                    <a:pt x="2954468" y="290663"/>
+                  </a:lnTo>
+                  <a:lnTo>
+                    <a:pt x="3024813" y="295492"/>
+                  </a:lnTo>
+                  <a:lnTo>
+                    <a:pt x="3095157" y="298305"/>
+                  </a:lnTo>
+                  <a:lnTo>
+                    <a:pt x="3165502" y="299446"/>
+                  </a:lnTo>
+                  <a:lnTo>
+                    <a:pt x="3235846" y="300582"/>
+                  </a:lnTo>
+                  <a:lnTo>
+                    <a:pt x="3306191" y="301713"/>
+                  </a:lnTo>
+                  <a:lnTo>
+                    <a:pt x="3376535" y="302840"/>
+                  </a:lnTo>
+                  <a:lnTo>
+                    <a:pt x="3446880" y="303963"/>
+                  </a:lnTo>
+                  <a:lnTo>
+                    <a:pt x="3517224" y="305082"/>
+                  </a:lnTo>
+                  <a:lnTo>
+                    <a:pt x="3587569" y="306197"/>
+                  </a:lnTo>
+                  <a:lnTo>
+                    <a:pt x="3657913" y="307307"/>
+                  </a:lnTo>
+                  <a:lnTo>
+                    <a:pt x="3728257" y="308413"/>
+                  </a:lnTo>
+                  <a:lnTo>
+                    <a:pt x="3798602" y="309514"/>
+                  </a:lnTo>
+                  <a:lnTo>
+                    <a:pt x="3868946" y="310612"/>
+                  </a:lnTo>
+                  <a:lnTo>
+                    <a:pt x="3939291" y="311705"/>
+                  </a:lnTo>
+                  <a:lnTo>
+                    <a:pt x="4009635" y="312794"/>
+                  </a:lnTo>
+                  <a:lnTo>
+                    <a:pt x="4079980" y="313879"/>
+                  </a:lnTo>
+                  <a:lnTo>
+                    <a:pt x="4150324" y="314960"/>
+                  </a:lnTo>
+                  <a:lnTo>
+                    <a:pt x="4220669" y="316037"/>
+                  </a:lnTo>
+                  <a:lnTo>
+                    <a:pt x="4291013" y="317109"/>
+                  </a:lnTo>
+                  <a:lnTo>
+                    <a:pt x="4361358" y="318178"/>
+                  </a:lnTo>
+                  <a:lnTo>
+                    <a:pt x="4431702" y="319242"/>
+                  </a:lnTo>
+                  <a:lnTo>
+                    <a:pt x="4502047" y="320303"/>
+                  </a:lnTo>
+                  <a:lnTo>
+                    <a:pt x="4572391" y="321359"/>
+                  </a:lnTo>
+                  <a:lnTo>
+                    <a:pt x="4642736" y="322411"/>
+                  </a:lnTo>
+                  <a:lnTo>
+                    <a:pt x="4713080" y="323460"/>
+                  </a:lnTo>
+                  <a:lnTo>
+                    <a:pt x="4783425" y="324504"/>
+                  </a:lnTo>
+                  <a:lnTo>
+                    <a:pt x="4853769" y="325544"/>
+                  </a:lnTo>
+                  <a:lnTo>
+                    <a:pt x="4924114" y="326581"/>
+                  </a:lnTo>
+                  <a:lnTo>
+                    <a:pt x="4994458" y="327613"/>
+                  </a:lnTo>
+                  <a:lnTo>
+                    <a:pt x="5064803" y="328641"/>
+                  </a:lnTo>
+                  <a:lnTo>
+                    <a:pt x="5135147" y="329666"/>
+                  </a:lnTo>
+                  <a:lnTo>
+                    <a:pt x="5205492" y="330686"/>
+                  </a:lnTo>
+                  <a:lnTo>
+                    <a:pt x="5275836" y="331703"/>
+                  </a:lnTo>
+                  <a:lnTo>
+                    <a:pt x="5346181" y="332716"/>
+                  </a:lnTo>
+                  <a:lnTo>
+                    <a:pt x="5416525" y="333725"/>
+                  </a:lnTo>
+                  <a:lnTo>
+                    <a:pt x="5486870" y="334730"/>
+                  </a:lnTo>
+                  <a:lnTo>
+                    <a:pt x="5557214" y="335731"/>
+                  </a:lnTo>
+                  <a:lnTo>
+                    <a:pt x="5627559" y="336729"/>
+                  </a:lnTo>
+                  <a:lnTo>
+                    <a:pt x="5697903" y="337722"/>
+                  </a:lnTo>
+                  <a:lnTo>
+                    <a:pt x="5768248" y="338712"/>
+                  </a:lnTo>
+                  <a:lnTo>
+                    <a:pt x="5838592" y="339698"/>
+                  </a:lnTo>
+                  <a:lnTo>
+                    <a:pt x="5908937" y="340680"/>
+                  </a:lnTo>
+                  <a:lnTo>
+                    <a:pt x="5979281" y="341659"/>
+                  </a:lnTo>
+                  <a:lnTo>
+                    <a:pt x="6049626" y="342634"/>
+                  </a:lnTo>
+                  <a:lnTo>
+                    <a:pt x="6119970" y="343605"/>
+                  </a:lnTo>
+                  <a:lnTo>
+                    <a:pt x="6190315" y="344572"/>
+                  </a:lnTo>
+                  <a:lnTo>
+                    <a:pt x="6260659" y="345536"/>
+                  </a:lnTo>
+                  <a:lnTo>
+                    <a:pt x="6331004" y="346496"/>
+                  </a:lnTo>
+                  <a:lnTo>
+                    <a:pt x="6401348" y="347452"/>
+                  </a:lnTo>
+                  <a:lnTo>
+                    <a:pt x="6471693" y="348405"/>
+                  </a:lnTo>
+                  <a:lnTo>
+                    <a:pt x="6542037" y="349354"/>
+                  </a:lnTo>
+                  <a:lnTo>
+                    <a:pt x="6612382" y="350299"/>
+                  </a:lnTo>
+                  <a:lnTo>
+                    <a:pt x="6682726" y="351241"/>
+                  </a:lnTo>
+                  <a:lnTo>
+                    <a:pt x="6753071" y="352179"/>
+                  </a:lnTo>
+                  <a:lnTo>
+                    <a:pt x="6823415" y="353114"/>
+                  </a:lnTo>
+                  <a:lnTo>
+                    <a:pt x="6893760" y="354045"/>
+                  </a:lnTo>
+                  <a:lnTo>
+                    <a:pt x="6964104" y="354972"/>
+                  </a:lnTo>
+                  <a:lnTo>
+                    <a:pt x="6964104" y="473147"/>
+                  </a:lnTo>
+                  <a:lnTo>
+                    <a:pt x="6893760" y="471163"/>
+                  </a:lnTo>
+                  <a:lnTo>
+                    <a:pt x="6823415" y="469148"/>
+                  </a:lnTo>
+                  <a:lnTo>
+                    <a:pt x="6753071" y="467100"/>
+                  </a:lnTo>
+                  <a:lnTo>
+                    <a:pt x="6682726" y="465020"/>
+                  </a:lnTo>
+                  <a:lnTo>
+                    <a:pt x="6612382" y="462906"/>
+                  </a:lnTo>
+                  <a:lnTo>
+                    <a:pt x="6542037" y="460759"/>
+                  </a:lnTo>
+                  <a:lnTo>
+                    <a:pt x="6471693" y="458577"/>
+                  </a:lnTo>
+                  <a:lnTo>
+                    <a:pt x="6401348" y="456360"/>
+                  </a:lnTo>
+                  <a:lnTo>
+                    <a:pt x="6331004" y="454108"/>
+                  </a:lnTo>
+                  <a:lnTo>
+                    <a:pt x="6260659" y="451819"/>
+                  </a:lnTo>
+                  <a:lnTo>
+                    <a:pt x="6190315" y="449494"/>
+                  </a:lnTo>
+                  <a:lnTo>
+                    <a:pt x="6119970" y="447132"/>
+                  </a:lnTo>
+                  <a:lnTo>
+                    <a:pt x="6049626" y="444732"/>
+                  </a:lnTo>
+                  <a:lnTo>
+                    <a:pt x="5979281" y="442293"/>
+                  </a:lnTo>
+                  <a:lnTo>
+                    <a:pt x="5908937" y="439816"/>
+                  </a:lnTo>
+                  <a:lnTo>
+                    <a:pt x="5838592" y="437298"/>
+                  </a:lnTo>
+                  <a:lnTo>
+                    <a:pt x="5768248" y="434741"/>
+                  </a:lnTo>
+                  <a:lnTo>
+                    <a:pt x="5697903" y="432142"/>
+                  </a:lnTo>
+                  <a:lnTo>
+                    <a:pt x="5627559" y="429502"/>
+                  </a:lnTo>
+                  <a:lnTo>
+                    <a:pt x="5557214" y="426820"/>
+                  </a:lnTo>
+                  <a:lnTo>
+                    <a:pt x="5486870" y="424094"/>
+                  </a:lnTo>
+                  <a:lnTo>
+                    <a:pt x="5416525" y="421325"/>
+                  </a:lnTo>
+                  <a:lnTo>
+                    <a:pt x="5346181" y="418512"/>
+                  </a:lnTo>
+                  <a:lnTo>
+                    <a:pt x="5275836" y="415654"/>
+                  </a:lnTo>
+                  <a:lnTo>
+                    <a:pt x="5205492" y="412750"/>
+                  </a:lnTo>
+                  <a:lnTo>
+                    <a:pt x="5135147" y="409799"/>
+                  </a:lnTo>
+                  <a:lnTo>
+                    <a:pt x="5064803" y="406801"/>
+                  </a:lnTo>
+                  <a:lnTo>
+                    <a:pt x="4994458" y="403755"/>
+                  </a:lnTo>
+                  <a:lnTo>
+                    <a:pt x="4924114" y="400660"/>
+                  </a:lnTo>
+                  <a:lnTo>
+                    <a:pt x="4853769" y="397516"/>
+                  </a:lnTo>
+                  <a:lnTo>
+                    <a:pt x="4783425" y="394322"/>
+                  </a:lnTo>
+                  <a:lnTo>
+                    <a:pt x="4713080" y="391076"/>
+                  </a:lnTo>
+                  <a:lnTo>
+                    <a:pt x="4642736" y="387778"/>
+                  </a:lnTo>
+                  <a:lnTo>
+                    <a:pt x="4572391" y="384428"/>
+                  </a:lnTo>
+                  <a:lnTo>
+                    <a:pt x="4502047" y="381023"/>
+                  </a:lnTo>
+                  <a:lnTo>
+                    <a:pt x="4431702" y="377565"/>
+                  </a:lnTo>
+                  <a:lnTo>
+                    <a:pt x="4361358" y="374051"/>
+                  </a:lnTo>
+                  <a:lnTo>
+                    <a:pt x="4291013" y="370480"/>
+                  </a:lnTo>
+                  <a:lnTo>
+                    <a:pt x="4220669" y="366853"/>
+                  </a:lnTo>
+                  <a:lnTo>
+                    <a:pt x="4150324" y="363167"/>
+                  </a:lnTo>
+                  <a:lnTo>
+                    <a:pt x="4079980" y="359423"/>
+                  </a:lnTo>
+                  <a:lnTo>
+                    <a:pt x="4009635" y="355618"/>
+                  </a:lnTo>
+                  <a:lnTo>
+                    <a:pt x="3939291" y="351753"/>
+                  </a:lnTo>
+                  <a:lnTo>
+                    <a:pt x="3868946" y="347825"/>
+                  </a:lnTo>
+                  <a:lnTo>
+                    <a:pt x="3798602" y="343835"/>
+                  </a:lnTo>
+                  <a:lnTo>
+                    <a:pt x="3728257" y="339781"/>
+                  </a:lnTo>
+                  <a:lnTo>
+                    <a:pt x="3657913" y="335662"/>
+                  </a:lnTo>
+                  <a:lnTo>
+                    <a:pt x="3587569" y="331477"/>
+                  </a:lnTo>
+                  <a:lnTo>
+                    <a:pt x="3517224" y="327225"/>
+                  </a:lnTo>
+                  <a:lnTo>
+                    <a:pt x="3446880" y="322904"/>
+                  </a:lnTo>
+                  <a:lnTo>
+                    <a:pt x="3376535" y="318515"/>
+                  </a:lnTo>
+                  <a:lnTo>
+                    <a:pt x="3306191" y="314056"/>
+                  </a:lnTo>
+                  <a:lnTo>
+                    <a:pt x="3235846" y="309525"/>
+                  </a:lnTo>
+                  <a:lnTo>
+                    <a:pt x="3165502" y="304921"/>
+                  </a:lnTo>
+                  <a:lnTo>
+                    <a:pt x="3095157" y="300244"/>
+                  </a:lnTo>
+                  <a:lnTo>
+                    <a:pt x="3024813" y="297161"/>
+                  </a:lnTo>
+                  <a:lnTo>
+                    <a:pt x="2954468" y="296012"/>
+                  </a:lnTo>
+                  <a:lnTo>
+                    <a:pt x="2884124" y="294858"/>
+                  </a:lnTo>
+                  <a:lnTo>
+                    <a:pt x="2813779" y="293700"/>
+                  </a:lnTo>
+                  <a:lnTo>
+                    <a:pt x="2743435" y="292538"/>
+                  </a:lnTo>
+                  <a:lnTo>
+                    <a:pt x="2673090" y="291371"/>
+                  </a:lnTo>
+                  <a:lnTo>
+                    <a:pt x="2602746" y="290200"/>
+                  </a:lnTo>
+                  <a:lnTo>
+                    <a:pt x="2532401" y="289024"/>
+                  </a:lnTo>
+                  <a:lnTo>
+                    <a:pt x="2462057" y="287844"/>
+                  </a:lnTo>
+                  <a:lnTo>
+                    <a:pt x="2391712" y="286659"/>
+                  </a:lnTo>
+                  <a:lnTo>
+                    <a:pt x="2321368" y="285470"/>
+                  </a:lnTo>
+                  <a:lnTo>
+                    <a:pt x="2251023" y="284276"/>
+                  </a:lnTo>
+                  <a:lnTo>
+                    <a:pt x="2180679" y="283078"/>
+                  </a:lnTo>
+                  <a:lnTo>
+                    <a:pt x="2110334" y="281875"/>
+                  </a:lnTo>
+                  <a:lnTo>
+                    <a:pt x="2039990" y="280667"/>
+                  </a:lnTo>
+                  <a:lnTo>
+                    <a:pt x="1969645" y="279455"/>
+                  </a:lnTo>
+                  <a:lnTo>
+                    <a:pt x="1899301" y="278238"/>
+                  </a:lnTo>
+                  <a:lnTo>
+                    <a:pt x="1828956" y="277016"/>
+                  </a:lnTo>
+                  <a:lnTo>
+                    <a:pt x="1758612" y="275790"/>
+                  </a:lnTo>
+                  <a:lnTo>
+                    <a:pt x="1688267" y="274559"/>
+                  </a:lnTo>
+                  <a:lnTo>
+                    <a:pt x="1617923" y="273324"/>
+                  </a:lnTo>
+                  <a:lnTo>
+                    <a:pt x="1547578" y="272083"/>
+                  </a:lnTo>
+                  <a:lnTo>
+                    <a:pt x="1477234" y="270838"/>
+                  </a:lnTo>
+                  <a:lnTo>
+                    <a:pt x="1406889" y="269588"/>
+                  </a:lnTo>
+                  <a:lnTo>
+                    <a:pt x="1336545" y="268334"/>
+                  </a:lnTo>
+                  <a:lnTo>
+                    <a:pt x="1266200" y="267074"/>
+                  </a:lnTo>
+                  <a:lnTo>
+                    <a:pt x="1195856" y="265810"/>
+                  </a:lnTo>
+                  <a:lnTo>
+                    <a:pt x="1125511" y="264540"/>
+                  </a:lnTo>
+                  <a:lnTo>
+                    <a:pt x="1055167" y="263266"/>
+                  </a:lnTo>
+                  <a:lnTo>
+                    <a:pt x="984822" y="261988"/>
+                  </a:lnTo>
+                  <a:lnTo>
+                    <a:pt x="914478" y="260704"/>
+                  </a:lnTo>
+                  <a:lnTo>
+                    <a:pt x="844133" y="259415"/>
+                  </a:lnTo>
+                  <a:lnTo>
+                    <a:pt x="773789" y="258121"/>
+                  </a:lnTo>
+                  <a:lnTo>
+                    <a:pt x="703444" y="256823"/>
+                  </a:lnTo>
+                  <a:lnTo>
+                    <a:pt x="633100" y="255519"/>
+                  </a:lnTo>
+                  <a:lnTo>
+                    <a:pt x="562755" y="254210"/>
+                  </a:lnTo>
+                  <a:lnTo>
+                    <a:pt x="492411" y="252897"/>
+                  </a:lnTo>
+                  <a:lnTo>
+                    <a:pt x="422066" y="251578"/>
+                  </a:lnTo>
+                  <a:lnTo>
+                    <a:pt x="351722" y="250254"/>
+                  </a:lnTo>
+                  <a:lnTo>
+                    <a:pt x="281377" y="248926"/>
+                  </a:lnTo>
+                  <a:lnTo>
+                    <a:pt x="211033" y="247592"/>
+                  </a:lnTo>
+                  <a:lnTo>
+                    <a:pt x="140688" y="246253"/>
+                  </a:lnTo>
+                  <a:lnTo>
+                    <a:pt x="70344" y="244909"/>
+                  </a:lnTo>
+                  <a:lnTo>
+                    <a:pt x="0" y="243559"/>
                   </a:lnTo>
                   <a:close/>
                 </a:path>
@@ -3670,643 +3705,318 @@
         </p:sp>
         <p:sp>
           <p:nvSpPr>
-            <p:cNvPr id="23" name="pl23"/>
-            <p:cNvSpPr/>
-            <p:nvPr/>
-          </p:nvSpPr>
-          <p:spPr>
-            <a:xfrm>
-              <a:off x="1172049" y="3902882"/>
-              <a:ext cx="7090630" cy="983641"/>
-            </a:xfrm>
-            <a:custGeom>
-              <a:avLst/>
-              <a:pathLst>
-                <a:path w="7090630" h="983641">
-                  <a:moveTo>
-                    <a:pt x="0" y="0"/>
-                  </a:moveTo>
-                  <a:lnTo>
-                    <a:pt x="71622" y="26073"/>
-                  </a:lnTo>
-                  <a:lnTo>
-                    <a:pt x="143245" y="51735"/>
-                  </a:lnTo>
-                  <a:lnTo>
-                    <a:pt x="214867" y="76993"/>
-                  </a:lnTo>
-                  <a:lnTo>
-                    <a:pt x="286490" y="101852"/>
-                  </a:lnTo>
-                  <a:lnTo>
-                    <a:pt x="358112" y="126320"/>
-                  </a:lnTo>
-                  <a:lnTo>
-                    <a:pt x="429735" y="150402"/>
-                  </a:lnTo>
-                  <a:lnTo>
-                    <a:pt x="501357" y="174105"/>
-                  </a:lnTo>
-                  <a:lnTo>
-                    <a:pt x="572980" y="197434"/>
-                  </a:lnTo>
-                  <a:lnTo>
-                    <a:pt x="644602" y="220396"/>
-                  </a:lnTo>
-                  <a:lnTo>
-                    <a:pt x="716225" y="242995"/>
-                  </a:lnTo>
-                  <a:lnTo>
-                    <a:pt x="787847" y="265239"/>
-                  </a:lnTo>
-                  <a:lnTo>
-                    <a:pt x="859470" y="287132"/>
-                  </a:lnTo>
-                  <a:lnTo>
-                    <a:pt x="931092" y="308680"/>
-                  </a:lnTo>
-                  <a:lnTo>
-                    <a:pt x="1002715" y="329888"/>
-                  </a:lnTo>
-                  <a:lnTo>
-                    <a:pt x="1074337" y="350762"/>
-                  </a:lnTo>
-                  <a:lnTo>
-                    <a:pt x="1145960" y="371307"/>
-                  </a:lnTo>
-                  <a:lnTo>
-                    <a:pt x="1217582" y="391528"/>
-                  </a:lnTo>
-                  <a:lnTo>
-                    <a:pt x="1289205" y="411431"/>
-                  </a:lnTo>
-                  <a:lnTo>
-                    <a:pt x="1360827" y="431020"/>
-                  </a:lnTo>
-                  <a:lnTo>
-                    <a:pt x="1432450" y="450300"/>
-                  </a:lnTo>
-                  <a:lnTo>
-                    <a:pt x="1504073" y="469276"/>
-                  </a:lnTo>
-                  <a:lnTo>
-                    <a:pt x="1575695" y="487953"/>
-                  </a:lnTo>
-                  <a:lnTo>
-                    <a:pt x="1647318" y="506336"/>
-                  </a:lnTo>
-                  <a:lnTo>
-                    <a:pt x="1718940" y="524429"/>
-                  </a:lnTo>
-                  <a:lnTo>
-                    <a:pt x="1790563" y="542237"/>
-                  </a:lnTo>
-                  <a:lnTo>
-                    <a:pt x="1862185" y="559765"/>
-                  </a:lnTo>
-                  <a:lnTo>
-                    <a:pt x="1933808" y="577016"/>
-                  </a:lnTo>
-                  <a:lnTo>
-                    <a:pt x="2005430" y="593995"/>
-                  </a:lnTo>
-                  <a:lnTo>
-                    <a:pt x="2077053" y="610707"/>
-                  </a:lnTo>
-                  <a:lnTo>
-                    <a:pt x="2148675" y="627155"/>
-                  </a:lnTo>
-                  <a:lnTo>
-                    <a:pt x="2220298" y="643344"/>
-                  </a:lnTo>
-                  <a:lnTo>
-                    <a:pt x="2291920" y="659278"/>
-                  </a:lnTo>
-                  <a:lnTo>
-                    <a:pt x="2363543" y="674961"/>
-                  </a:lnTo>
-                  <a:lnTo>
-                    <a:pt x="2435165" y="690396"/>
-                  </a:lnTo>
-                  <a:lnTo>
-                    <a:pt x="2506788" y="705588"/>
-                  </a:lnTo>
-                  <a:lnTo>
-                    <a:pt x="2578410" y="720541"/>
-                  </a:lnTo>
-                  <a:lnTo>
-                    <a:pt x="2650033" y="735259"/>
-                  </a:lnTo>
-                  <a:lnTo>
-                    <a:pt x="2721655" y="749744"/>
-                  </a:lnTo>
-                  <a:lnTo>
-                    <a:pt x="2793278" y="764001"/>
-                  </a:lnTo>
-                  <a:lnTo>
-                    <a:pt x="2864901" y="778033"/>
-                  </a:lnTo>
-                  <a:lnTo>
-                    <a:pt x="2936523" y="791844"/>
-                  </a:lnTo>
-                  <a:lnTo>
-                    <a:pt x="3008146" y="805438"/>
-                  </a:lnTo>
-                  <a:lnTo>
-                    <a:pt x="3079768" y="818817"/>
-                  </a:lnTo>
-                  <a:lnTo>
-                    <a:pt x="3151391" y="826614"/>
-                  </a:lnTo>
-                  <a:lnTo>
-                    <a:pt x="3223013" y="829774"/>
-                  </a:lnTo>
-                  <a:lnTo>
-                    <a:pt x="3294636" y="832922"/>
-                  </a:lnTo>
-                  <a:lnTo>
-                    <a:pt x="3366258" y="836058"/>
-                  </a:lnTo>
-                  <a:lnTo>
-                    <a:pt x="3437881" y="839181"/>
-                  </a:lnTo>
-                  <a:lnTo>
-                    <a:pt x="3509503" y="842293"/>
-                  </a:lnTo>
-                  <a:lnTo>
-                    <a:pt x="3581126" y="845393"/>
-                  </a:lnTo>
-                  <a:lnTo>
-                    <a:pt x="3652748" y="848481"/>
-                  </a:lnTo>
-                  <a:lnTo>
-                    <a:pt x="3724371" y="851557"/>
-                  </a:lnTo>
-                  <a:lnTo>
-                    <a:pt x="3795993" y="854622"/>
-                  </a:lnTo>
-                  <a:lnTo>
-                    <a:pt x="3867616" y="857675"/>
-                  </a:lnTo>
-                  <a:lnTo>
-                    <a:pt x="3939238" y="860716"/>
-                  </a:lnTo>
-                  <a:lnTo>
-                    <a:pt x="4010861" y="863746"/>
-                  </a:lnTo>
-                  <a:lnTo>
-                    <a:pt x="4082483" y="866764"/>
-                  </a:lnTo>
-                  <a:lnTo>
-                    <a:pt x="4154106" y="869770"/>
-                  </a:lnTo>
-                  <a:lnTo>
-                    <a:pt x="4225729" y="872765"/>
-                  </a:lnTo>
-                  <a:lnTo>
-                    <a:pt x="4297351" y="875749"/>
-                  </a:lnTo>
-                  <a:lnTo>
-                    <a:pt x="4368974" y="878721"/>
-                  </a:lnTo>
-                  <a:lnTo>
-                    <a:pt x="4440596" y="881682"/>
-                  </a:lnTo>
-                  <a:lnTo>
-                    <a:pt x="4512219" y="884632"/>
-                  </a:lnTo>
-                  <a:lnTo>
-                    <a:pt x="4583841" y="887570"/>
-                  </a:lnTo>
-                  <a:lnTo>
-                    <a:pt x="4655464" y="890497"/>
-                  </a:lnTo>
-                  <a:lnTo>
-                    <a:pt x="4727086" y="893413"/>
-                  </a:lnTo>
-                  <a:lnTo>
-                    <a:pt x="4798709" y="896318"/>
-                  </a:lnTo>
-                  <a:lnTo>
-                    <a:pt x="4870331" y="899211"/>
-                  </a:lnTo>
-                  <a:lnTo>
-                    <a:pt x="4941954" y="902094"/>
-                  </a:lnTo>
-                  <a:lnTo>
-                    <a:pt x="5013576" y="904966"/>
-                  </a:lnTo>
-                  <a:lnTo>
-                    <a:pt x="5085199" y="907826"/>
-                  </a:lnTo>
-                  <a:lnTo>
-                    <a:pt x="5156821" y="910676"/>
-                  </a:lnTo>
-                  <a:lnTo>
-                    <a:pt x="5228444" y="913515"/>
-                  </a:lnTo>
-                  <a:lnTo>
-                    <a:pt x="5300066" y="916343"/>
-                  </a:lnTo>
-                  <a:lnTo>
-                    <a:pt x="5371689" y="919160"/>
-                  </a:lnTo>
-                  <a:lnTo>
-                    <a:pt x="5443311" y="921967"/>
-                  </a:lnTo>
-                  <a:lnTo>
-                    <a:pt x="5514934" y="924763"/>
-                  </a:lnTo>
-                  <a:lnTo>
-                    <a:pt x="5586557" y="927548"/>
-                  </a:lnTo>
-                  <a:lnTo>
-                    <a:pt x="5658179" y="930322"/>
-                  </a:lnTo>
-                  <a:lnTo>
-                    <a:pt x="5729802" y="933086"/>
-                  </a:lnTo>
-                  <a:lnTo>
-                    <a:pt x="5801424" y="935839"/>
-                  </a:lnTo>
-                  <a:lnTo>
-                    <a:pt x="5873047" y="938582"/>
-                  </a:lnTo>
-                  <a:lnTo>
-                    <a:pt x="5944669" y="941315"/>
-                  </a:lnTo>
-                  <a:lnTo>
-                    <a:pt x="6016292" y="944037"/>
-                  </a:lnTo>
-                  <a:lnTo>
-                    <a:pt x="6087914" y="946748"/>
-                  </a:lnTo>
-                  <a:lnTo>
-                    <a:pt x="6159537" y="949449"/>
-                  </a:lnTo>
-                  <a:lnTo>
-                    <a:pt x="6231159" y="952140"/>
-                  </a:lnTo>
-                  <a:lnTo>
-                    <a:pt x="6302782" y="954821"/>
-                  </a:lnTo>
-                  <a:lnTo>
-                    <a:pt x="6374404" y="957491"/>
-                  </a:lnTo>
-                  <a:lnTo>
-                    <a:pt x="6446027" y="960151"/>
-                  </a:lnTo>
-                  <a:lnTo>
-                    <a:pt x="6517649" y="962801"/>
-                  </a:lnTo>
-                  <a:lnTo>
-                    <a:pt x="6589272" y="965441"/>
-                  </a:lnTo>
-                  <a:lnTo>
-                    <a:pt x="6660894" y="968071"/>
-                  </a:lnTo>
-                  <a:lnTo>
-                    <a:pt x="6732517" y="970691"/>
-                  </a:lnTo>
-                  <a:lnTo>
-                    <a:pt x="6804139" y="973301"/>
-                  </a:lnTo>
-                  <a:lnTo>
-                    <a:pt x="6875762" y="975901"/>
-                  </a:lnTo>
-                  <a:lnTo>
-                    <a:pt x="6947385" y="978491"/>
-                  </a:lnTo>
-                  <a:lnTo>
-                    <a:pt x="7019007" y="981071"/>
-                  </a:lnTo>
-                  <a:lnTo>
-                    <a:pt x="7090630" y="983641"/>
-                  </a:lnTo>
-                </a:path>
-              </a:pathLst>
-            </a:custGeom>
-          </p:spPr>
-          <p:txBody>
-            <a:bodyPr/>
-            <a:lstStyle/>
-            <a:p/>
-          </p:txBody>
-        </p:sp>
-        <p:sp>
-          <p:nvSpPr>
             <p:cNvPr id="24" name="pl24"/>
             <p:cNvSpPr/>
             <p:nvPr/>
           </p:nvSpPr>
           <p:spPr>
             <a:xfrm>
-              <a:off x="1172049" y="4577793"/>
-              <a:ext cx="7090630" cy="636194"/>
+              <a:off x="1235312" y="2803271"/>
+              <a:ext cx="6964104" cy="354972"/>
             </a:xfrm>
             <a:custGeom>
               <a:avLst/>
               <a:pathLst>
-                <a:path w="7090630" h="636194">
+                <a:path w="6964104" h="354972">
                   <a:moveTo>
-                    <a:pt x="7090630" y="636194"/>
+                    <a:pt x="0" y="0"/>
                   </a:moveTo>
                   <a:lnTo>
-                    <a:pt x="7019007" y="630697"/>
-                  </a:lnTo>
-                  <a:lnTo>
-                    <a:pt x="6947385" y="625113"/>
-                  </a:lnTo>
-                  <a:lnTo>
-                    <a:pt x="6875762" y="619439"/>
-                  </a:lnTo>
-                  <a:lnTo>
-                    <a:pt x="6804139" y="613674"/>
-                  </a:lnTo>
-                  <a:lnTo>
-                    <a:pt x="6732517" y="607817"/>
-                  </a:lnTo>
-                  <a:lnTo>
-                    <a:pt x="6660894" y="601866"/>
-                  </a:lnTo>
-                  <a:lnTo>
-                    <a:pt x="6589272" y="595820"/>
-                  </a:lnTo>
-                  <a:lnTo>
-                    <a:pt x="6517649" y="589677"/>
-                  </a:lnTo>
-                  <a:lnTo>
-                    <a:pt x="6446027" y="583436"/>
-                  </a:lnTo>
-                  <a:lnTo>
-                    <a:pt x="6374404" y="577095"/>
-                  </a:lnTo>
-                  <a:lnTo>
-                    <a:pt x="6302782" y="570652"/>
-                  </a:lnTo>
-                  <a:lnTo>
-                    <a:pt x="6231159" y="564106"/>
-                  </a:lnTo>
-                  <a:lnTo>
-                    <a:pt x="6159537" y="557455"/>
-                  </a:lnTo>
-                  <a:lnTo>
-                    <a:pt x="6087914" y="550698"/>
-                  </a:lnTo>
-                  <a:lnTo>
-                    <a:pt x="6016292" y="543832"/>
-                  </a:lnTo>
-                  <a:lnTo>
-                    <a:pt x="5944669" y="536857"/>
-                  </a:lnTo>
-                  <a:lnTo>
-                    <a:pt x="5873047" y="529770"/>
-                  </a:lnTo>
-                  <a:lnTo>
-                    <a:pt x="5801424" y="522569"/>
-                  </a:lnTo>
-                  <a:lnTo>
-                    <a:pt x="5729802" y="515253"/>
-                  </a:lnTo>
-                  <a:lnTo>
-                    <a:pt x="5658179" y="507820"/>
-                  </a:lnTo>
-                  <a:lnTo>
-                    <a:pt x="5586557" y="500268"/>
-                  </a:lnTo>
-                  <a:lnTo>
-                    <a:pt x="5514934" y="492595"/>
-                  </a:lnTo>
-                  <a:lnTo>
-                    <a:pt x="5443311" y="484799"/>
-                  </a:lnTo>
-                  <a:lnTo>
-                    <a:pt x="5371689" y="476878"/>
-                  </a:lnTo>
-                  <a:lnTo>
-                    <a:pt x="5300066" y="468831"/>
-                  </a:lnTo>
-                  <a:lnTo>
-                    <a:pt x="5228444" y="460655"/>
-                  </a:lnTo>
-                  <a:lnTo>
-                    <a:pt x="5156821" y="452347"/>
-                  </a:lnTo>
-                  <a:lnTo>
-                    <a:pt x="5085199" y="443907"/>
-                  </a:lnTo>
-                  <a:lnTo>
-                    <a:pt x="5013576" y="435331"/>
-                  </a:lnTo>
-                  <a:lnTo>
-                    <a:pt x="4941954" y="426619"/>
-                  </a:lnTo>
-                  <a:lnTo>
-                    <a:pt x="4870331" y="417766"/>
-                  </a:lnTo>
-                  <a:lnTo>
-                    <a:pt x="4798709" y="408772"/>
-                  </a:lnTo>
-                  <a:lnTo>
-                    <a:pt x="4727086" y="399634"/>
-                  </a:lnTo>
-                  <a:lnTo>
-                    <a:pt x="4655464" y="390350"/>
-                  </a:lnTo>
-                  <a:lnTo>
-                    <a:pt x="4583841" y="380917"/>
-                  </a:lnTo>
-                  <a:lnTo>
-                    <a:pt x="4512219" y="371333"/>
-                  </a:lnTo>
-                  <a:lnTo>
-                    <a:pt x="4440596" y="361595"/>
-                  </a:lnTo>
-                  <a:lnTo>
-                    <a:pt x="4368974" y="351702"/>
-                  </a:lnTo>
-                  <a:lnTo>
-                    <a:pt x="4297351" y="341650"/>
-                  </a:lnTo>
-                  <a:lnTo>
-                    <a:pt x="4225729" y="331437"/>
-                  </a:lnTo>
-                  <a:lnTo>
-                    <a:pt x="4154106" y="321060"/>
-                  </a:lnTo>
-                  <a:lnTo>
-                    <a:pt x="4082483" y="310518"/>
-                  </a:lnTo>
-                  <a:lnTo>
-                    <a:pt x="4010861" y="299806"/>
-                  </a:lnTo>
-                  <a:lnTo>
-                    <a:pt x="3939238" y="288923"/>
-                  </a:lnTo>
-                  <a:lnTo>
-                    <a:pt x="3867616" y="277866"/>
-                  </a:lnTo>
-                  <a:lnTo>
-                    <a:pt x="3795993" y="266632"/>
-                  </a:lnTo>
-                  <a:lnTo>
-                    <a:pt x="3724371" y="255218"/>
-                  </a:lnTo>
-                  <a:lnTo>
-                    <a:pt x="3652748" y="243621"/>
-                  </a:lnTo>
-                  <a:lnTo>
-                    <a:pt x="3581126" y="231839"/>
-                  </a:lnTo>
-                  <a:lnTo>
-                    <a:pt x="3509503" y="219867"/>
-                  </a:lnTo>
-                  <a:lnTo>
-                    <a:pt x="3437881" y="207704"/>
-                  </a:lnTo>
-                  <a:lnTo>
-                    <a:pt x="3366258" y="195347"/>
-                  </a:lnTo>
-                  <a:lnTo>
-                    <a:pt x="3294636" y="182791"/>
-                  </a:lnTo>
-                  <a:lnTo>
-                    <a:pt x="3223013" y="170035"/>
-                  </a:lnTo>
-                  <a:lnTo>
-                    <a:pt x="3151391" y="157074"/>
-                  </a:lnTo>
-                  <a:lnTo>
-                    <a:pt x="3079768" y="148531"/>
-                  </a:lnTo>
-                  <a:lnTo>
-                    <a:pt x="3008146" y="145347"/>
-                  </a:lnTo>
-                  <a:lnTo>
-                    <a:pt x="2936523" y="142150"/>
-                  </a:lnTo>
-                  <a:lnTo>
-                    <a:pt x="2864901" y="138942"/>
-                  </a:lnTo>
-                  <a:lnTo>
-                    <a:pt x="2793278" y="135721"/>
-                  </a:lnTo>
-                  <a:lnTo>
-                    <a:pt x="2721655" y="132488"/>
-                  </a:lnTo>
-                  <a:lnTo>
-                    <a:pt x="2650033" y="129242"/>
-                  </a:lnTo>
-                  <a:lnTo>
-                    <a:pt x="2578410" y="125984"/>
-                  </a:lnTo>
-                  <a:lnTo>
-                    <a:pt x="2506788" y="122714"/>
-                  </a:lnTo>
-                  <a:lnTo>
-                    <a:pt x="2435165" y="119431"/>
-                  </a:lnTo>
-                  <a:lnTo>
-                    <a:pt x="2363543" y="116135"/>
-                  </a:lnTo>
-                  <a:lnTo>
-                    <a:pt x="2291920" y="112827"/>
-                  </a:lnTo>
-                  <a:lnTo>
-                    <a:pt x="2220298" y="109506"/>
-                  </a:lnTo>
-                  <a:lnTo>
-                    <a:pt x="2148675" y="106173"/>
-                  </a:lnTo>
-                  <a:lnTo>
-                    <a:pt x="2077053" y="102827"/>
-                  </a:lnTo>
-                  <a:lnTo>
-                    <a:pt x="2005430" y="99467"/>
-                  </a:lnTo>
-                  <a:lnTo>
-                    <a:pt x="1933808" y="96095"/>
-                  </a:lnTo>
-                  <a:lnTo>
-                    <a:pt x="1862185" y="92710"/>
-                  </a:lnTo>
-                  <a:lnTo>
-                    <a:pt x="1790563" y="89312"/>
-                  </a:lnTo>
-                  <a:lnTo>
-                    <a:pt x="1718940" y="85901"/>
-                  </a:lnTo>
-                  <a:lnTo>
-                    <a:pt x="1647318" y="82477"/>
-                  </a:lnTo>
-                  <a:lnTo>
-                    <a:pt x="1575695" y="79040"/>
-                  </a:lnTo>
-                  <a:lnTo>
-                    <a:pt x="1504073" y="75590"/>
-                  </a:lnTo>
-                  <a:lnTo>
-                    <a:pt x="1432450" y="72126"/>
-                  </a:lnTo>
-                  <a:lnTo>
-                    <a:pt x="1360827" y="68650"/>
-                  </a:lnTo>
-                  <a:lnTo>
-                    <a:pt x="1289205" y="65159"/>
-                  </a:lnTo>
-                  <a:lnTo>
-                    <a:pt x="1217582" y="61656"/>
-                  </a:lnTo>
-                  <a:lnTo>
-                    <a:pt x="1145960" y="58139"/>
-                  </a:lnTo>
-                  <a:lnTo>
-                    <a:pt x="1074337" y="54609"/>
-                  </a:lnTo>
-                  <a:lnTo>
-                    <a:pt x="1002715" y="51065"/>
-                  </a:lnTo>
-                  <a:lnTo>
-                    <a:pt x="931092" y="47507"/>
-                  </a:lnTo>
-                  <a:lnTo>
-                    <a:pt x="859470" y="43936"/>
-                  </a:lnTo>
-                  <a:lnTo>
-                    <a:pt x="787847" y="40351"/>
-                  </a:lnTo>
-                  <a:lnTo>
-                    <a:pt x="716225" y="36752"/>
-                  </a:lnTo>
-                  <a:lnTo>
-                    <a:pt x="644602" y="33140"/>
-                  </a:lnTo>
-                  <a:lnTo>
-                    <a:pt x="572980" y="29514"/>
-                  </a:lnTo>
-                  <a:lnTo>
-                    <a:pt x="501357" y="25874"/>
-                  </a:lnTo>
-                  <a:lnTo>
-                    <a:pt x="429735" y="22220"/>
-                  </a:lnTo>
-                  <a:lnTo>
-                    <a:pt x="358112" y="18552"/>
-                  </a:lnTo>
-                  <a:lnTo>
-                    <a:pt x="286490" y="14870"/>
-                  </a:lnTo>
-                  <a:lnTo>
-                    <a:pt x="214867" y="11173"/>
-                  </a:lnTo>
-                  <a:lnTo>
-                    <a:pt x="143245" y="7463"/>
-                  </a:lnTo>
-                  <a:lnTo>
-                    <a:pt x="71622" y="3738"/>
-                  </a:lnTo>
-                  <a:lnTo>
-                    <a:pt x="0" y="0"/>
+                    <a:pt x="70344" y="9409"/>
+                  </a:lnTo>
+                  <a:lnTo>
+                    <a:pt x="140688" y="18670"/>
+                  </a:lnTo>
+                  <a:lnTo>
+                    <a:pt x="211033" y="27784"/>
+                  </a:lnTo>
+                  <a:lnTo>
+                    <a:pt x="281377" y="36756"/>
+                  </a:lnTo>
+                  <a:lnTo>
+                    <a:pt x="351722" y="45586"/>
+                  </a:lnTo>
+                  <a:lnTo>
+                    <a:pt x="422066" y="54276"/>
+                  </a:lnTo>
+                  <a:lnTo>
+                    <a:pt x="492411" y="62830"/>
+                  </a:lnTo>
+                  <a:lnTo>
+                    <a:pt x="562755" y="71249"/>
+                  </a:lnTo>
+                  <a:lnTo>
+                    <a:pt x="633100" y="79535"/>
+                  </a:lnTo>
+                  <a:lnTo>
+                    <a:pt x="703444" y="87691"/>
+                  </a:lnTo>
+                  <a:lnTo>
+                    <a:pt x="773789" y="95718"/>
+                  </a:lnTo>
+                  <a:lnTo>
+                    <a:pt x="844133" y="103619"/>
+                  </a:lnTo>
+                  <a:lnTo>
+                    <a:pt x="914478" y="111395"/>
+                  </a:lnTo>
+                  <a:lnTo>
+                    <a:pt x="984822" y="119048"/>
+                  </a:lnTo>
+                  <a:lnTo>
+                    <a:pt x="1055167" y="126581"/>
+                  </a:lnTo>
+                  <a:lnTo>
+                    <a:pt x="1125511" y="133996"/>
+                  </a:lnTo>
+                  <a:lnTo>
+                    <a:pt x="1195856" y="141293"/>
+                  </a:lnTo>
+                  <a:lnTo>
+                    <a:pt x="1266200" y="148475"/>
+                  </a:lnTo>
+                  <a:lnTo>
+                    <a:pt x="1336545" y="155544"/>
+                  </a:lnTo>
+                  <a:lnTo>
+                    <a:pt x="1406889" y="162502"/>
+                  </a:lnTo>
+                  <a:lnTo>
+                    <a:pt x="1477234" y="169350"/>
+                  </a:lnTo>
+                  <a:lnTo>
+                    <a:pt x="1547578" y="176091"/>
+                  </a:lnTo>
+                  <a:lnTo>
+                    <a:pt x="1617923" y="182724"/>
+                  </a:lnTo>
+                  <a:lnTo>
+                    <a:pt x="1688267" y="189254"/>
+                  </a:lnTo>
+                  <a:lnTo>
+                    <a:pt x="1758612" y="195680"/>
+                  </a:lnTo>
+                  <a:lnTo>
+                    <a:pt x="1828956" y="202006"/>
+                  </a:lnTo>
+                  <a:lnTo>
+                    <a:pt x="1899301" y="208231"/>
+                  </a:lnTo>
+                  <a:lnTo>
+                    <a:pt x="1969645" y="214358"/>
+                  </a:lnTo>
+                  <a:lnTo>
+                    <a:pt x="2039990" y="220389"/>
+                  </a:lnTo>
+                  <a:lnTo>
+                    <a:pt x="2110334" y="226325"/>
+                  </a:lnTo>
+                  <a:lnTo>
+                    <a:pt x="2180679" y="232167"/>
+                  </a:lnTo>
+                  <a:lnTo>
+                    <a:pt x="2251023" y="237918"/>
+                  </a:lnTo>
+                  <a:lnTo>
+                    <a:pt x="2321368" y="243577"/>
+                  </a:lnTo>
+                  <a:lnTo>
+                    <a:pt x="2391712" y="249147"/>
+                  </a:lnTo>
+                  <a:lnTo>
+                    <a:pt x="2462057" y="254630"/>
+                  </a:lnTo>
+                  <a:lnTo>
+                    <a:pt x="2532401" y="260026"/>
+                  </a:lnTo>
+                  <a:lnTo>
+                    <a:pt x="2602746" y="265337"/>
+                  </a:lnTo>
+                  <a:lnTo>
+                    <a:pt x="2673090" y="270565"/>
+                  </a:lnTo>
+                  <a:lnTo>
+                    <a:pt x="2743435" y="275710"/>
+                  </a:lnTo>
+                  <a:lnTo>
+                    <a:pt x="2813779" y="280774"/>
+                  </a:lnTo>
+                  <a:lnTo>
+                    <a:pt x="2884124" y="285758"/>
+                  </a:lnTo>
+                  <a:lnTo>
+                    <a:pt x="2954468" y="290663"/>
+                  </a:lnTo>
+                  <a:lnTo>
+                    <a:pt x="3024813" y="295492"/>
+                  </a:lnTo>
+                  <a:lnTo>
+                    <a:pt x="3095157" y="298305"/>
+                  </a:lnTo>
+                  <a:lnTo>
+                    <a:pt x="3165502" y="299446"/>
+                  </a:lnTo>
+                  <a:lnTo>
+                    <a:pt x="3235846" y="300582"/>
+                  </a:lnTo>
+                  <a:lnTo>
+                    <a:pt x="3306191" y="301713"/>
+                  </a:lnTo>
+                  <a:lnTo>
+                    <a:pt x="3376535" y="302840"/>
+                  </a:lnTo>
+                  <a:lnTo>
+                    <a:pt x="3446880" y="303963"/>
+                  </a:lnTo>
+                  <a:lnTo>
+                    <a:pt x="3517224" y="305082"/>
+                  </a:lnTo>
+                  <a:lnTo>
+                    <a:pt x="3587569" y="306197"/>
+                  </a:lnTo>
+                  <a:lnTo>
+                    <a:pt x="3657913" y="307307"/>
+                  </a:lnTo>
+                  <a:lnTo>
+                    <a:pt x="3728257" y="308413"/>
+                  </a:lnTo>
+                  <a:lnTo>
+                    <a:pt x="3798602" y="309514"/>
+                  </a:lnTo>
+                  <a:lnTo>
+                    <a:pt x="3868946" y="310612"/>
+                  </a:lnTo>
+                  <a:lnTo>
+                    <a:pt x="3939291" y="311705"/>
+                  </a:lnTo>
+                  <a:lnTo>
+                    <a:pt x="4009635" y="312794"/>
+                  </a:lnTo>
+                  <a:lnTo>
+                    <a:pt x="4079980" y="313879"/>
+                  </a:lnTo>
+                  <a:lnTo>
+                    <a:pt x="4150324" y="314960"/>
+                  </a:lnTo>
+                  <a:lnTo>
+                    <a:pt x="4220669" y="316037"/>
+                  </a:lnTo>
+                  <a:lnTo>
+                    <a:pt x="4291013" y="317109"/>
+                  </a:lnTo>
+                  <a:lnTo>
+                    <a:pt x="4361358" y="318178"/>
+                  </a:lnTo>
+                  <a:lnTo>
+                    <a:pt x="4431702" y="319242"/>
+                  </a:lnTo>
+                  <a:lnTo>
+                    <a:pt x="4502047" y="320303"/>
+                  </a:lnTo>
+                  <a:lnTo>
+                    <a:pt x="4572391" y="321359"/>
+                  </a:lnTo>
+                  <a:lnTo>
+                    <a:pt x="4642736" y="322411"/>
+                  </a:lnTo>
+                  <a:lnTo>
+                    <a:pt x="4713080" y="323460"/>
+                  </a:lnTo>
+                  <a:lnTo>
+                    <a:pt x="4783425" y="324504"/>
+                  </a:lnTo>
+                  <a:lnTo>
+                    <a:pt x="4853769" y="325544"/>
+                  </a:lnTo>
+                  <a:lnTo>
+                    <a:pt x="4924114" y="326581"/>
+                  </a:lnTo>
+                  <a:lnTo>
+                    <a:pt x="4994458" y="327613"/>
+                  </a:lnTo>
+                  <a:lnTo>
+                    <a:pt x="5064803" y="328641"/>
+                  </a:lnTo>
+                  <a:lnTo>
+                    <a:pt x="5135147" y="329666"/>
+                  </a:lnTo>
+                  <a:lnTo>
+                    <a:pt x="5205492" y="330686"/>
+                  </a:lnTo>
+                  <a:lnTo>
+                    <a:pt x="5275836" y="331703"/>
+                  </a:lnTo>
+                  <a:lnTo>
+                    <a:pt x="5346181" y="332716"/>
+                  </a:lnTo>
+                  <a:lnTo>
+                    <a:pt x="5416525" y="333725"/>
+                  </a:lnTo>
+                  <a:lnTo>
+                    <a:pt x="5486870" y="334730"/>
+                  </a:lnTo>
+                  <a:lnTo>
+                    <a:pt x="5557214" y="335731"/>
+                  </a:lnTo>
+                  <a:lnTo>
+                    <a:pt x="5627559" y="336729"/>
+                  </a:lnTo>
+                  <a:lnTo>
+                    <a:pt x="5697903" y="337722"/>
+                  </a:lnTo>
+                  <a:lnTo>
+                    <a:pt x="5768248" y="338712"/>
+                  </a:lnTo>
+                  <a:lnTo>
+                    <a:pt x="5838592" y="339698"/>
+                  </a:lnTo>
+                  <a:lnTo>
+                    <a:pt x="5908937" y="340680"/>
+                  </a:lnTo>
+                  <a:lnTo>
+                    <a:pt x="5979281" y="341659"/>
+                  </a:lnTo>
+                  <a:lnTo>
+                    <a:pt x="6049626" y="342634"/>
+                  </a:lnTo>
+                  <a:lnTo>
+                    <a:pt x="6119970" y="343605"/>
+                  </a:lnTo>
+                  <a:lnTo>
+                    <a:pt x="6190315" y="344572"/>
+                  </a:lnTo>
+                  <a:lnTo>
+                    <a:pt x="6260659" y="345536"/>
+                  </a:lnTo>
+                  <a:lnTo>
+                    <a:pt x="6331004" y="346496"/>
+                  </a:lnTo>
+                  <a:lnTo>
+                    <a:pt x="6401348" y="347452"/>
+                  </a:lnTo>
+                  <a:lnTo>
+                    <a:pt x="6471693" y="348405"/>
+                  </a:lnTo>
+                  <a:lnTo>
+                    <a:pt x="6542037" y="349354"/>
+                  </a:lnTo>
+                  <a:lnTo>
+                    <a:pt x="6612382" y="350299"/>
+                  </a:lnTo>
+                  <a:lnTo>
+                    <a:pt x="6682726" y="351241"/>
+                  </a:lnTo>
+                  <a:lnTo>
+                    <a:pt x="6753071" y="352179"/>
+                  </a:lnTo>
+                  <a:lnTo>
+                    <a:pt x="6823415" y="353114"/>
+                  </a:lnTo>
+                  <a:lnTo>
+                    <a:pt x="6893760" y="354045"/>
+                  </a:lnTo>
+                  <a:lnTo>
+                    <a:pt x="6964104" y="354972"/>
                   </a:lnTo>
                 </a:path>
               </a:pathLst>
@@ -4326,312 +4036,637 @@
           </p:nvSpPr>
           <p:spPr>
             <a:xfrm>
-              <a:off x="1172049" y="4284308"/>
-              <a:ext cx="7090630" cy="793113"/>
+              <a:off x="1235312" y="3046831"/>
+              <a:ext cx="6964104" cy="229587"/>
             </a:xfrm>
             <a:custGeom>
               <a:avLst/>
               <a:pathLst>
-                <a:path w="7090630" h="793113">
+                <a:path w="6964104" h="229587">
+                  <a:moveTo>
+                    <a:pt x="6964104" y="229587"/>
+                  </a:moveTo>
+                  <a:lnTo>
+                    <a:pt x="6893760" y="227604"/>
+                  </a:lnTo>
+                  <a:lnTo>
+                    <a:pt x="6823415" y="225588"/>
+                  </a:lnTo>
+                  <a:lnTo>
+                    <a:pt x="6753071" y="223541"/>
+                  </a:lnTo>
+                  <a:lnTo>
+                    <a:pt x="6682726" y="221460"/>
+                  </a:lnTo>
+                  <a:lnTo>
+                    <a:pt x="6612382" y="219347"/>
+                  </a:lnTo>
+                  <a:lnTo>
+                    <a:pt x="6542037" y="217199"/>
+                  </a:lnTo>
+                  <a:lnTo>
+                    <a:pt x="6471693" y="215017"/>
+                  </a:lnTo>
+                  <a:lnTo>
+                    <a:pt x="6401348" y="212800"/>
+                  </a:lnTo>
+                  <a:lnTo>
+                    <a:pt x="6331004" y="210548"/>
+                  </a:lnTo>
+                  <a:lnTo>
+                    <a:pt x="6260659" y="208260"/>
+                  </a:lnTo>
+                  <a:lnTo>
+                    <a:pt x="6190315" y="205934"/>
+                  </a:lnTo>
+                  <a:lnTo>
+                    <a:pt x="6119970" y="203572"/>
+                  </a:lnTo>
+                  <a:lnTo>
+                    <a:pt x="6049626" y="201172"/>
+                  </a:lnTo>
+                  <a:lnTo>
+                    <a:pt x="5979281" y="198734"/>
+                  </a:lnTo>
+                  <a:lnTo>
+                    <a:pt x="5908937" y="196256"/>
+                  </a:lnTo>
+                  <a:lnTo>
+                    <a:pt x="5838592" y="193739"/>
+                  </a:lnTo>
+                  <a:lnTo>
+                    <a:pt x="5768248" y="191181"/>
+                  </a:lnTo>
+                  <a:lnTo>
+                    <a:pt x="5697903" y="188583"/>
+                  </a:lnTo>
+                  <a:lnTo>
+                    <a:pt x="5627559" y="185942"/>
+                  </a:lnTo>
+                  <a:lnTo>
+                    <a:pt x="5557214" y="183260"/>
+                  </a:lnTo>
+                  <a:lnTo>
+                    <a:pt x="5486870" y="180535"/>
+                  </a:lnTo>
+                  <a:lnTo>
+                    <a:pt x="5416525" y="177766"/>
+                  </a:lnTo>
+                  <a:lnTo>
+                    <a:pt x="5346181" y="174952"/>
+                  </a:lnTo>
+                  <a:lnTo>
+                    <a:pt x="5275836" y="172094"/>
+                  </a:lnTo>
+                  <a:lnTo>
+                    <a:pt x="5205492" y="169190"/>
+                  </a:lnTo>
+                  <a:lnTo>
+                    <a:pt x="5135147" y="166239"/>
+                  </a:lnTo>
+                  <a:lnTo>
+                    <a:pt x="5064803" y="163241"/>
+                  </a:lnTo>
+                  <a:lnTo>
+                    <a:pt x="4994458" y="160195"/>
+                  </a:lnTo>
+                  <a:lnTo>
+                    <a:pt x="4924114" y="157101"/>
+                  </a:lnTo>
+                  <a:lnTo>
+                    <a:pt x="4853769" y="153956"/>
+                  </a:lnTo>
+                  <a:lnTo>
+                    <a:pt x="4783425" y="150762"/>
+                  </a:lnTo>
+                  <a:lnTo>
+                    <a:pt x="4713080" y="147516"/>
+                  </a:lnTo>
+                  <a:lnTo>
+                    <a:pt x="4642736" y="144218"/>
+                  </a:lnTo>
+                  <a:lnTo>
+                    <a:pt x="4572391" y="140868"/>
+                  </a:lnTo>
+                  <a:lnTo>
+                    <a:pt x="4502047" y="137464"/>
+                  </a:lnTo>
+                  <a:lnTo>
+                    <a:pt x="4431702" y="134005"/>
+                  </a:lnTo>
+                  <a:lnTo>
+                    <a:pt x="4361358" y="130491"/>
+                  </a:lnTo>
+                  <a:lnTo>
+                    <a:pt x="4291013" y="126920"/>
+                  </a:lnTo>
+                  <a:lnTo>
+                    <a:pt x="4220669" y="123293"/>
+                  </a:lnTo>
+                  <a:lnTo>
+                    <a:pt x="4150324" y="119607"/>
+                  </a:lnTo>
+                  <a:lnTo>
+                    <a:pt x="4079980" y="115863"/>
+                  </a:lnTo>
+                  <a:lnTo>
+                    <a:pt x="4009635" y="112058"/>
+                  </a:lnTo>
+                  <a:lnTo>
+                    <a:pt x="3939291" y="108193"/>
+                  </a:lnTo>
+                  <a:lnTo>
+                    <a:pt x="3868946" y="104265"/>
+                  </a:lnTo>
+                  <a:lnTo>
+                    <a:pt x="3798602" y="100275"/>
+                  </a:lnTo>
+                  <a:lnTo>
+                    <a:pt x="3728257" y="96221"/>
+                  </a:lnTo>
+                  <a:lnTo>
+                    <a:pt x="3657913" y="92102"/>
+                  </a:lnTo>
+                  <a:lnTo>
+                    <a:pt x="3587569" y="87917"/>
+                  </a:lnTo>
+                  <a:lnTo>
+                    <a:pt x="3517224" y="83665"/>
+                  </a:lnTo>
+                  <a:lnTo>
+                    <a:pt x="3446880" y="79345"/>
+                  </a:lnTo>
+                  <a:lnTo>
+                    <a:pt x="3376535" y="74955"/>
+                  </a:lnTo>
+                  <a:lnTo>
+                    <a:pt x="3306191" y="70496"/>
+                  </a:lnTo>
+                  <a:lnTo>
+                    <a:pt x="3235846" y="65965"/>
+                  </a:lnTo>
+                  <a:lnTo>
+                    <a:pt x="3165502" y="61361"/>
+                  </a:lnTo>
+                  <a:lnTo>
+                    <a:pt x="3095157" y="56684"/>
+                  </a:lnTo>
+                  <a:lnTo>
+                    <a:pt x="3024813" y="53601"/>
+                  </a:lnTo>
+                  <a:lnTo>
+                    <a:pt x="2954468" y="52452"/>
+                  </a:lnTo>
+                  <a:lnTo>
+                    <a:pt x="2884124" y="51298"/>
+                  </a:lnTo>
+                  <a:lnTo>
+                    <a:pt x="2813779" y="50141"/>
+                  </a:lnTo>
+                  <a:lnTo>
+                    <a:pt x="2743435" y="48978"/>
+                  </a:lnTo>
+                  <a:lnTo>
+                    <a:pt x="2673090" y="47811"/>
+                  </a:lnTo>
+                  <a:lnTo>
+                    <a:pt x="2602746" y="46640"/>
+                  </a:lnTo>
+                  <a:lnTo>
+                    <a:pt x="2532401" y="45465"/>
+                  </a:lnTo>
+                  <a:lnTo>
+                    <a:pt x="2462057" y="44284"/>
+                  </a:lnTo>
+                  <a:lnTo>
+                    <a:pt x="2391712" y="43100"/>
+                  </a:lnTo>
+                  <a:lnTo>
+                    <a:pt x="2321368" y="41910"/>
+                  </a:lnTo>
+                  <a:lnTo>
+                    <a:pt x="2251023" y="40716"/>
+                  </a:lnTo>
+                  <a:lnTo>
+                    <a:pt x="2180679" y="39518"/>
+                  </a:lnTo>
+                  <a:lnTo>
+                    <a:pt x="2110334" y="38315"/>
+                  </a:lnTo>
+                  <a:lnTo>
+                    <a:pt x="2039990" y="37107"/>
+                  </a:lnTo>
+                  <a:lnTo>
+                    <a:pt x="1969645" y="35895"/>
+                  </a:lnTo>
+                  <a:lnTo>
+                    <a:pt x="1899301" y="34678"/>
+                  </a:lnTo>
+                  <a:lnTo>
+                    <a:pt x="1828956" y="33457"/>
+                  </a:lnTo>
+                  <a:lnTo>
+                    <a:pt x="1758612" y="32230"/>
+                  </a:lnTo>
+                  <a:lnTo>
+                    <a:pt x="1688267" y="30999"/>
+                  </a:lnTo>
+                  <a:lnTo>
+                    <a:pt x="1617923" y="29764"/>
+                  </a:lnTo>
+                  <a:lnTo>
+                    <a:pt x="1547578" y="28523"/>
+                  </a:lnTo>
+                  <a:lnTo>
+                    <a:pt x="1477234" y="27278"/>
+                  </a:lnTo>
+                  <a:lnTo>
+                    <a:pt x="1406889" y="26028"/>
+                  </a:lnTo>
+                  <a:lnTo>
+                    <a:pt x="1336545" y="24774"/>
+                  </a:lnTo>
+                  <a:lnTo>
+                    <a:pt x="1266200" y="23514"/>
+                  </a:lnTo>
+                  <a:lnTo>
+                    <a:pt x="1195856" y="22250"/>
+                  </a:lnTo>
+                  <a:lnTo>
+                    <a:pt x="1125511" y="20981"/>
+                  </a:lnTo>
+                  <a:lnTo>
+                    <a:pt x="1055167" y="19707"/>
+                  </a:lnTo>
+                  <a:lnTo>
+                    <a:pt x="984822" y="18428"/>
+                  </a:lnTo>
+                  <a:lnTo>
+                    <a:pt x="914478" y="17144"/>
+                  </a:lnTo>
+                  <a:lnTo>
+                    <a:pt x="844133" y="15855"/>
+                  </a:lnTo>
+                  <a:lnTo>
+                    <a:pt x="773789" y="14561"/>
+                  </a:lnTo>
+                  <a:lnTo>
+                    <a:pt x="703444" y="13263"/>
+                  </a:lnTo>
+                  <a:lnTo>
+                    <a:pt x="633100" y="11959"/>
+                  </a:lnTo>
+                  <a:lnTo>
+                    <a:pt x="562755" y="10651"/>
+                  </a:lnTo>
+                  <a:lnTo>
+                    <a:pt x="492411" y="9337"/>
+                  </a:lnTo>
+                  <a:lnTo>
+                    <a:pt x="422066" y="8018"/>
+                  </a:lnTo>
+                  <a:lnTo>
+                    <a:pt x="351722" y="6695"/>
+                  </a:lnTo>
+                  <a:lnTo>
+                    <a:pt x="281377" y="5366"/>
+                  </a:lnTo>
+                  <a:lnTo>
+                    <a:pt x="211033" y="4032"/>
+                  </a:lnTo>
+                  <a:lnTo>
+                    <a:pt x="140688" y="2693"/>
+                  </a:lnTo>
+                  <a:lnTo>
+                    <a:pt x="70344" y="1349"/>
+                  </a:lnTo>
+                  <a:lnTo>
+                    <a:pt x="0" y="0"/>
+                  </a:lnTo>
+                </a:path>
+              </a:pathLst>
+            </a:custGeom>
+          </p:spPr>
+          <p:txBody>
+            <a:bodyPr/>
+            <a:lstStyle/>
+            <a:p/>
+          </p:txBody>
+        </p:sp>
+        <p:sp>
+          <p:nvSpPr>
+            <p:cNvPr id="26" name="pl26"/>
+            <p:cNvSpPr/>
+            <p:nvPr/>
+          </p:nvSpPr>
+          <p:spPr>
+            <a:xfrm>
+              <a:off x="1235312" y="2940919"/>
+              <a:ext cx="6964104" cy="286216"/>
+            </a:xfrm>
+            <a:custGeom>
+              <a:avLst/>
+              <a:pathLst>
+                <a:path w="6964104" h="286216">
                   <a:moveTo>
                     <a:pt x="0" y="0"/>
                   </a:moveTo>
                   <a:lnTo>
-                    <a:pt x="71622" y="12483"/>
-                  </a:lnTo>
-                  <a:lnTo>
-                    <a:pt x="143245" y="24844"/>
-                  </a:lnTo>
-                  <a:lnTo>
-                    <a:pt x="214867" y="37084"/>
-                  </a:lnTo>
-                  <a:lnTo>
-                    <a:pt x="286490" y="49203"/>
-                  </a:lnTo>
-                  <a:lnTo>
-                    <a:pt x="358112" y="61204"/>
-                  </a:lnTo>
-                  <a:lnTo>
-                    <a:pt x="429735" y="73087"/>
-                  </a:lnTo>
-                  <a:lnTo>
-                    <a:pt x="501357" y="84854"/>
-                  </a:lnTo>
-                  <a:lnTo>
-                    <a:pt x="572980" y="96505"/>
-                  </a:lnTo>
-                  <a:lnTo>
-                    <a:pt x="644602" y="108042"/>
-                  </a:lnTo>
-                  <a:lnTo>
-                    <a:pt x="716225" y="119466"/>
-                  </a:lnTo>
-                  <a:lnTo>
-                    <a:pt x="787847" y="130778"/>
-                  </a:lnTo>
-                  <a:lnTo>
-                    <a:pt x="859470" y="141979"/>
-                  </a:lnTo>
-                  <a:lnTo>
-                    <a:pt x="931092" y="153070"/>
-                  </a:lnTo>
-                  <a:lnTo>
-                    <a:pt x="1002715" y="164052"/>
-                  </a:lnTo>
-                  <a:lnTo>
-                    <a:pt x="1074337" y="174927"/>
-                  </a:lnTo>
-                  <a:lnTo>
-                    <a:pt x="1145960" y="185695"/>
-                  </a:lnTo>
-                  <a:lnTo>
-                    <a:pt x="1217582" y="196357"/>
-                  </a:lnTo>
-                  <a:lnTo>
-                    <a:pt x="1289205" y="206915"/>
-                  </a:lnTo>
-                  <a:lnTo>
-                    <a:pt x="1360827" y="217369"/>
-                  </a:lnTo>
-                  <a:lnTo>
-                    <a:pt x="1432450" y="227721"/>
-                  </a:lnTo>
-                  <a:lnTo>
-                    <a:pt x="1504073" y="237971"/>
-                  </a:lnTo>
-                  <a:lnTo>
-                    <a:pt x="1575695" y="248121"/>
-                  </a:lnTo>
-                  <a:lnTo>
-                    <a:pt x="1647318" y="258171"/>
-                  </a:lnTo>
-                  <a:lnTo>
-                    <a:pt x="1718940" y="268122"/>
-                  </a:lnTo>
-                  <a:lnTo>
-                    <a:pt x="1790563" y="277976"/>
-                  </a:lnTo>
-                  <a:lnTo>
-                    <a:pt x="1862185" y="287734"/>
-                  </a:lnTo>
-                  <a:lnTo>
-                    <a:pt x="1933808" y="297395"/>
-                  </a:lnTo>
-                  <a:lnTo>
-                    <a:pt x="2005430" y="306962"/>
-                  </a:lnTo>
-                  <a:lnTo>
-                    <a:pt x="2077053" y="316435"/>
-                  </a:lnTo>
-                  <a:lnTo>
-                    <a:pt x="2148675" y="325816"/>
-                  </a:lnTo>
-                  <a:lnTo>
-                    <a:pt x="2220298" y="335104"/>
-                  </a:lnTo>
-                  <a:lnTo>
-                    <a:pt x="2291920" y="344301"/>
-                  </a:lnTo>
-                  <a:lnTo>
-                    <a:pt x="2363543" y="353408"/>
-                  </a:lnTo>
-                  <a:lnTo>
-                    <a:pt x="2435165" y="362425"/>
-                  </a:lnTo>
-                  <a:lnTo>
-                    <a:pt x="2506788" y="371355"/>
-                  </a:lnTo>
-                  <a:lnTo>
-                    <a:pt x="2578410" y="380196"/>
-                  </a:lnTo>
-                  <a:lnTo>
-                    <a:pt x="2650033" y="388951"/>
-                  </a:lnTo>
-                  <a:lnTo>
-                    <a:pt x="2721655" y="397620"/>
-                  </a:lnTo>
-                  <a:lnTo>
-                    <a:pt x="2793278" y="406204"/>
-                  </a:lnTo>
-                  <a:lnTo>
-                    <a:pt x="2864901" y="414704"/>
-                  </a:lnTo>
-                  <a:lnTo>
-                    <a:pt x="2936523" y="423121"/>
-                  </a:lnTo>
-                  <a:lnTo>
-                    <a:pt x="3008146" y="431455"/>
-                  </a:lnTo>
-                  <a:lnTo>
-                    <a:pt x="3079768" y="439707"/>
-                  </a:lnTo>
-                  <a:lnTo>
-                    <a:pt x="3151391" y="447878"/>
-                  </a:lnTo>
-                  <a:lnTo>
-                    <a:pt x="3223013" y="455969"/>
-                  </a:lnTo>
-                  <a:lnTo>
-                    <a:pt x="3294636" y="463981"/>
-                  </a:lnTo>
-                  <a:lnTo>
-                    <a:pt x="3366258" y="471914"/>
-                  </a:lnTo>
-                  <a:lnTo>
-                    <a:pt x="3437881" y="479770"/>
-                  </a:lnTo>
-                  <a:lnTo>
-                    <a:pt x="3509503" y="487548"/>
-                  </a:lnTo>
-                  <a:lnTo>
-                    <a:pt x="3581126" y="495250"/>
-                  </a:lnTo>
-                  <a:lnTo>
-                    <a:pt x="3652748" y="502877"/>
-                  </a:lnTo>
-                  <a:lnTo>
-                    <a:pt x="3724371" y="510429"/>
-                  </a:lnTo>
-                  <a:lnTo>
-                    <a:pt x="3795993" y="517907"/>
-                  </a:lnTo>
-                  <a:lnTo>
-                    <a:pt x="3867616" y="525311"/>
-                  </a:lnTo>
-                  <a:lnTo>
-                    <a:pt x="3939238" y="532643"/>
-                  </a:lnTo>
-                  <a:lnTo>
-                    <a:pt x="4010861" y="539903"/>
-                  </a:lnTo>
-                  <a:lnTo>
-                    <a:pt x="4082483" y="547091"/>
-                  </a:lnTo>
-                  <a:lnTo>
-                    <a:pt x="4154106" y="554210"/>
-                  </a:lnTo>
-                  <a:lnTo>
-                    <a:pt x="4225729" y="561258"/>
-                  </a:lnTo>
-                  <a:lnTo>
-                    <a:pt x="4297351" y="568237"/>
-                  </a:lnTo>
-                  <a:lnTo>
-                    <a:pt x="4368974" y="575148"/>
-                  </a:lnTo>
-                  <a:lnTo>
-                    <a:pt x="4440596" y="581991"/>
-                  </a:lnTo>
-                  <a:lnTo>
-                    <a:pt x="4512219" y="588767"/>
-                  </a:lnTo>
-                  <a:lnTo>
-                    <a:pt x="4583841" y="595477"/>
-                  </a:lnTo>
-                  <a:lnTo>
-                    <a:pt x="4655464" y="602120"/>
-                  </a:lnTo>
-                  <a:lnTo>
-                    <a:pt x="4727086" y="608699"/>
-                  </a:lnTo>
-                  <a:lnTo>
-                    <a:pt x="4798709" y="615213"/>
-                  </a:lnTo>
-                  <a:lnTo>
-                    <a:pt x="4870331" y="621663"/>
-                  </a:lnTo>
-                  <a:lnTo>
-                    <a:pt x="4941954" y="628050"/>
-                  </a:lnTo>
-                  <a:lnTo>
-                    <a:pt x="5013576" y="634374"/>
-                  </a:lnTo>
-                  <a:lnTo>
-                    <a:pt x="5085199" y="640637"/>
-                  </a:lnTo>
-                  <a:lnTo>
-                    <a:pt x="5156821" y="646838"/>
-                  </a:lnTo>
-                  <a:lnTo>
-                    <a:pt x="5228444" y="652978"/>
-                  </a:lnTo>
-                  <a:lnTo>
-                    <a:pt x="5300066" y="659057"/>
-                  </a:lnTo>
-                  <a:lnTo>
-                    <a:pt x="5371689" y="665078"/>
-                  </a:lnTo>
-                  <a:lnTo>
-                    <a:pt x="5443311" y="671039"/>
-                  </a:lnTo>
-                  <a:lnTo>
-                    <a:pt x="5514934" y="676941"/>
-                  </a:lnTo>
-                  <a:lnTo>
-                    <a:pt x="5586557" y="682786"/>
-                  </a:lnTo>
-                  <a:lnTo>
-                    <a:pt x="5658179" y="688574"/>
-                  </a:lnTo>
-                  <a:lnTo>
-                    <a:pt x="5729802" y="694304"/>
-                  </a:lnTo>
-                  <a:lnTo>
-                    <a:pt x="5801424" y="699979"/>
-                  </a:lnTo>
-                  <a:lnTo>
-                    <a:pt x="5873047" y="705598"/>
-                  </a:lnTo>
-                  <a:lnTo>
-                    <a:pt x="5944669" y="711162"/>
-                  </a:lnTo>
-                  <a:lnTo>
-                    <a:pt x="6016292" y="716671"/>
-                  </a:lnTo>
-                  <a:lnTo>
-                    <a:pt x="6087914" y="722126"/>
-                  </a:lnTo>
-                  <a:lnTo>
-                    <a:pt x="6159537" y="727528"/>
-                  </a:lnTo>
-                  <a:lnTo>
-                    <a:pt x="6231159" y="732877"/>
-                  </a:lnTo>
-                  <a:lnTo>
-                    <a:pt x="6302782" y="738173"/>
-                  </a:lnTo>
-                  <a:lnTo>
-                    <a:pt x="6374404" y="743417"/>
-                  </a:lnTo>
-                  <a:lnTo>
-                    <a:pt x="6446027" y="748610"/>
-                  </a:lnTo>
-                  <a:lnTo>
-                    <a:pt x="6517649" y="753752"/>
-                  </a:lnTo>
-                  <a:lnTo>
-                    <a:pt x="6589272" y="758844"/>
-                  </a:lnTo>
-                  <a:lnTo>
-                    <a:pt x="6660894" y="763885"/>
-                  </a:lnTo>
-                  <a:lnTo>
-                    <a:pt x="6732517" y="768877"/>
-                  </a:lnTo>
-                  <a:lnTo>
-                    <a:pt x="6804139" y="773821"/>
-                  </a:lnTo>
-                  <a:lnTo>
-                    <a:pt x="6875762" y="778715"/>
-                  </a:lnTo>
-                  <a:lnTo>
-                    <a:pt x="6947385" y="783562"/>
-                  </a:lnTo>
-                  <a:lnTo>
-                    <a:pt x="7019007" y="788361"/>
-                  </a:lnTo>
-                  <a:lnTo>
-                    <a:pt x="7090630" y="793113"/>
+                    <a:pt x="70344" y="4504"/>
+                  </a:lnTo>
+                  <a:lnTo>
+                    <a:pt x="140688" y="8965"/>
+                  </a:lnTo>
+                  <a:lnTo>
+                    <a:pt x="211033" y="13382"/>
+                  </a:lnTo>
+                  <a:lnTo>
+                    <a:pt x="281377" y="17756"/>
+                  </a:lnTo>
+                  <a:lnTo>
+                    <a:pt x="351722" y="22087"/>
+                  </a:lnTo>
+                  <a:lnTo>
+                    <a:pt x="422066" y="26375"/>
+                  </a:lnTo>
+                  <a:lnTo>
+                    <a:pt x="492411" y="30622"/>
+                  </a:lnTo>
+                  <a:lnTo>
+                    <a:pt x="562755" y="34826"/>
+                  </a:lnTo>
+                  <a:lnTo>
+                    <a:pt x="633100" y="38990"/>
+                  </a:lnTo>
+                  <a:lnTo>
+                    <a:pt x="703444" y="43112"/>
+                  </a:lnTo>
+                  <a:lnTo>
+                    <a:pt x="773789" y="47194"/>
+                  </a:lnTo>
+                  <a:lnTo>
+                    <a:pt x="844133" y="51237"/>
+                  </a:lnTo>
+                  <a:lnTo>
+                    <a:pt x="914478" y="55239"/>
+                  </a:lnTo>
+                  <a:lnTo>
+                    <a:pt x="984822" y="59202"/>
+                  </a:lnTo>
+                  <a:lnTo>
+                    <a:pt x="1055167" y="63127"/>
+                  </a:lnTo>
+                  <a:lnTo>
+                    <a:pt x="1125511" y="67013"/>
+                  </a:lnTo>
+                  <a:lnTo>
+                    <a:pt x="1195856" y="70860"/>
+                  </a:lnTo>
+                  <a:lnTo>
+                    <a:pt x="1266200" y="74670"/>
+                  </a:lnTo>
+                  <a:lnTo>
+                    <a:pt x="1336545" y="78443"/>
+                  </a:lnTo>
+                  <a:lnTo>
+                    <a:pt x="1406889" y="82179"/>
+                  </a:lnTo>
+                  <a:lnTo>
+                    <a:pt x="1477234" y="85878"/>
+                  </a:lnTo>
+                  <a:lnTo>
+                    <a:pt x="1547578" y="89541"/>
+                  </a:lnTo>
+                  <a:lnTo>
+                    <a:pt x="1617923" y="93167"/>
+                  </a:lnTo>
+                  <a:lnTo>
+                    <a:pt x="1688267" y="96759"/>
+                  </a:lnTo>
+                  <a:lnTo>
+                    <a:pt x="1758612" y="100315"/>
+                  </a:lnTo>
+                  <a:lnTo>
+                    <a:pt x="1828956" y="103836"/>
+                  </a:lnTo>
+                  <a:lnTo>
+                    <a:pt x="1899301" y="107323"/>
+                  </a:lnTo>
+                  <a:lnTo>
+                    <a:pt x="1969645" y="110775"/>
+                  </a:lnTo>
+                  <a:lnTo>
+                    <a:pt x="2039990" y="114194"/>
+                  </a:lnTo>
+                  <a:lnTo>
+                    <a:pt x="2110334" y="117579"/>
+                  </a:lnTo>
+                  <a:lnTo>
+                    <a:pt x="2180679" y="120931"/>
+                  </a:lnTo>
+                  <a:lnTo>
+                    <a:pt x="2251023" y="124250"/>
+                  </a:lnTo>
+                  <a:lnTo>
+                    <a:pt x="2321368" y="127536"/>
+                  </a:lnTo>
+                  <a:lnTo>
+                    <a:pt x="2391712" y="130791"/>
+                  </a:lnTo>
+                  <a:lnTo>
+                    <a:pt x="2462057" y="134013"/>
+                  </a:lnTo>
+                  <a:lnTo>
+                    <a:pt x="2532401" y="137204"/>
+                  </a:lnTo>
+                  <a:lnTo>
+                    <a:pt x="2602746" y="140363"/>
+                  </a:lnTo>
+                  <a:lnTo>
+                    <a:pt x="2673090" y="143491"/>
+                  </a:lnTo>
+                  <a:lnTo>
+                    <a:pt x="2743435" y="146589"/>
+                  </a:lnTo>
+                  <a:lnTo>
+                    <a:pt x="2813779" y="149657"/>
+                  </a:lnTo>
+                  <a:lnTo>
+                    <a:pt x="2884124" y="152694"/>
+                  </a:lnTo>
+                  <a:lnTo>
+                    <a:pt x="2954468" y="155702"/>
+                  </a:lnTo>
+                  <a:lnTo>
+                    <a:pt x="3024813" y="158680"/>
+                  </a:lnTo>
+                  <a:lnTo>
+                    <a:pt x="3095157" y="161628"/>
+                  </a:lnTo>
+                  <a:lnTo>
+                    <a:pt x="3165502" y="164548"/>
+                  </a:lnTo>
+                  <a:lnTo>
+                    <a:pt x="3235846" y="167440"/>
+                  </a:lnTo>
+                  <a:lnTo>
+                    <a:pt x="3306191" y="170302"/>
+                  </a:lnTo>
+                  <a:lnTo>
+                    <a:pt x="3376535" y="173137"/>
+                  </a:lnTo>
+                  <a:lnTo>
+                    <a:pt x="3446880" y="175944"/>
+                  </a:lnTo>
+                  <a:lnTo>
+                    <a:pt x="3517224" y="178724"/>
+                  </a:lnTo>
+                  <a:lnTo>
+                    <a:pt x="3587569" y="181476"/>
+                  </a:lnTo>
+                  <a:lnTo>
+                    <a:pt x="3657913" y="184201"/>
+                  </a:lnTo>
+                  <a:lnTo>
+                    <a:pt x="3728257" y="186900"/>
+                  </a:lnTo>
+                  <a:lnTo>
+                    <a:pt x="3798602" y="189572"/>
+                  </a:lnTo>
+                  <a:lnTo>
+                    <a:pt x="3868946" y="192218"/>
+                  </a:lnTo>
+                  <a:lnTo>
+                    <a:pt x="3939291" y="194838"/>
+                  </a:lnTo>
+                  <a:lnTo>
+                    <a:pt x="4009635" y="197432"/>
+                  </a:lnTo>
+                  <a:lnTo>
+                    <a:pt x="4079980" y="200001"/>
+                  </a:lnTo>
+                  <a:lnTo>
+                    <a:pt x="4150324" y="202545"/>
+                  </a:lnTo>
+                  <a:lnTo>
+                    <a:pt x="4220669" y="205063"/>
+                  </a:lnTo>
+                  <a:lnTo>
+                    <a:pt x="4291013" y="207557"/>
+                  </a:lnTo>
+                  <a:lnTo>
+                    <a:pt x="4361358" y="210027"/>
+                  </a:lnTo>
+                  <a:lnTo>
+                    <a:pt x="4431702" y="212472"/>
+                  </a:lnTo>
+                  <a:lnTo>
+                    <a:pt x="4502047" y="214893"/>
+                  </a:lnTo>
+                  <a:lnTo>
+                    <a:pt x="4572391" y="217291"/>
+                  </a:lnTo>
+                  <a:lnTo>
+                    <a:pt x="4642736" y="219665"/>
+                  </a:lnTo>
+                  <a:lnTo>
+                    <a:pt x="4713080" y="222016"/>
+                  </a:lnTo>
+                  <a:lnTo>
+                    <a:pt x="4783425" y="224343"/>
+                  </a:lnTo>
+                  <a:lnTo>
+                    <a:pt x="4853769" y="226648"/>
+                  </a:lnTo>
+                  <a:lnTo>
+                    <a:pt x="4924114" y="228930"/>
+                  </a:lnTo>
+                  <a:lnTo>
+                    <a:pt x="4994458" y="231190"/>
+                  </a:lnTo>
+                  <a:lnTo>
+                    <a:pt x="5064803" y="233428"/>
+                  </a:lnTo>
+                  <a:lnTo>
+                    <a:pt x="5135147" y="235644"/>
+                  </a:lnTo>
+                  <a:lnTo>
+                    <a:pt x="5205492" y="237838"/>
+                  </a:lnTo>
+                  <a:lnTo>
+                    <a:pt x="5275836" y="240011"/>
+                  </a:lnTo>
+                  <a:lnTo>
+                    <a:pt x="5346181" y="242162"/>
+                  </a:lnTo>
+                  <a:lnTo>
+                    <a:pt x="5416525" y="244292"/>
+                  </a:lnTo>
+                  <a:lnTo>
+                    <a:pt x="5486870" y="246401"/>
+                  </a:lnTo>
+                  <a:lnTo>
+                    <a:pt x="5557214" y="248490"/>
+                  </a:lnTo>
+                  <a:lnTo>
+                    <a:pt x="5627559" y="250558"/>
+                  </a:lnTo>
+                  <a:lnTo>
+                    <a:pt x="5697903" y="252606"/>
+                  </a:lnTo>
+                  <a:lnTo>
+                    <a:pt x="5768248" y="254633"/>
+                  </a:lnTo>
+                  <a:lnTo>
+                    <a:pt x="5838592" y="256641"/>
+                  </a:lnTo>
+                  <a:lnTo>
+                    <a:pt x="5908937" y="258629"/>
+                  </a:lnTo>
+                  <a:lnTo>
+                    <a:pt x="5979281" y="260598"/>
+                  </a:lnTo>
+                  <a:lnTo>
+                    <a:pt x="6049626" y="262547"/>
+                  </a:lnTo>
+                  <a:lnTo>
+                    <a:pt x="6119970" y="264478"/>
+                  </a:lnTo>
+                  <a:lnTo>
+                    <a:pt x="6190315" y="266389"/>
+                  </a:lnTo>
+                  <a:lnTo>
+                    <a:pt x="6260659" y="268281"/>
+                  </a:lnTo>
+                  <a:lnTo>
+                    <a:pt x="6331004" y="270155"/>
+                  </a:lnTo>
+                  <a:lnTo>
+                    <a:pt x="6401348" y="272011"/>
+                  </a:lnTo>
+                  <a:lnTo>
+                    <a:pt x="6471693" y="273848"/>
+                  </a:lnTo>
+                  <a:lnTo>
+                    <a:pt x="6542037" y="275668"/>
+                  </a:lnTo>
+                  <a:lnTo>
+                    <a:pt x="6612382" y="277469"/>
+                  </a:lnTo>
+                  <a:lnTo>
+                    <a:pt x="6682726" y="279253"/>
+                  </a:lnTo>
+                  <a:lnTo>
+                    <a:pt x="6753071" y="281020"/>
+                  </a:lnTo>
+                  <a:lnTo>
+                    <a:pt x="6823415" y="282769"/>
+                  </a:lnTo>
+                  <a:lnTo>
+                    <a:pt x="6893760" y="284501"/>
+                  </a:lnTo>
+                  <a:lnTo>
+                    <a:pt x="6964104" y="286216"/>
                   </a:lnTo>
                 </a:path>
               </a:pathLst>
@@ -4654,27 +4689,27 @@
         </p:sp>
         <p:sp>
           <p:nvSpPr>
-            <p:cNvPr id="26" name="pl26"/>
+            <p:cNvPr id="27" name="pl27"/>
             <p:cNvSpPr/>
             <p:nvPr/>
           </p:nvSpPr>
           <p:spPr>
             <a:xfrm>
-              <a:off x="817517" y="4727786"/>
-              <a:ext cx="7799693" cy="0"/>
+              <a:off x="887106" y="3100960"/>
+              <a:ext cx="7660515" cy="0"/>
             </a:xfrm>
             <a:custGeom>
               <a:avLst/>
               <a:pathLst>
-                <a:path w="7799693" h="0">
+                <a:path w="7660515" h="0">
                   <a:moveTo>
                     <a:pt x="0" y="0"/>
                   </a:moveTo>
                   <a:lnTo>
-                    <a:pt x="7799693" y="0"/>
-                  </a:lnTo>
-                  <a:lnTo>
-                    <a:pt x="7799693" y="0"/>
+                    <a:pt x="7660515" y="0"/>
+                  </a:lnTo>
+                  <a:lnTo>
+                    <a:pt x="7660515" y="0"/>
                   </a:lnTo>
                 </a:path>
               </a:pathLst>
@@ -4697,21 +4732,21 @@
         </p:sp>
         <p:sp>
           <p:nvSpPr>
-            <p:cNvPr id="27" name="pl27"/>
+            <p:cNvPr id="28" name="pl28"/>
             <p:cNvSpPr/>
             <p:nvPr/>
           </p:nvSpPr>
           <p:spPr>
             <a:xfrm>
-              <a:off x="4284781" y="2073503"/>
-              <a:ext cx="0" cy="3649639"/>
+              <a:off x="4292500" y="2143092"/>
+              <a:ext cx="0" cy="1317069"/>
             </a:xfrm>
             <a:custGeom>
               <a:avLst/>
               <a:pathLst>
-                <a:path w="0" h="3649639">
+                <a:path w="0" h="1317069">
                   <a:moveTo>
-                    <a:pt x="0" y="3649639"/>
+                    <a:pt x="0" y="1317069"/>
                   </a:moveTo>
                   <a:lnTo>
                     <a:pt x="0" y="0"/>
@@ -4740,21 +4775,21 @@
         </p:sp>
         <p:sp>
           <p:nvSpPr>
-            <p:cNvPr id="28" name="pl28"/>
+            <p:cNvPr id="29" name="pl29"/>
             <p:cNvSpPr/>
             <p:nvPr/>
           </p:nvSpPr>
           <p:spPr>
             <a:xfrm>
-              <a:off x="3095906" y="2073503"/>
-              <a:ext cx="0" cy="3649639"/>
+              <a:off x="3124839" y="2143092"/>
+              <a:ext cx="0" cy="1317069"/>
             </a:xfrm>
             <a:custGeom>
               <a:avLst/>
               <a:pathLst>
-                <a:path w="0" h="3649639">
+                <a:path w="0" h="1317069">
                   <a:moveTo>
-                    <a:pt x="0" y="3649639"/>
+                    <a:pt x="0" y="1317069"/>
                   </a:moveTo>
                   <a:lnTo>
                     <a:pt x="0" y="0"/>
@@ -4783,21 +4818,21 @@
         </p:sp>
         <p:sp>
           <p:nvSpPr>
-            <p:cNvPr id="29" name="pl29"/>
+            <p:cNvPr id="30" name="pl30"/>
             <p:cNvSpPr/>
             <p:nvPr/>
           </p:nvSpPr>
           <p:spPr>
             <a:xfrm>
-              <a:off x="5522967" y="2073503"/>
-              <a:ext cx="0" cy="3649639"/>
+              <a:off x="5508592" y="2143092"/>
+              <a:ext cx="0" cy="1317069"/>
             </a:xfrm>
             <a:custGeom>
               <a:avLst/>
               <a:pathLst>
-                <a:path w="0" h="3649639">
+                <a:path w="0" h="1317069">
                   <a:moveTo>
-                    <a:pt x="0" y="3649639"/>
+                    <a:pt x="0" y="1317069"/>
                   </a:moveTo>
                   <a:lnTo>
                     <a:pt x="0" y="0"/>
@@ -4826,13 +4861,13 @@
         </p:sp>
         <p:sp>
           <p:nvSpPr>
-            <p:cNvPr id="30" name="tx30"/>
+            <p:cNvPr id="31" name="tx31"/>
             <p:cNvSpPr/>
             <p:nvPr/>
           </p:nvSpPr>
           <p:spPr>
             <a:xfrm>
-              <a:off x="692708" y="5517199"/>
+              <a:off x="762297" y="3360243"/>
               <a:ext cx="62179" cy="80101"/>
             </a:xfrm>
             <a:prstGeom prst="rect">
@@ -4872,13 +4907,13 @@
         </p:sp>
         <p:sp>
           <p:nvSpPr>
-            <p:cNvPr id="31" name="tx31"/>
+            <p:cNvPr id="32" name="tx32"/>
             <p:cNvSpPr/>
             <p:nvPr/>
           </p:nvSpPr>
           <p:spPr>
             <a:xfrm>
-              <a:off x="692708" y="4687735"/>
+              <a:off x="762297" y="3060909"/>
               <a:ext cx="62179" cy="80101"/>
             </a:xfrm>
             <a:prstGeom prst="rect">
@@ -4918,13 +4953,13 @@
         </p:sp>
         <p:sp>
           <p:nvSpPr>
-            <p:cNvPr id="32" name="tx32"/>
+            <p:cNvPr id="33" name="tx33"/>
             <p:cNvSpPr/>
             <p:nvPr/>
           </p:nvSpPr>
           <p:spPr>
             <a:xfrm>
-              <a:off x="692708" y="3858272"/>
+              <a:off x="762297" y="2761575"/>
               <a:ext cx="62179" cy="80101"/>
             </a:xfrm>
             <a:prstGeom prst="rect">
@@ -4964,13 +4999,13 @@
         </p:sp>
         <p:sp>
           <p:nvSpPr>
-            <p:cNvPr id="33" name="tx33"/>
+            <p:cNvPr id="34" name="tx34"/>
             <p:cNvSpPr/>
             <p:nvPr/>
           </p:nvSpPr>
           <p:spPr>
             <a:xfrm>
-              <a:off x="692708" y="3028808"/>
+              <a:off x="762297" y="2462242"/>
               <a:ext cx="62179" cy="80101"/>
             </a:xfrm>
             <a:prstGeom prst="rect">
@@ -5010,13 +5045,13 @@
         </p:sp>
         <p:sp>
           <p:nvSpPr>
-            <p:cNvPr id="34" name="tx34"/>
+            <p:cNvPr id="35" name="tx35"/>
             <p:cNvSpPr/>
             <p:nvPr/>
           </p:nvSpPr>
           <p:spPr>
             <a:xfrm>
-              <a:off x="692708" y="2199345"/>
+              <a:off x="762297" y="2162908"/>
               <a:ext cx="62179" cy="80101"/>
             </a:xfrm>
             <a:prstGeom prst="rect">
@@ -5056,13 +5091,13 @@
         </p:sp>
         <p:sp>
           <p:nvSpPr>
-            <p:cNvPr id="35" name="tx35"/>
+            <p:cNvPr id="36" name="tx36"/>
             <p:cNvSpPr/>
             <p:nvPr/>
           </p:nvSpPr>
           <p:spPr>
             <a:xfrm>
-              <a:off x="2152181" y="5785772"/>
+              <a:off x="2196512" y="3522791"/>
               <a:ext cx="161574" cy="80101"/>
             </a:xfrm>
             <a:prstGeom prst="rect">
@@ -5102,13 +5137,13 @@
         </p:sp>
         <p:sp>
           <p:nvSpPr>
-            <p:cNvPr id="36" name="tx36"/>
+            <p:cNvPr id="37" name="tx37"/>
             <p:cNvSpPr/>
             <p:nvPr/>
           </p:nvSpPr>
           <p:spPr>
             <a:xfrm>
-              <a:off x="3884104" y="5785772"/>
+              <a:off x="3897531" y="3522791"/>
               <a:ext cx="161574" cy="80101"/>
             </a:xfrm>
             <a:prstGeom prst="rect">
@@ -5148,13 +5183,13 @@
         </p:sp>
         <p:sp>
           <p:nvSpPr>
-            <p:cNvPr id="37" name="tx37"/>
+            <p:cNvPr id="38" name="tx38"/>
             <p:cNvSpPr/>
             <p:nvPr/>
           </p:nvSpPr>
           <p:spPr>
             <a:xfrm>
-              <a:off x="5665725" y="5785772"/>
+              <a:off x="5648248" y="3522791"/>
               <a:ext cx="62179" cy="80101"/>
             </a:xfrm>
             <a:prstGeom prst="rect">
@@ -5194,13 +5229,13 @@
         </p:sp>
         <p:sp>
           <p:nvSpPr>
-            <p:cNvPr id="38" name="tx38"/>
+            <p:cNvPr id="39" name="tx39"/>
             <p:cNvSpPr/>
             <p:nvPr/>
           </p:nvSpPr>
           <p:spPr>
             <a:xfrm>
-              <a:off x="7366559" y="5785772"/>
+              <a:off x="7318177" y="3522791"/>
               <a:ext cx="124358" cy="80101"/>
             </a:xfrm>
             <a:prstGeom prst="rect">
@@ -5240,13 +5275,13 @@
         </p:sp>
         <p:sp>
           <p:nvSpPr>
-            <p:cNvPr id="39" name="tx39"/>
+            <p:cNvPr id="40" name="tx40"/>
             <p:cNvSpPr/>
             <p:nvPr/>
           </p:nvSpPr>
           <p:spPr>
             <a:xfrm>
-              <a:off x="1561815" y="5925448"/>
+              <a:off x="1561815" y="3662467"/>
               <a:ext cx="6311097" cy="100218"/>
             </a:xfrm>
             <a:prstGeom prst="rect">
@@ -5286,13 +5321,13 @@
         </p:sp>
         <p:sp>
           <p:nvSpPr>
-            <p:cNvPr id="40" name="tx40"/>
+            <p:cNvPr id="41" name="tx41"/>
             <p:cNvSpPr/>
             <p:nvPr/>
           </p:nvSpPr>
           <p:spPr>
             <a:xfrm rot="-5400000">
-              <a:off x="68446" y="3848213"/>
+              <a:off x="138035" y="2751517"/>
               <a:ext cx="1016904" cy="100218"/>
             </a:xfrm>
             <a:prstGeom prst="rect">
@@ -5332,13 +5367,13 @@
         </p:sp>
         <p:sp>
           <p:nvSpPr>
-            <p:cNvPr id="41" name="tx41"/>
+            <p:cNvPr id="42" name="tx42"/>
             <p:cNvSpPr/>
             <p:nvPr/>
           </p:nvSpPr>
           <p:spPr>
             <a:xfrm>
-              <a:off x="817517" y="1896563"/>
+              <a:off x="887106" y="1966152"/>
               <a:ext cx="6959864" cy="82021"/>
             </a:xfrm>
             <a:prstGeom prst="rect">
@@ -5378,13 +5413,3789 @@
         </p:sp>
         <p:sp>
           <p:nvSpPr>
-            <p:cNvPr id="42" name="tx42"/>
+            <p:cNvPr id="43" name="tx43"/>
             <p:cNvSpPr/>
             <p:nvPr/>
           </p:nvSpPr>
           <p:spPr>
             <a:xfrm>
-              <a:off x="817517" y="1669789"/>
+              <a:off x="887106" y="1739378"/>
+              <a:ext cx="3081985" cy="120152"/>
+            </a:xfrm>
+            <a:prstGeom prst="rect">
+              <a:avLst/>
+            </a:prstGeom>
+            <a:noFill/>
+          </p:spPr>
+          <p:txBody>
+            <a:bodyPr lIns="0" rIns="0" tIns="0" bIns="0" anchorCtr="1" anchor="ctr" wrap="none"/>
+            <a:lstStyle/>
+            <a:p>
+              <a:pPr algn="l" marL="0" marR="0" indent="0">
+                <a:lnSpc>
+                  <a:spcPts val="1320"/>
+                </a:lnSpc>
+                <a:spcBef>
+                  <a:spcPts val="0"/>
+                </a:spcBef>
+                <a:spcAft>
+                  <a:spcPts val="0"/>
+                </a:spcAft>
+              </a:pPr>
+              <a:r>
+                <a:rPr sz="1320">
+                  <a:solidFill>
+                    <a:srgbClr val="000000">
+                      <a:alpha val="100000"/>
+                    </a:srgbClr>
+                  </a:solidFill>
+                  <a:latin typeface="Helvetica"/>
+                  <a:cs typeface="Helvetica"/>
+                </a:rPr>
+                <a:t>Anemia Grade 2 (Sensitivity, Carboplatin)</a:t>
+              </a:r>
+            </a:p>
+          </p:txBody>
+        </p:sp>
+        <p:sp>
+          <p:nvSpPr>
+            <p:cNvPr id="44" name="pl44"/>
+            <p:cNvSpPr/>
+            <p:nvPr/>
+          </p:nvSpPr>
+          <p:spPr>
+            <a:xfrm>
+              <a:off x="887106" y="5444019"/>
+              <a:ext cx="7660515" cy="0"/>
+            </a:xfrm>
+            <a:custGeom>
+              <a:avLst/>
+              <a:pathLst>
+                <a:path w="7660515" h="0">
+                  <a:moveTo>
+                    <a:pt x="0" y="0"/>
+                  </a:moveTo>
+                  <a:lnTo>
+                    <a:pt x="7660515" y="0"/>
+                  </a:lnTo>
+                  <a:lnTo>
+                    <a:pt x="7660515" y="0"/>
+                  </a:lnTo>
+                </a:path>
+              </a:pathLst>
+            </a:custGeom>
+            <a:ln w="6775" cap="flat">
+              <a:solidFill>
+                <a:srgbClr val="EBEBEB">
+                  <a:alpha val="100000"/>
+                </a:srgbClr>
+              </a:solidFill>
+              <a:prstDash val="solid"/>
+              <a:round/>
+            </a:ln>
+          </p:spPr>
+          <p:txBody>
+            <a:bodyPr/>
+            <a:lstStyle/>
+            <a:p/>
+          </p:txBody>
+        </p:sp>
+        <p:sp>
+          <p:nvSpPr>
+            <p:cNvPr id="45" name="pl45"/>
+            <p:cNvSpPr/>
+            <p:nvPr/>
+          </p:nvSpPr>
+          <p:spPr>
+            <a:xfrm>
+              <a:off x="887106" y="5144686"/>
+              <a:ext cx="7660515" cy="0"/>
+            </a:xfrm>
+            <a:custGeom>
+              <a:avLst/>
+              <a:pathLst>
+                <a:path w="7660515" h="0">
+                  <a:moveTo>
+                    <a:pt x="0" y="0"/>
+                  </a:moveTo>
+                  <a:lnTo>
+                    <a:pt x="7660515" y="0"/>
+                  </a:lnTo>
+                  <a:lnTo>
+                    <a:pt x="7660515" y="0"/>
+                  </a:lnTo>
+                </a:path>
+              </a:pathLst>
+            </a:custGeom>
+            <a:ln w="6775" cap="flat">
+              <a:solidFill>
+                <a:srgbClr val="EBEBEB">
+                  <a:alpha val="100000"/>
+                </a:srgbClr>
+              </a:solidFill>
+              <a:prstDash val="solid"/>
+              <a:round/>
+            </a:ln>
+          </p:spPr>
+          <p:txBody>
+            <a:bodyPr/>
+            <a:lstStyle/>
+            <a:p/>
+          </p:txBody>
+        </p:sp>
+        <p:sp>
+          <p:nvSpPr>
+            <p:cNvPr id="46" name="pl46"/>
+            <p:cNvSpPr/>
+            <p:nvPr/>
+          </p:nvSpPr>
+          <p:spPr>
+            <a:xfrm>
+              <a:off x="887106" y="4845352"/>
+              <a:ext cx="7660515" cy="0"/>
+            </a:xfrm>
+            <a:custGeom>
+              <a:avLst/>
+              <a:pathLst>
+                <a:path w="7660515" h="0">
+                  <a:moveTo>
+                    <a:pt x="0" y="0"/>
+                  </a:moveTo>
+                  <a:lnTo>
+                    <a:pt x="7660515" y="0"/>
+                  </a:lnTo>
+                  <a:lnTo>
+                    <a:pt x="7660515" y="0"/>
+                  </a:lnTo>
+                </a:path>
+              </a:pathLst>
+            </a:custGeom>
+            <a:ln w="6775" cap="flat">
+              <a:solidFill>
+                <a:srgbClr val="EBEBEB">
+                  <a:alpha val="100000"/>
+                </a:srgbClr>
+              </a:solidFill>
+              <a:prstDash val="solid"/>
+              <a:round/>
+            </a:ln>
+          </p:spPr>
+          <p:txBody>
+            <a:bodyPr/>
+            <a:lstStyle/>
+            <a:p/>
+          </p:txBody>
+        </p:sp>
+        <p:sp>
+          <p:nvSpPr>
+            <p:cNvPr id="47" name="pl47"/>
+            <p:cNvSpPr/>
+            <p:nvPr/>
+          </p:nvSpPr>
+          <p:spPr>
+            <a:xfrm>
+              <a:off x="887106" y="4546018"/>
+              <a:ext cx="7660515" cy="0"/>
+            </a:xfrm>
+            <a:custGeom>
+              <a:avLst/>
+              <a:pathLst>
+                <a:path w="7660515" h="0">
+                  <a:moveTo>
+                    <a:pt x="0" y="0"/>
+                  </a:moveTo>
+                  <a:lnTo>
+                    <a:pt x="7660515" y="0"/>
+                  </a:lnTo>
+                  <a:lnTo>
+                    <a:pt x="7660515" y="0"/>
+                  </a:lnTo>
+                </a:path>
+              </a:pathLst>
+            </a:custGeom>
+            <a:ln w="6775" cap="flat">
+              <a:solidFill>
+                <a:srgbClr val="EBEBEB">
+                  <a:alpha val="100000"/>
+                </a:srgbClr>
+              </a:solidFill>
+              <a:prstDash val="solid"/>
+              <a:round/>
+            </a:ln>
+          </p:spPr>
+          <p:txBody>
+            <a:bodyPr/>
+            <a:lstStyle/>
+            <a:p/>
+          </p:txBody>
+        </p:sp>
+        <p:sp>
+          <p:nvSpPr>
+            <p:cNvPr id="48" name="pl48"/>
+            <p:cNvSpPr/>
+            <p:nvPr/>
+          </p:nvSpPr>
+          <p:spPr>
+            <a:xfrm>
+              <a:off x="1001535" y="4336484"/>
+              <a:ext cx="0" cy="1317069"/>
+            </a:xfrm>
+            <a:custGeom>
+              <a:avLst/>
+              <a:pathLst>
+                <a:path w="0" h="1317069">
+                  <a:moveTo>
+                    <a:pt x="0" y="1317069"/>
+                  </a:moveTo>
+                  <a:lnTo>
+                    <a:pt x="0" y="0"/>
+                  </a:lnTo>
+                  <a:lnTo>
+                    <a:pt x="0" y="0"/>
+                  </a:lnTo>
+                </a:path>
+              </a:pathLst>
+            </a:custGeom>
+            <a:ln w="6775" cap="flat">
+              <a:solidFill>
+                <a:srgbClr val="EBEBEB">
+                  <a:alpha val="100000"/>
+                </a:srgbClr>
+              </a:solidFill>
+              <a:prstDash val="solid"/>
+              <a:round/>
+            </a:ln>
+          </p:spPr>
+          <p:txBody>
+            <a:bodyPr/>
+            <a:lstStyle/>
+            <a:p/>
+          </p:txBody>
+        </p:sp>
+        <p:sp>
+          <p:nvSpPr>
+            <p:cNvPr id="49" name="pl49"/>
+            <p:cNvSpPr/>
+            <p:nvPr/>
+          </p:nvSpPr>
+          <p:spPr>
+            <a:xfrm>
+              <a:off x="1852045" y="4336484"/>
+              <a:ext cx="0" cy="1317069"/>
+            </a:xfrm>
+            <a:custGeom>
+              <a:avLst/>
+              <a:pathLst>
+                <a:path w="0" h="1317069">
+                  <a:moveTo>
+                    <a:pt x="0" y="1317069"/>
+                  </a:moveTo>
+                  <a:lnTo>
+                    <a:pt x="0" y="0"/>
+                  </a:lnTo>
+                  <a:lnTo>
+                    <a:pt x="0" y="0"/>
+                  </a:lnTo>
+                </a:path>
+              </a:pathLst>
+            </a:custGeom>
+            <a:ln w="6775" cap="flat">
+              <a:solidFill>
+                <a:srgbClr val="EBEBEB">
+                  <a:alpha val="100000"/>
+                </a:srgbClr>
+              </a:solidFill>
+              <a:prstDash val="solid"/>
+              <a:round/>
+            </a:ln>
+          </p:spPr>
+          <p:txBody>
+            <a:bodyPr/>
+            <a:lstStyle/>
+            <a:p/>
+          </p:txBody>
+        </p:sp>
+        <p:sp>
+          <p:nvSpPr>
+            <p:cNvPr id="50" name="pl50"/>
+            <p:cNvSpPr/>
+            <p:nvPr/>
+          </p:nvSpPr>
+          <p:spPr>
+            <a:xfrm>
+              <a:off x="2702554" y="4336484"/>
+              <a:ext cx="0" cy="1317069"/>
+            </a:xfrm>
+            <a:custGeom>
+              <a:avLst/>
+              <a:pathLst>
+                <a:path w="0" h="1317069">
+                  <a:moveTo>
+                    <a:pt x="0" y="1317069"/>
+                  </a:moveTo>
+                  <a:lnTo>
+                    <a:pt x="0" y="0"/>
+                  </a:lnTo>
+                  <a:lnTo>
+                    <a:pt x="0" y="0"/>
+                  </a:lnTo>
+                </a:path>
+              </a:pathLst>
+            </a:custGeom>
+            <a:ln w="6775" cap="flat">
+              <a:solidFill>
+                <a:srgbClr val="EBEBEB">
+                  <a:alpha val="100000"/>
+                </a:srgbClr>
+              </a:solidFill>
+              <a:prstDash val="solid"/>
+              <a:round/>
+            </a:ln>
+          </p:spPr>
+          <p:txBody>
+            <a:bodyPr/>
+            <a:lstStyle/>
+            <a:p/>
+          </p:txBody>
+        </p:sp>
+        <p:sp>
+          <p:nvSpPr>
+            <p:cNvPr id="51" name="pl51"/>
+            <p:cNvSpPr/>
+            <p:nvPr/>
+          </p:nvSpPr>
+          <p:spPr>
+            <a:xfrm>
+              <a:off x="3553064" y="4336484"/>
+              <a:ext cx="0" cy="1317069"/>
+            </a:xfrm>
+            <a:custGeom>
+              <a:avLst/>
+              <a:pathLst>
+                <a:path w="0" h="1317069">
+                  <a:moveTo>
+                    <a:pt x="0" y="1317069"/>
+                  </a:moveTo>
+                  <a:lnTo>
+                    <a:pt x="0" y="0"/>
+                  </a:lnTo>
+                  <a:lnTo>
+                    <a:pt x="0" y="0"/>
+                  </a:lnTo>
+                </a:path>
+              </a:pathLst>
+            </a:custGeom>
+            <a:ln w="6775" cap="flat">
+              <a:solidFill>
+                <a:srgbClr val="EBEBEB">
+                  <a:alpha val="100000"/>
+                </a:srgbClr>
+              </a:solidFill>
+              <a:prstDash val="solid"/>
+              <a:round/>
+            </a:ln>
+          </p:spPr>
+          <p:txBody>
+            <a:bodyPr/>
+            <a:lstStyle/>
+            <a:p/>
+          </p:txBody>
+        </p:sp>
+        <p:sp>
+          <p:nvSpPr>
+            <p:cNvPr id="52" name="pl52"/>
+            <p:cNvSpPr/>
+            <p:nvPr/>
+          </p:nvSpPr>
+          <p:spPr>
+            <a:xfrm>
+              <a:off x="4403573" y="4336484"/>
+              <a:ext cx="0" cy="1317069"/>
+            </a:xfrm>
+            <a:custGeom>
+              <a:avLst/>
+              <a:pathLst>
+                <a:path w="0" h="1317069">
+                  <a:moveTo>
+                    <a:pt x="0" y="1317069"/>
+                  </a:moveTo>
+                  <a:lnTo>
+                    <a:pt x="0" y="0"/>
+                  </a:lnTo>
+                  <a:lnTo>
+                    <a:pt x="0" y="0"/>
+                  </a:lnTo>
+                </a:path>
+              </a:pathLst>
+            </a:custGeom>
+            <a:ln w="6775" cap="flat">
+              <a:solidFill>
+                <a:srgbClr val="EBEBEB">
+                  <a:alpha val="100000"/>
+                </a:srgbClr>
+              </a:solidFill>
+              <a:prstDash val="solid"/>
+              <a:round/>
+            </a:ln>
+          </p:spPr>
+          <p:txBody>
+            <a:bodyPr/>
+            <a:lstStyle/>
+            <a:p/>
+          </p:txBody>
+        </p:sp>
+        <p:sp>
+          <p:nvSpPr>
+            <p:cNvPr id="53" name="pl53"/>
+            <p:cNvSpPr/>
+            <p:nvPr/>
+          </p:nvSpPr>
+          <p:spPr>
+            <a:xfrm>
+              <a:off x="5254082" y="4336484"/>
+              <a:ext cx="0" cy="1317069"/>
+            </a:xfrm>
+            <a:custGeom>
+              <a:avLst/>
+              <a:pathLst>
+                <a:path w="0" h="1317069">
+                  <a:moveTo>
+                    <a:pt x="0" y="1317069"/>
+                  </a:moveTo>
+                  <a:lnTo>
+                    <a:pt x="0" y="0"/>
+                  </a:lnTo>
+                  <a:lnTo>
+                    <a:pt x="0" y="0"/>
+                  </a:lnTo>
+                </a:path>
+              </a:pathLst>
+            </a:custGeom>
+            <a:ln w="6775" cap="flat">
+              <a:solidFill>
+                <a:srgbClr val="EBEBEB">
+                  <a:alpha val="100000"/>
+                </a:srgbClr>
+              </a:solidFill>
+              <a:prstDash val="solid"/>
+              <a:round/>
+            </a:ln>
+          </p:spPr>
+          <p:txBody>
+            <a:bodyPr/>
+            <a:lstStyle/>
+            <a:p/>
+          </p:txBody>
+        </p:sp>
+        <p:sp>
+          <p:nvSpPr>
+            <p:cNvPr id="54" name="pl54"/>
+            <p:cNvSpPr/>
+            <p:nvPr/>
+          </p:nvSpPr>
+          <p:spPr>
+            <a:xfrm>
+              <a:off x="6104592" y="4336484"/>
+              <a:ext cx="0" cy="1317069"/>
+            </a:xfrm>
+            <a:custGeom>
+              <a:avLst/>
+              <a:pathLst>
+                <a:path w="0" h="1317069">
+                  <a:moveTo>
+                    <a:pt x="0" y="1317069"/>
+                  </a:moveTo>
+                  <a:lnTo>
+                    <a:pt x="0" y="0"/>
+                  </a:lnTo>
+                  <a:lnTo>
+                    <a:pt x="0" y="0"/>
+                  </a:lnTo>
+                </a:path>
+              </a:pathLst>
+            </a:custGeom>
+            <a:ln w="6775" cap="flat">
+              <a:solidFill>
+                <a:srgbClr val="EBEBEB">
+                  <a:alpha val="100000"/>
+                </a:srgbClr>
+              </a:solidFill>
+              <a:prstDash val="solid"/>
+              <a:round/>
+            </a:ln>
+          </p:spPr>
+          <p:txBody>
+            <a:bodyPr/>
+            <a:lstStyle/>
+            <a:p/>
+          </p:txBody>
+        </p:sp>
+        <p:sp>
+          <p:nvSpPr>
+            <p:cNvPr id="55" name="pl55"/>
+            <p:cNvSpPr/>
+            <p:nvPr/>
+          </p:nvSpPr>
+          <p:spPr>
+            <a:xfrm>
+              <a:off x="6955101" y="4336484"/>
+              <a:ext cx="0" cy="1317069"/>
+            </a:xfrm>
+            <a:custGeom>
+              <a:avLst/>
+              <a:pathLst>
+                <a:path w="0" h="1317069">
+                  <a:moveTo>
+                    <a:pt x="0" y="1317069"/>
+                  </a:moveTo>
+                  <a:lnTo>
+                    <a:pt x="0" y="0"/>
+                  </a:lnTo>
+                  <a:lnTo>
+                    <a:pt x="0" y="0"/>
+                  </a:lnTo>
+                </a:path>
+              </a:pathLst>
+            </a:custGeom>
+            <a:ln w="6775" cap="flat">
+              <a:solidFill>
+                <a:srgbClr val="EBEBEB">
+                  <a:alpha val="100000"/>
+                </a:srgbClr>
+              </a:solidFill>
+              <a:prstDash val="solid"/>
+              <a:round/>
+            </a:ln>
+          </p:spPr>
+          <p:txBody>
+            <a:bodyPr/>
+            <a:lstStyle/>
+            <a:p/>
+          </p:txBody>
+        </p:sp>
+        <p:sp>
+          <p:nvSpPr>
+            <p:cNvPr id="56" name="pl56"/>
+            <p:cNvSpPr/>
+            <p:nvPr/>
+          </p:nvSpPr>
+          <p:spPr>
+            <a:xfrm>
+              <a:off x="7805611" y="4336484"/>
+              <a:ext cx="0" cy="1317069"/>
+            </a:xfrm>
+            <a:custGeom>
+              <a:avLst/>
+              <a:pathLst>
+                <a:path w="0" h="1317069">
+                  <a:moveTo>
+                    <a:pt x="0" y="1317069"/>
+                  </a:moveTo>
+                  <a:lnTo>
+                    <a:pt x="0" y="0"/>
+                  </a:lnTo>
+                  <a:lnTo>
+                    <a:pt x="0" y="0"/>
+                  </a:lnTo>
+                </a:path>
+              </a:pathLst>
+            </a:custGeom>
+            <a:ln w="6775" cap="flat">
+              <a:solidFill>
+                <a:srgbClr val="EBEBEB">
+                  <a:alpha val="100000"/>
+                </a:srgbClr>
+              </a:solidFill>
+              <a:prstDash val="solid"/>
+              <a:round/>
+            </a:ln>
+          </p:spPr>
+          <p:txBody>
+            <a:bodyPr/>
+            <a:lstStyle/>
+            <a:p/>
+          </p:txBody>
+        </p:sp>
+        <p:sp>
+          <p:nvSpPr>
+            <p:cNvPr id="57" name="pl57"/>
+            <p:cNvSpPr/>
+            <p:nvPr/>
+          </p:nvSpPr>
+          <p:spPr>
+            <a:xfrm>
+              <a:off x="887106" y="5593686"/>
+              <a:ext cx="7660515" cy="0"/>
+            </a:xfrm>
+            <a:custGeom>
+              <a:avLst/>
+              <a:pathLst>
+                <a:path w="7660515" h="0">
+                  <a:moveTo>
+                    <a:pt x="0" y="0"/>
+                  </a:moveTo>
+                  <a:lnTo>
+                    <a:pt x="7660515" y="0"/>
+                  </a:lnTo>
+                  <a:lnTo>
+                    <a:pt x="7660515" y="0"/>
+                  </a:lnTo>
+                </a:path>
+              </a:pathLst>
+            </a:custGeom>
+            <a:ln w="13550" cap="flat">
+              <a:solidFill>
+                <a:srgbClr val="EBEBEB">
+                  <a:alpha val="100000"/>
+                </a:srgbClr>
+              </a:solidFill>
+              <a:prstDash val="solid"/>
+              <a:round/>
+            </a:ln>
+          </p:spPr>
+          <p:txBody>
+            <a:bodyPr/>
+            <a:lstStyle/>
+            <a:p/>
+          </p:txBody>
+        </p:sp>
+        <p:sp>
+          <p:nvSpPr>
+            <p:cNvPr id="58" name="pl58"/>
+            <p:cNvSpPr/>
+            <p:nvPr/>
+          </p:nvSpPr>
+          <p:spPr>
+            <a:xfrm>
+              <a:off x="887106" y="5294352"/>
+              <a:ext cx="7660515" cy="0"/>
+            </a:xfrm>
+            <a:custGeom>
+              <a:avLst/>
+              <a:pathLst>
+                <a:path w="7660515" h="0">
+                  <a:moveTo>
+                    <a:pt x="0" y="0"/>
+                  </a:moveTo>
+                  <a:lnTo>
+                    <a:pt x="7660515" y="0"/>
+                  </a:lnTo>
+                  <a:lnTo>
+                    <a:pt x="7660515" y="0"/>
+                  </a:lnTo>
+                </a:path>
+              </a:pathLst>
+            </a:custGeom>
+            <a:ln w="13550" cap="flat">
+              <a:solidFill>
+                <a:srgbClr val="EBEBEB">
+                  <a:alpha val="100000"/>
+                </a:srgbClr>
+              </a:solidFill>
+              <a:prstDash val="solid"/>
+              <a:round/>
+            </a:ln>
+          </p:spPr>
+          <p:txBody>
+            <a:bodyPr/>
+            <a:lstStyle/>
+            <a:p/>
+          </p:txBody>
+        </p:sp>
+        <p:sp>
+          <p:nvSpPr>
+            <p:cNvPr id="59" name="pl59"/>
+            <p:cNvSpPr/>
+            <p:nvPr/>
+          </p:nvSpPr>
+          <p:spPr>
+            <a:xfrm>
+              <a:off x="887106" y="4995019"/>
+              <a:ext cx="7660515" cy="0"/>
+            </a:xfrm>
+            <a:custGeom>
+              <a:avLst/>
+              <a:pathLst>
+                <a:path w="7660515" h="0">
+                  <a:moveTo>
+                    <a:pt x="0" y="0"/>
+                  </a:moveTo>
+                  <a:lnTo>
+                    <a:pt x="7660515" y="0"/>
+                  </a:lnTo>
+                  <a:lnTo>
+                    <a:pt x="7660515" y="0"/>
+                  </a:lnTo>
+                </a:path>
+              </a:pathLst>
+            </a:custGeom>
+            <a:ln w="13550" cap="flat">
+              <a:solidFill>
+                <a:srgbClr val="EBEBEB">
+                  <a:alpha val="100000"/>
+                </a:srgbClr>
+              </a:solidFill>
+              <a:prstDash val="solid"/>
+              <a:round/>
+            </a:ln>
+          </p:spPr>
+          <p:txBody>
+            <a:bodyPr/>
+            <a:lstStyle/>
+            <a:p/>
+          </p:txBody>
+        </p:sp>
+        <p:sp>
+          <p:nvSpPr>
+            <p:cNvPr id="60" name="pl60"/>
+            <p:cNvSpPr/>
+            <p:nvPr/>
+          </p:nvSpPr>
+          <p:spPr>
+            <a:xfrm>
+              <a:off x="887106" y="4695685"/>
+              <a:ext cx="7660515" cy="0"/>
+            </a:xfrm>
+            <a:custGeom>
+              <a:avLst/>
+              <a:pathLst>
+                <a:path w="7660515" h="0">
+                  <a:moveTo>
+                    <a:pt x="0" y="0"/>
+                  </a:moveTo>
+                  <a:lnTo>
+                    <a:pt x="7660515" y="0"/>
+                  </a:lnTo>
+                  <a:lnTo>
+                    <a:pt x="7660515" y="0"/>
+                  </a:lnTo>
+                </a:path>
+              </a:pathLst>
+            </a:custGeom>
+            <a:ln w="13550" cap="flat">
+              <a:solidFill>
+                <a:srgbClr val="EBEBEB">
+                  <a:alpha val="100000"/>
+                </a:srgbClr>
+              </a:solidFill>
+              <a:prstDash val="solid"/>
+              <a:round/>
+            </a:ln>
+          </p:spPr>
+          <p:txBody>
+            <a:bodyPr/>
+            <a:lstStyle/>
+            <a:p/>
+          </p:txBody>
+        </p:sp>
+        <p:sp>
+          <p:nvSpPr>
+            <p:cNvPr id="61" name="pl61"/>
+            <p:cNvSpPr/>
+            <p:nvPr/>
+          </p:nvSpPr>
+          <p:spPr>
+            <a:xfrm>
+              <a:off x="887106" y="4396351"/>
+              <a:ext cx="7660515" cy="0"/>
+            </a:xfrm>
+            <a:custGeom>
+              <a:avLst/>
+              <a:pathLst>
+                <a:path w="7660515" h="0">
+                  <a:moveTo>
+                    <a:pt x="0" y="0"/>
+                  </a:moveTo>
+                  <a:lnTo>
+                    <a:pt x="7660515" y="0"/>
+                  </a:lnTo>
+                  <a:lnTo>
+                    <a:pt x="7660515" y="0"/>
+                  </a:lnTo>
+                </a:path>
+              </a:pathLst>
+            </a:custGeom>
+            <a:ln w="13550" cap="flat">
+              <a:solidFill>
+                <a:srgbClr val="EBEBEB">
+                  <a:alpha val="100000"/>
+                </a:srgbClr>
+              </a:solidFill>
+              <a:prstDash val="solid"/>
+              <a:round/>
+            </a:ln>
+          </p:spPr>
+          <p:txBody>
+            <a:bodyPr/>
+            <a:lstStyle/>
+            <a:p/>
+          </p:txBody>
+        </p:sp>
+        <p:sp>
+          <p:nvSpPr>
+            <p:cNvPr id="62" name="pl62"/>
+            <p:cNvSpPr/>
+            <p:nvPr/>
+          </p:nvSpPr>
+          <p:spPr>
+            <a:xfrm>
+              <a:off x="1426790" y="4336484"/>
+              <a:ext cx="0" cy="1317069"/>
+            </a:xfrm>
+            <a:custGeom>
+              <a:avLst/>
+              <a:pathLst>
+                <a:path w="0" h="1317069">
+                  <a:moveTo>
+                    <a:pt x="0" y="1317069"/>
+                  </a:moveTo>
+                  <a:lnTo>
+                    <a:pt x="0" y="0"/>
+                  </a:lnTo>
+                  <a:lnTo>
+                    <a:pt x="0" y="0"/>
+                  </a:lnTo>
+                </a:path>
+              </a:pathLst>
+            </a:custGeom>
+            <a:ln w="13550" cap="flat">
+              <a:solidFill>
+                <a:srgbClr val="EBEBEB">
+                  <a:alpha val="100000"/>
+                </a:srgbClr>
+              </a:solidFill>
+              <a:prstDash val="solid"/>
+              <a:round/>
+            </a:ln>
+          </p:spPr>
+          <p:txBody>
+            <a:bodyPr/>
+            <a:lstStyle/>
+            <a:p/>
+          </p:txBody>
+        </p:sp>
+        <p:sp>
+          <p:nvSpPr>
+            <p:cNvPr id="63" name="pl63"/>
+            <p:cNvSpPr/>
+            <p:nvPr/>
+          </p:nvSpPr>
+          <p:spPr>
+            <a:xfrm>
+              <a:off x="2277299" y="4336484"/>
+              <a:ext cx="0" cy="1317069"/>
+            </a:xfrm>
+            <a:custGeom>
+              <a:avLst/>
+              <a:pathLst>
+                <a:path w="0" h="1317069">
+                  <a:moveTo>
+                    <a:pt x="0" y="1317069"/>
+                  </a:moveTo>
+                  <a:lnTo>
+                    <a:pt x="0" y="0"/>
+                  </a:lnTo>
+                  <a:lnTo>
+                    <a:pt x="0" y="0"/>
+                  </a:lnTo>
+                </a:path>
+              </a:pathLst>
+            </a:custGeom>
+            <a:ln w="13550" cap="flat">
+              <a:solidFill>
+                <a:srgbClr val="EBEBEB">
+                  <a:alpha val="100000"/>
+                </a:srgbClr>
+              </a:solidFill>
+              <a:prstDash val="solid"/>
+              <a:round/>
+            </a:ln>
+          </p:spPr>
+          <p:txBody>
+            <a:bodyPr/>
+            <a:lstStyle/>
+            <a:p/>
+          </p:txBody>
+        </p:sp>
+        <p:sp>
+          <p:nvSpPr>
+            <p:cNvPr id="64" name="pl64"/>
+            <p:cNvSpPr/>
+            <p:nvPr/>
+          </p:nvSpPr>
+          <p:spPr>
+            <a:xfrm>
+              <a:off x="3127809" y="4336484"/>
+              <a:ext cx="0" cy="1317069"/>
+            </a:xfrm>
+            <a:custGeom>
+              <a:avLst/>
+              <a:pathLst>
+                <a:path w="0" h="1317069">
+                  <a:moveTo>
+                    <a:pt x="0" y="1317069"/>
+                  </a:moveTo>
+                  <a:lnTo>
+                    <a:pt x="0" y="0"/>
+                  </a:lnTo>
+                  <a:lnTo>
+                    <a:pt x="0" y="0"/>
+                  </a:lnTo>
+                </a:path>
+              </a:pathLst>
+            </a:custGeom>
+            <a:ln w="13550" cap="flat">
+              <a:solidFill>
+                <a:srgbClr val="EBEBEB">
+                  <a:alpha val="100000"/>
+                </a:srgbClr>
+              </a:solidFill>
+              <a:prstDash val="solid"/>
+              <a:round/>
+            </a:ln>
+          </p:spPr>
+          <p:txBody>
+            <a:bodyPr/>
+            <a:lstStyle/>
+            <a:p/>
+          </p:txBody>
+        </p:sp>
+        <p:sp>
+          <p:nvSpPr>
+            <p:cNvPr id="65" name="pl65"/>
+            <p:cNvSpPr/>
+            <p:nvPr/>
+          </p:nvSpPr>
+          <p:spPr>
+            <a:xfrm>
+              <a:off x="3978318" y="4336484"/>
+              <a:ext cx="0" cy="1317069"/>
+            </a:xfrm>
+            <a:custGeom>
+              <a:avLst/>
+              <a:pathLst>
+                <a:path w="0" h="1317069">
+                  <a:moveTo>
+                    <a:pt x="0" y="1317069"/>
+                  </a:moveTo>
+                  <a:lnTo>
+                    <a:pt x="0" y="0"/>
+                  </a:lnTo>
+                  <a:lnTo>
+                    <a:pt x="0" y="0"/>
+                  </a:lnTo>
+                </a:path>
+              </a:pathLst>
+            </a:custGeom>
+            <a:ln w="13550" cap="flat">
+              <a:solidFill>
+                <a:srgbClr val="EBEBEB">
+                  <a:alpha val="100000"/>
+                </a:srgbClr>
+              </a:solidFill>
+              <a:prstDash val="solid"/>
+              <a:round/>
+            </a:ln>
+          </p:spPr>
+          <p:txBody>
+            <a:bodyPr/>
+            <a:lstStyle/>
+            <a:p/>
+          </p:txBody>
+        </p:sp>
+        <p:sp>
+          <p:nvSpPr>
+            <p:cNvPr id="66" name="pl66"/>
+            <p:cNvSpPr/>
+            <p:nvPr/>
+          </p:nvSpPr>
+          <p:spPr>
+            <a:xfrm>
+              <a:off x="4828828" y="4336484"/>
+              <a:ext cx="0" cy="1317069"/>
+            </a:xfrm>
+            <a:custGeom>
+              <a:avLst/>
+              <a:pathLst>
+                <a:path w="0" h="1317069">
+                  <a:moveTo>
+                    <a:pt x="0" y="1317069"/>
+                  </a:moveTo>
+                  <a:lnTo>
+                    <a:pt x="0" y="0"/>
+                  </a:lnTo>
+                  <a:lnTo>
+                    <a:pt x="0" y="0"/>
+                  </a:lnTo>
+                </a:path>
+              </a:pathLst>
+            </a:custGeom>
+            <a:ln w="13550" cap="flat">
+              <a:solidFill>
+                <a:srgbClr val="EBEBEB">
+                  <a:alpha val="100000"/>
+                </a:srgbClr>
+              </a:solidFill>
+              <a:prstDash val="solid"/>
+              <a:round/>
+            </a:ln>
+          </p:spPr>
+          <p:txBody>
+            <a:bodyPr/>
+            <a:lstStyle/>
+            <a:p/>
+          </p:txBody>
+        </p:sp>
+        <p:sp>
+          <p:nvSpPr>
+            <p:cNvPr id="67" name="pl67"/>
+            <p:cNvSpPr/>
+            <p:nvPr/>
+          </p:nvSpPr>
+          <p:spPr>
+            <a:xfrm>
+              <a:off x="5679337" y="4336484"/>
+              <a:ext cx="0" cy="1317069"/>
+            </a:xfrm>
+            <a:custGeom>
+              <a:avLst/>
+              <a:pathLst>
+                <a:path w="0" h="1317069">
+                  <a:moveTo>
+                    <a:pt x="0" y="1317069"/>
+                  </a:moveTo>
+                  <a:lnTo>
+                    <a:pt x="0" y="0"/>
+                  </a:lnTo>
+                  <a:lnTo>
+                    <a:pt x="0" y="0"/>
+                  </a:lnTo>
+                </a:path>
+              </a:pathLst>
+            </a:custGeom>
+            <a:ln w="13550" cap="flat">
+              <a:solidFill>
+                <a:srgbClr val="EBEBEB">
+                  <a:alpha val="100000"/>
+                </a:srgbClr>
+              </a:solidFill>
+              <a:prstDash val="solid"/>
+              <a:round/>
+            </a:ln>
+          </p:spPr>
+          <p:txBody>
+            <a:bodyPr/>
+            <a:lstStyle/>
+            <a:p/>
+          </p:txBody>
+        </p:sp>
+        <p:sp>
+          <p:nvSpPr>
+            <p:cNvPr id="68" name="pl68"/>
+            <p:cNvSpPr/>
+            <p:nvPr/>
+          </p:nvSpPr>
+          <p:spPr>
+            <a:xfrm>
+              <a:off x="6529847" y="4336484"/>
+              <a:ext cx="0" cy="1317069"/>
+            </a:xfrm>
+            <a:custGeom>
+              <a:avLst/>
+              <a:pathLst>
+                <a:path w="0" h="1317069">
+                  <a:moveTo>
+                    <a:pt x="0" y="1317069"/>
+                  </a:moveTo>
+                  <a:lnTo>
+                    <a:pt x="0" y="0"/>
+                  </a:lnTo>
+                  <a:lnTo>
+                    <a:pt x="0" y="0"/>
+                  </a:lnTo>
+                </a:path>
+              </a:pathLst>
+            </a:custGeom>
+            <a:ln w="13550" cap="flat">
+              <a:solidFill>
+                <a:srgbClr val="EBEBEB">
+                  <a:alpha val="100000"/>
+                </a:srgbClr>
+              </a:solidFill>
+              <a:prstDash val="solid"/>
+              <a:round/>
+            </a:ln>
+          </p:spPr>
+          <p:txBody>
+            <a:bodyPr/>
+            <a:lstStyle/>
+            <a:p/>
+          </p:txBody>
+        </p:sp>
+        <p:sp>
+          <p:nvSpPr>
+            <p:cNvPr id="69" name="pl69"/>
+            <p:cNvSpPr/>
+            <p:nvPr/>
+          </p:nvSpPr>
+          <p:spPr>
+            <a:xfrm>
+              <a:off x="7380356" y="4336484"/>
+              <a:ext cx="0" cy="1317069"/>
+            </a:xfrm>
+            <a:custGeom>
+              <a:avLst/>
+              <a:pathLst>
+                <a:path w="0" h="1317069">
+                  <a:moveTo>
+                    <a:pt x="0" y="1317069"/>
+                  </a:moveTo>
+                  <a:lnTo>
+                    <a:pt x="0" y="0"/>
+                  </a:lnTo>
+                  <a:lnTo>
+                    <a:pt x="0" y="0"/>
+                  </a:lnTo>
+                </a:path>
+              </a:pathLst>
+            </a:custGeom>
+            <a:ln w="13550" cap="flat">
+              <a:solidFill>
+                <a:srgbClr val="EBEBEB">
+                  <a:alpha val="100000"/>
+                </a:srgbClr>
+              </a:solidFill>
+              <a:prstDash val="solid"/>
+              <a:round/>
+            </a:ln>
+          </p:spPr>
+          <p:txBody>
+            <a:bodyPr/>
+            <a:lstStyle/>
+            <a:p/>
+          </p:txBody>
+        </p:sp>
+        <p:sp>
+          <p:nvSpPr>
+            <p:cNvPr id="70" name="pl70"/>
+            <p:cNvSpPr/>
+            <p:nvPr/>
+          </p:nvSpPr>
+          <p:spPr>
+            <a:xfrm>
+              <a:off x="8230866" y="4336484"/>
+              <a:ext cx="0" cy="1317069"/>
+            </a:xfrm>
+            <a:custGeom>
+              <a:avLst/>
+              <a:pathLst>
+                <a:path w="0" h="1317069">
+                  <a:moveTo>
+                    <a:pt x="0" y="1317069"/>
+                  </a:moveTo>
+                  <a:lnTo>
+                    <a:pt x="0" y="0"/>
+                  </a:lnTo>
+                  <a:lnTo>
+                    <a:pt x="0" y="0"/>
+                  </a:lnTo>
+                </a:path>
+              </a:pathLst>
+            </a:custGeom>
+            <a:ln w="13550" cap="flat">
+              <a:solidFill>
+                <a:srgbClr val="EBEBEB">
+                  <a:alpha val="100000"/>
+                </a:srgbClr>
+              </a:solidFill>
+              <a:prstDash val="solid"/>
+              <a:round/>
+            </a:ln>
+          </p:spPr>
+          <p:txBody>
+            <a:bodyPr/>
+            <a:lstStyle/>
+            <a:p/>
+          </p:txBody>
+        </p:sp>
+        <p:sp>
+          <p:nvSpPr>
+            <p:cNvPr id="71" name="pg71"/>
+            <p:cNvSpPr/>
+            <p:nvPr/>
+          </p:nvSpPr>
+          <p:spPr>
+            <a:xfrm>
+              <a:off x="1235312" y="4996664"/>
+              <a:ext cx="6964104" cy="473147"/>
+            </a:xfrm>
+            <a:custGeom>
+              <a:avLst/>
+              <a:pathLst>
+                <a:path w="6964104" h="473147">
+                  <a:moveTo>
+                    <a:pt x="0" y="0"/>
+                  </a:moveTo>
+                  <a:lnTo>
+                    <a:pt x="70344" y="9409"/>
+                  </a:lnTo>
+                  <a:lnTo>
+                    <a:pt x="140688" y="18670"/>
+                  </a:lnTo>
+                  <a:lnTo>
+                    <a:pt x="211033" y="27784"/>
+                  </a:lnTo>
+                  <a:lnTo>
+                    <a:pt x="281377" y="36756"/>
+                  </a:lnTo>
+                  <a:lnTo>
+                    <a:pt x="351722" y="45586"/>
+                  </a:lnTo>
+                  <a:lnTo>
+                    <a:pt x="422066" y="54276"/>
+                  </a:lnTo>
+                  <a:lnTo>
+                    <a:pt x="492411" y="62830"/>
+                  </a:lnTo>
+                  <a:lnTo>
+                    <a:pt x="562755" y="71249"/>
+                  </a:lnTo>
+                  <a:lnTo>
+                    <a:pt x="633100" y="79535"/>
+                  </a:lnTo>
+                  <a:lnTo>
+                    <a:pt x="703444" y="87691"/>
+                  </a:lnTo>
+                  <a:lnTo>
+                    <a:pt x="773789" y="95718"/>
+                  </a:lnTo>
+                  <a:lnTo>
+                    <a:pt x="844133" y="103619"/>
+                  </a:lnTo>
+                  <a:lnTo>
+                    <a:pt x="914478" y="111395"/>
+                  </a:lnTo>
+                  <a:lnTo>
+                    <a:pt x="984822" y="119048"/>
+                  </a:lnTo>
+                  <a:lnTo>
+                    <a:pt x="1055167" y="126581"/>
+                  </a:lnTo>
+                  <a:lnTo>
+                    <a:pt x="1125511" y="133996"/>
+                  </a:lnTo>
+                  <a:lnTo>
+                    <a:pt x="1195856" y="141293"/>
+                  </a:lnTo>
+                  <a:lnTo>
+                    <a:pt x="1266200" y="148475"/>
+                  </a:lnTo>
+                  <a:lnTo>
+                    <a:pt x="1336545" y="155544"/>
+                  </a:lnTo>
+                  <a:lnTo>
+                    <a:pt x="1406889" y="162502"/>
+                  </a:lnTo>
+                  <a:lnTo>
+                    <a:pt x="1477234" y="169350"/>
+                  </a:lnTo>
+                  <a:lnTo>
+                    <a:pt x="1547578" y="176091"/>
+                  </a:lnTo>
+                  <a:lnTo>
+                    <a:pt x="1617923" y="182724"/>
+                  </a:lnTo>
+                  <a:lnTo>
+                    <a:pt x="1688267" y="189254"/>
+                  </a:lnTo>
+                  <a:lnTo>
+                    <a:pt x="1758612" y="195680"/>
+                  </a:lnTo>
+                  <a:lnTo>
+                    <a:pt x="1828956" y="202006"/>
+                  </a:lnTo>
+                  <a:lnTo>
+                    <a:pt x="1899301" y="208231"/>
+                  </a:lnTo>
+                  <a:lnTo>
+                    <a:pt x="1969645" y="214358"/>
+                  </a:lnTo>
+                  <a:lnTo>
+                    <a:pt x="2039990" y="220389"/>
+                  </a:lnTo>
+                  <a:lnTo>
+                    <a:pt x="2110334" y="226325"/>
+                  </a:lnTo>
+                  <a:lnTo>
+                    <a:pt x="2180679" y="232167"/>
+                  </a:lnTo>
+                  <a:lnTo>
+                    <a:pt x="2251023" y="237918"/>
+                  </a:lnTo>
+                  <a:lnTo>
+                    <a:pt x="2321368" y="243577"/>
+                  </a:lnTo>
+                  <a:lnTo>
+                    <a:pt x="2391712" y="249147"/>
+                  </a:lnTo>
+                  <a:lnTo>
+                    <a:pt x="2462057" y="254630"/>
+                  </a:lnTo>
+                  <a:lnTo>
+                    <a:pt x="2532401" y="260026"/>
+                  </a:lnTo>
+                  <a:lnTo>
+                    <a:pt x="2602746" y="265337"/>
+                  </a:lnTo>
+                  <a:lnTo>
+                    <a:pt x="2673090" y="270565"/>
+                  </a:lnTo>
+                  <a:lnTo>
+                    <a:pt x="2743435" y="275710"/>
+                  </a:lnTo>
+                  <a:lnTo>
+                    <a:pt x="2813779" y="280774"/>
+                  </a:lnTo>
+                  <a:lnTo>
+                    <a:pt x="2884124" y="285758"/>
+                  </a:lnTo>
+                  <a:lnTo>
+                    <a:pt x="2954468" y="290663"/>
+                  </a:lnTo>
+                  <a:lnTo>
+                    <a:pt x="3024813" y="295492"/>
+                  </a:lnTo>
+                  <a:lnTo>
+                    <a:pt x="3095157" y="298305"/>
+                  </a:lnTo>
+                  <a:lnTo>
+                    <a:pt x="3165502" y="299446"/>
+                  </a:lnTo>
+                  <a:lnTo>
+                    <a:pt x="3235846" y="300582"/>
+                  </a:lnTo>
+                  <a:lnTo>
+                    <a:pt x="3306191" y="301713"/>
+                  </a:lnTo>
+                  <a:lnTo>
+                    <a:pt x="3376535" y="302840"/>
+                  </a:lnTo>
+                  <a:lnTo>
+                    <a:pt x="3446880" y="303963"/>
+                  </a:lnTo>
+                  <a:lnTo>
+                    <a:pt x="3517224" y="305082"/>
+                  </a:lnTo>
+                  <a:lnTo>
+                    <a:pt x="3587569" y="306197"/>
+                  </a:lnTo>
+                  <a:lnTo>
+                    <a:pt x="3657913" y="307307"/>
+                  </a:lnTo>
+                  <a:lnTo>
+                    <a:pt x="3728257" y="308413"/>
+                  </a:lnTo>
+                  <a:lnTo>
+                    <a:pt x="3798602" y="309514"/>
+                  </a:lnTo>
+                  <a:lnTo>
+                    <a:pt x="3868946" y="310612"/>
+                  </a:lnTo>
+                  <a:lnTo>
+                    <a:pt x="3939291" y="311705"/>
+                  </a:lnTo>
+                  <a:lnTo>
+                    <a:pt x="4009635" y="312794"/>
+                  </a:lnTo>
+                  <a:lnTo>
+                    <a:pt x="4079980" y="313879"/>
+                  </a:lnTo>
+                  <a:lnTo>
+                    <a:pt x="4150324" y="314960"/>
+                  </a:lnTo>
+                  <a:lnTo>
+                    <a:pt x="4220669" y="316037"/>
+                  </a:lnTo>
+                  <a:lnTo>
+                    <a:pt x="4291013" y="317109"/>
+                  </a:lnTo>
+                  <a:lnTo>
+                    <a:pt x="4361358" y="318178"/>
+                  </a:lnTo>
+                  <a:lnTo>
+                    <a:pt x="4431702" y="319242"/>
+                  </a:lnTo>
+                  <a:lnTo>
+                    <a:pt x="4502047" y="320303"/>
+                  </a:lnTo>
+                  <a:lnTo>
+                    <a:pt x="4572391" y="321359"/>
+                  </a:lnTo>
+                  <a:lnTo>
+                    <a:pt x="4642736" y="322411"/>
+                  </a:lnTo>
+                  <a:lnTo>
+                    <a:pt x="4713080" y="323460"/>
+                  </a:lnTo>
+                  <a:lnTo>
+                    <a:pt x="4783425" y="324504"/>
+                  </a:lnTo>
+                  <a:lnTo>
+                    <a:pt x="4853769" y="325544"/>
+                  </a:lnTo>
+                  <a:lnTo>
+                    <a:pt x="4924114" y="326581"/>
+                  </a:lnTo>
+                  <a:lnTo>
+                    <a:pt x="4994458" y="327613"/>
+                  </a:lnTo>
+                  <a:lnTo>
+                    <a:pt x="5064803" y="328641"/>
+                  </a:lnTo>
+                  <a:lnTo>
+                    <a:pt x="5135147" y="329666"/>
+                  </a:lnTo>
+                  <a:lnTo>
+                    <a:pt x="5205492" y="330686"/>
+                  </a:lnTo>
+                  <a:lnTo>
+                    <a:pt x="5275836" y="331703"/>
+                  </a:lnTo>
+                  <a:lnTo>
+                    <a:pt x="5346181" y="332716"/>
+                  </a:lnTo>
+                  <a:lnTo>
+                    <a:pt x="5416525" y="333725"/>
+                  </a:lnTo>
+                  <a:lnTo>
+                    <a:pt x="5486870" y="334730"/>
+                  </a:lnTo>
+                  <a:lnTo>
+                    <a:pt x="5557214" y="335731"/>
+                  </a:lnTo>
+                  <a:lnTo>
+                    <a:pt x="5627559" y="336729"/>
+                  </a:lnTo>
+                  <a:lnTo>
+                    <a:pt x="5697903" y="337722"/>
+                  </a:lnTo>
+                  <a:lnTo>
+                    <a:pt x="5768248" y="338712"/>
+                  </a:lnTo>
+                  <a:lnTo>
+                    <a:pt x="5838592" y="339698"/>
+                  </a:lnTo>
+                  <a:lnTo>
+                    <a:pt x="5908937" y="340680"/>
+                  </a:lnTo>
+                  <a:lnTo>
+                    <a:pt x="5979281" y="341659"/>
+                  </a:lnTo>
+                  <a:lnTo>
+                    <a:pt x="6049626" y="342634"/>
+                  </a:lnTo>
+                  <a:lnTo>
+                    <a:pt x="6119970" y="343605"/>
+                  </a:lnTo>
+                  <a:lnTo>
+                    <a:pt x="6190315" y="344572"/>
+                  </a:lnTo>
+                  <a:lnTo>
+                    <a:pt x="6260659" y="345536"/>
+                  </a:lnTo>
+                  <a:lnTo>
+                    <a:pt x="6331004" y="346496"/>
+                  </a:lnTo>
+                  <a:lnTo>
+                    <a:pt x="6401348" y="347452"/>
+                  </a:lnTo>
+                  <a:lnTo>
+                    <a:pt x="6471693" y="348405"/>
+                  </a:lnTo>
+                  <a:lnTo>
+                    <a:pt x="6542037" y="349354"/>
+                  </a:lnTo>
+                  <a:lnTo>
+                    <a:pt x="6612382" y="350299"/>
+                  </a:lnTo>
+                  <a:lnTo>
+                    <a:pt x="6682726" y="351241"/>
+                  </a:lnTo>
+                  <a:lnTo>
+                    <a:pt x="6753071" y="352179"/>
+                  </a:lnTo>
+                  <a:lnTo>
+                    <a:pt x="6823415" y="353114"/>
+                  </a:lnTo>
+                  <a:lnTo>
+                    <a:pt x="6893760" y="354045"/>
+                  </a:lnTo>
+                  <a:lnTo>
+                    <a:pt x="6964104" y="354972"/>
+                  </a:lnTo>
+                  <a:lnTo>
+                    <a:pt x="6964104" y="473147"/>
+                  </a:lnTo>
+                  <a:lnTo>
+                    <a:pt x="6893760" y="471163"/>
+                  </a:lnTo>
+                  <a:lnTo>
+                    <a:pt x="6823415" y="469148"/>
+                  </a:lnTo>
+                  <a:lnTo>
+                    <a:pt x="6753071" y="467100"/>
+                  </a:lnTo>
+                  <a:lnTo>
+                    <a:pt x="6682726" y="465020"/>
+                  </a:lnTo>
+                  <a:lnTo>
+                    <a:pt x="6612382" y="462906"/>
+                  </a:lnTo>
+                  <a:lnTo>
+                    <a:pt x="6542037" y="460759"/>
+                  </a:lnTo>
+                  <a:lnTo>
+                    <a:pt x="6471693" y="458577"/>
+                  </a:lnTo>
+                  <a:lnTo>
+                    <a:pt x="6401348" y="456360"/>
+                  </a:lnTo>
+                  <a:lnTo>
+                    <a:pt x="6331004" y="454108"/>
+                  </a:lnTo>
+                  <a:lnTo>
+                    <a:pt x="6260659" y="451819"/>
+                  </a:lnTo>
+                  <a:lnTo>
+                    <a:pt x="6190315" y="449494"/>
+                  </a:lnTo>
+                  <a:lnTo>
+                    <a:pt x="6119970" y="447132"/>
+                  </a:lnTo>
+                  <a:lnTo>
+                    <a:pt x="6049626" y="444732"/>
+                  </a:lnTo>
+                  <a:lnTo>
+                    <a:pt x="5979281" y="442293"/>
+                  </a:lnTo>
+                  <a:lnTo>
+                    <a:pt x="5908937" y="439816"/>
+                  </a:lnTo>
+                  <a:lnTo>
+                    <a:pt x="5838592" y="437298"/>
+                  </a:lnTo>
+                  <a:lnTo>
+                    <a:pt x="5768248" y="434741"/>
+                  </a:lnTo>
+                  <a:lnTo>
+                    <a:pt x="5697903" y="432142"/>
+                  </a:lnTo>
+                  <a:lnTo>
+                    <a:pt x="5627559" y="429502"/>
+                  </a:lnTo>
+                  <a:lnTo>
+                    <a:pt x="5557214" y="426820"/>
+                  </a:lnTo>
+                  <a:lnTo>
+                    <a:pt x="5486870" y="424094"/>
+                  </a:lnTo>
+                  <a:lnTo>
+                    <a:pt x="5416525" y="421325"/>
+                  </a:lnTo>
+                  <a:lnTo>
+                    <a:pt x="5346181" y="418512"/>
+                  </a:lnTo>
+                  <a:lnTo>
+                    <a:pt x="5275836" y="415654"/>
+                  </a:lnTo>
+                  <a:lnTo>
+                    <a:pt x="5205492" y="412750"/>
+                  </a:lnTo>
+                  <a:lnTo>
+                    <a:pt x="5135147" y="409799"/>
+                  </a:lnTo>
+                  <a:lnTo>
+                    <a:pt x="5064803" y="406801"/>
+                  </a:lnTo>
+                  <a:lnTo>
+                    <a:pt x="4994458" y="403755"/>
+                  </a:lnTo>
+                  <a:lnTo>
+                    <a:pt x="4924114" y="400660"/>
+                  </a:lnTo>
+                  <a:lnTo>
+                    <a:pt x="4853769" y="397516"/>
+                  </a:lnTo>
+                  <a:lnTo>
+                    <a:pt x="4783425" y="394322"/>
+                  </a:lnTo>
+                  <a:lnTo>
+                    <a:pt x="4713080" y="391076"/>
+                  </a:lnTo>
+                  <a:lnTo>
+                    <a:pt x="4642736" y="387778"/>
+                  </a:lnTo>
+                  <a:lnTo>
+                    <a:pt x="4572391" y="384428"/>
+                  </a:lnTo>
+                  <a:lnTo>
+                    <a:pt x="4502047" y="381023"/>
+                  </a:lnTo>
+                  <a:lnTo>
+                    <a:pt x="4431702" y="377565"/>
+                  </a:lnTo>
+                  <a:lnTo>
+                    <a:pt x="4361358" y="374051"/>
+                  </a:lnTo>
+                  <a:lnTo>
+                    <a:pt x="4291013" y="370480"/>
+                  </a:lnTo>
+                  <a:lnTo>
+                    <a:pt x="4220669" y="366853"/>
+                  </a:lnTo>
+                  <a:lnTo>
+                    <a:pt x="4150324" y="363167"/>
+                  </a:lnTo>
+                  <a:lnTo>
+                    <a:pt x="4079980" y="359423"/>
+                  </a:lnTo>
+                  <a:lnTo>
+                    <a:pt x="4009635" y="355618"/>
+                  </a:lnTo>
+                  <a:lnTo>
+                    <a:pt x="3939291" y="351753"/>
+                  </a:lnTo>
+                  <a:lnTo>
+                    <a:pt x="3868946" y="347825"/>
+                  </a:lnTo>
+                  <a:lnTo>
+                    <a:pt x="3798602" y="343835"/>
+                  </a:lnTo>
+                  <a:lnTo>
+                    <a:pt x="3728257" y="339781"/>
+                  </a:lnTo>
+                  <a:lnTo>
+                    <a:pt x="3657913" y="335662"/>
+                  </a:lnTo>
+                  <a:lnTo>
+                    <a:pt x="3587569" y="331477"/>
+                  </a:lnTo>
+                  <a:lnTo>
+                    <a:pt x="3517224" y="327225"/>
+                  </a:lnTo>
+                  <a:lnTo>
+                    <a:pt x="3446880" y="322904"/>
+                  </a:lnTo>
+                  <a:lnTo>
+                    <a:pt x="3376535" y="318515"/>
+                  </a:lnTo>
+                  <a:lnTo>
+                    <a:pt x="3306191" y="314056"/>
+                  </a:lnTo>
+                  <a:lnTo>
+                    <a:pt x="3235846" y="309525"/>
+                  </a:lnTo>
+                  <a:lnTo>
+                    <a:pt x="3165502" y="304921"/>
+                  </a:lnTo>
+                  <a:lnTo>
+                    <a:pt x="3095157" y="300244"/>
+                  </a:lnTo>
+                  <a:lnTo>
+                    <a:pt x="3024813" y="297161"/>
+                  </a:lnTo>
+                  <a:lnTo>
+                    <a:pt x="2954468" y="296012"/>
+                  </a:lnTo>
+                  <a:lnTo>
+                    <a:pt x="2884124" y="294858"/>
+                  </a:lnTo>
+                  <a:lnTo>
+                    <a:pt x="2813779" y="293700"/>
+                  </a:lnTo>
+                  <a:lnTo>
+                    <a:pt x="2743435" y="292538"/>
+                  </a:lnTo>
+                  <a:lnTo>
+                    <a:pt x="2673090" y="291371"/>
+                  </a:lnTo>
+                  <a:lnTo>
+                    <a:pt x="2602746" y="290200"/>
+                  </a:lnTo>
+                  <a:lnTo>
+                    <a:pt x="2532401" y="289024"/>
+                  </a:lnTo>
+                  <a:lnTo>
+                    <a:pt x="2462057" y="287844"/>
+                  </a:lnTo>
+                  <a:lnTo>
+                    <a:pt x="2391712" y="286659"/>
+                  </a:lnTo>
+                  <a:lnTo>
+                    <a:pt x="2321368" y="285470"/>
+                  </a:lnTo>
+                  <a:lnTo>
+                    <a:pt x="2251023" y="284276"/>
+                  </a:lnTo>
+                  <a:lnTo>
+                    <a:pt x="2180679" y="283078"/>
+                  </a:lnTo>
+                  <a:lnTo>
+                    <a:pt x="2110334" y="281875"/>
+                  </a:lnTo>
+                  <a:lnTo>
+                    <a:pt x="2039990" y="280667"/>
+                  </a:lnTo>
+                  <a:lnTo>
+                    <a:pt x="1969645" y="279455"/>
+                  </a:lnTo>
+                  <a:lnTo>
+                    <a:pt x="1899301" y="278238"/>
+                  </a:lnTo>
+                  <a:lnTo>
+                    <a:pt x="1828956" y="277016"/>
+                  </a:lnTo>
+                  <a:lnTo>
+                    <a:pt x="1758612" y="275790"/>
+                  </a:lnTo>
+                  <a:lnTo>
+                    <a:pt x="1688267" y="274559"/>
+                  </a:lnTo>
+                  <a:lnTo>
+                    <a:pt x="1617923" y="273324"/>
+                  </a:lnTo>
+                  <a:lnTo>
+                    <a:pt x="1547578" y="272083"/>
+                  </a:lnTo>
+                  <a:lnTo>
+                    <a:pt x="1477234" y="270838"/>
+                  </a:lnTo>
+                  <a:lnTo>
+                    <a:pt x="1406889" y="269588"/>
+                  </a:lnTo>
+                  <a:lnTo>
+                    <a:pt x="1336545" y="268334"/>
+                  </a:lnTo>
+                  <a:lnTo>
+                    <a:pt x="1266200" y="267074"/>
+                  </a:lnTo>
+                  <a:lnTo>
+                    <a:pt x="1195856" y="265810"/>
+                  </a:lnTo>
+                  <a:lnTo>
+                    <a:pt x="1125511" y="264540"/>
+                  </a:lnTo>
+                  <a:lnTo>
+                    <a:pt x="1055167" y="263266"/>
+                  </a:lnTo>
+                  <a:lnTo>
+                    <a:pt x="984822" y="261988"/>
+                  </a:lnTo>
+                  <a:lnTo>
+                    <a:pt x="914478" y="260704"/>
+                  </a:lnTo>
+                  <a:lnTo>
+                    <a:pt x="844133" y="259415"/>
+                  </a:lnTo>
+                  <a:lnTo>
+                    <a:pt x="773789" y="258121"/>
+                  </a:lnTo>
+                  <a:lnTo>
+                    <a:pt x="703444" y="256823"/>
+                  </a:lnTo>
+                  <a:lnTo>
+                    <a:pt x="633100" y="255519"/>
+                  </a:lnTo>
+                  <a:lnTo>
+                    <a:pt x="562755" y="254210"/>
+                  </a:lnTo>
+                  <a:lnTo>
+                    <a:pt x="492411" y="252897"/>
+                  </a:lnTo>
+                  <a:lnTo>
+                    <a:pt x="422066" y="251578"/>
+                  </a:lnTo>
+                  <a:lnTo>
+                    <a:pt x="351722" y="250254"/>
+                  </a:lnTo>
+                  <a:lnTo>
+                    <a:pt x="281377" y="248926"/>
+                  </a:lnTo>
+                  <a:lnTo>
+                    <a:pt x="211033" y="247592"/>
+                  </a:lnTo>
+                  <a:lnTo>
+                    <a:pt x="140688" y="246253"/>
+                  </a:lnTo>
+                  <a:lnTo>
+                    <a:pt x="70344" y="244909"/>
+                  </a:lnTo>
+                  <a:lnTo>
+                    <a:pt x="0" y="243559"/>
+                  </a:lnTo>
+                  <a:close/>
+                </a:path>
+              </a:pathLst>
+            </a:custGeom>
+            <a:solidFill>
+              <a:srgbClr val="FF8C00">
+                <a:alpha val="20000"/>
+              </a:srgbClr>
+            </a:solidFill>
+          </p:spPr>
+          <p:txBody>
+            <a:bodyPr/>
+            <a:lstStyle/>
+            <a:p/>
+          </p:txBody>
+        </p:sp>
+        <p:sp>
+          <p:nvSpPr>
+            <p:cNvPr id="72" name="pl72"/>
+            <p:cNvSpPr/>
+            <p:nvPr/>
+          </p:nvSpPr>
+          <p:spPr>
+            <a:xfrm>
+              <a:off x="1235312" y="4996664"/>
+              <a:ext cx="6964104" cy="354972"/>
+            </a:xfrm>
+            <a:custGeom>
+              <a:avLst/>
+              <a:pathLst>
+                <a:path w="6964104" h="354972">
+                  <a:moveTo>
+                    <a:pt x="0" y="0"/>
+                  </a:moveTo>
+                  <a:lnTo>
+                    <a:pt x="70344" y="9409"/>
+                  </a:lnTo>
+                  <a:lnTo>
+                    <a:pt x="140688" y="18670"/>
+                  </a:lnTo>
+                  <a:lnTo>
+                    <a:pt x="211033" y="27784"/>
+                  </a:lnTo>
+                  <a:lnTo>
+                    <a:pt x="281377" y="36756"/>
+                  </a:lnTo>
+                  <a:lnTo>
+                    <a:pt x="351722" y="45586"/>
+                  </a:lnTo>
+                  <a:lnTo>
+                    <a:pt x="422066" y="54276"/>
+                  </a:lnTo>
+                  <a:lnTo>
+                    <a:pt x="492411" y="62830"/>
+                  </a:lnTo>
+                  <a:lnTo>
+                    <a:pt x="562755" y="71249"/>
+                  </a:lnTo>
+                  <a:lnTo>
+                    <a:pt x="633100" y="79535"/>
+                  </a:lnTo>
+                  <a:lnTo>
+                    <a:pt x="703444" y="87691"/>
+                  </a:lnTo>
+                  <a:lnTo>
+                    <a:pt x="773789" y="95718"/>
+                  </a:lnTo>
+                  <a:lnTo>
+                    <a:pt x="844133" y="103619"/>
+                  </a:lnTo>
+                  <a:lnTo>
+                    <a:pt x="914478" y="111395"/>
+                  </a:lnTo>
+                  <a:lnTo>
+                    <a:pt x="984822" y="119048"/>
+                  </a:lnTo>
+                  <a:lnTo>
+                    <a:pt x="1055167" y="126581"/>
+                  </a:lnTo>
+                  <a:lnTo>
+                    <a:pt x="1125511" y="133996"/>
+                  </a:lnTo>
+                  <a:lnTo>
+                    <a:pt x="1195856" y="141293"/>
+                  </a:lnTo>
+                  <a:lnTo>
+                    <a:pt x="1266200" y="148475"/>
+                  </a:lnTo>
+                  <a:lnTo>
+                    <a:pt x="1336545" y="155544"/>
+                  </a:lnTo>
+                  <a:lnTo>
+                    <a:pt x="1406889" y="162502"/>
+                  </a:lnTo>
+                  <a:lnTo>
+                    <a:pt x="1477234" y="169350"/>
+                  </a:lnTo>
+                  <a:lnTo>
+                    <a:pt x="1547578" y="176091"/>
+                  </a:lnTo>
+                  <a:lnTo>
+                    <a:pt x="1617923" y="182724"/>
+                  </a:lnTo>
+                  <a:lnTo>
+                    <a:pt x="1688267" y="189254"/>
+                  </a:lnTo>
+                  <a:lnTo>
+                    <a:pt x="1758612" y="195680"/>
+                  </a:lnTo>
+                  <a:lnTo>
+                    <a:pt x="1828956" y="202006"/>
+                  </a:lnTo>
+                  <a:lnTo>
+                    <a:pt x="1899301" y="208231"/>
+                  </a:lnTo>
+                  <a:lnTo>
+                    <a:pt x="1969645" y="214358"/>
+                  </a:lnTo>
+                  <a:lnTo>
+                    <a:pt x="2039990" y="220389"/>
+                  </a:lnTo>
+                  <a:lnTo>
+                    <a:pt x="2110334" y="226325"/>
+                  </a:lnTo>
+                  <a:lnTo>
+                    <a:pt x="2180679" y="232167"/>
+                  </a:lnTo>
+                  <a:lnTo>
+                    <a:pt x="2251023" y="237918"/>
+                  </a:lnTo>
+                  <a:lnTo>
+                    <a:pt x="2321368" y="243577"/>
+                  </a:lnTo>
+                  <a:lnTo>
+                    <a:pt x="2391712" y="249147"/>
+                  </a:lnTo>
+                  <a:lnTo>
+                    <a:pt x="2462057" y="254630"/>
+                  </a:lnTo>
+                  <a:lnTo>
+                    <a:pt x="2532401" y="260026"/>
+                  </a:lnTo>
+                  <a:lnTo>
+                    <a:pt x="2602746" y="265337"/>
+                  </a:lnTo>
+                  <a:lnTo>
+                    <a:pt x="2673090" y="270565"/>
+                  </a:lnTo>
+                  <a:lnTo>
+                    <a:pt x="2743435" y="275710"/>
+                  </a:lnTo>
+                  <a:lnTo>
+                    <a:pt x="2813779" y="280774"/>
+                  </a:lnTo>
+                  <a:lnTo>
+                    <a:pt x="2884124" y="285758"/>
+                  </a:lnTo>
+                  <a:lnTo>
+                    <a:pt x="2954468" y="290663"/>
+                  </a:lnTo>
+                  <a:lnTo>
+                    <a:pt x="3024813" y="295492"/>
+                  </a:lnTo>
+                  <a:lnTo>
+                    <a:pt x="3095157" y="298305"/>
+                  </a:lnTo>
+                  <a:lnTo>
+                    <a:pt x="3165502" y="299446"/>
+                  </a:lnTo>
+                  <a:lnTo>
+                    <a:pt x="3235846" y="300582"/>
+                  </a:lnTo>
+                  <a:lnTo>
+                    <a:pt x="3306191" y="301713"/>
+                  </a:lnTo>
+                  <a:lnTo>
+                    <a:pt x="3376535" y="302840"/>
+                  </a:lnTo>
+                  <a:lnTo>
+                    <a:pt x="3446880" y="303963"/>
+                  </a:lnTo>
+                  <a:lnTo>
+                    <a:pt x="3517224" y="305082"/>
+                  </a:lnTo>
+                  <a:lnTo>
+                    <a:pt x="3587569" y="306197"/>
+                  </a:lnTo>
+                  <a:lnTo>
+                    <a:pt x="3657913" y="307307"/>
+                  </a:lnTo>
+                  <a:lnTo>
+                    <a:pt x="3728257" y="308413"/>
+                  </a:lnTo>
+                  <a:lnTo>
+                    <a:pt x="3798602" y="309514"/>
+                  </a:lnTo>
+                  <a:lnTo>
+                    <a:pt x="3868946" y="310612"/>
+                  </a:lnTo>
+                  <a:lnTo>
+                    <a:pt x="3939291" y="311705"/>
+                  </a:lnTo>
+                  <a:lnTo>
+                    <a:pt x="4009635" y="312794"/>
+                  </a:lnTo>
+                  <a:lnTo>
+                    <a:pt x="4079980" y="313879"/>
+                  </a:lnTo>
+                  <a:lnTo>
+                    <a:pt x="4150324" y="314960"/>
+                  </a:lnTo>
+                  <a:lnTo>
+                    <a:pt x="4220669" y="316037"/>
+                  </a:lnTo>
+                  <a:lnTo>
+                    <a:pt x="4291013" y="317109"/>
+                  </a:lnTo>
+                  <a:lnTo>
+                    <a:pt x="4361358" y="318178"/>
+                  </a:lnTo>
+                  <a:lnTo>
+                    <a:pt x="4431702" y="319242"/>
+                  </a:lnTo>
+                  <a:lnTo>
+                    <a:pt x="4502047" y="320303"/>
+                  </a:lnTo>
+                  <a:lnTo>
+                    <a:pt x="4572391" y="321359"/>
+                  </a:lnTo>
+                  <a:lnTo>
+                    <a:pt x="4642736" y="322411"/>
+                  </a:lnTo>
+                  <a:lnTo>
+                    <a:pt x="4713080" y="323460"/>
+                  </a:lnTo>
+                  <a:lnTo>
+                    <a:pt x="4783425" y="324504"/>
+                  </a:lnTo>
+                  <a:lnTo>
+                    <a:pt x="4853769" y="325544"/>
+                  </a:lnTo>
+                  <a:lnTo>
+                    <a:pt x="4924114" y="326581"/>
+                  </a:lnTo>
+                  <a:lnTo>
+                    <a:pt x="4994458" y="327613"/>
+                  </a:lnTo>
+                  <a:lnTo>
+                    <a:pt x="5064803" y="328641"/>
+                  </a:lnTo>
+                  <a:lnTo>
+                    <a:pt x="5135147" y="329666"/>
+                  </a:lnTo>
+                  <a:lnTo>
+                    <a:pt x="5205492" y="330686"/>
+                  </a:lnTo>
+                  <a:lnTo>
+                    <a:pt x="5275836" y="331703"/>
+                  </a:lnTo>
+                  <a:lnTo>
+                    <a:pt x="5346181" y="332716"/>
+                  </a:lnTo>
+                  <a:lnTo>
+                    <a:pt x="5416525" y="333725"/>
+                  </a:lnTo>
+                  <a:lnTo>
+                    <a:pt x="5486870" y="334730"/>
+                  </a:lnTo>
+                  <a:lnTo>
+                    <a:pt x="5557214" y="335731"/>
+                  </a:lnTo>
+                  <a:lnTo>
+                    <a:pt x="5627559" y="336729"/>
+                  </a:lnTo>
+                  <a:lnTo>
+                    <a:pt x="5697903" y="337722"/>
+                  </a:lnTo>
+                  <a:lnTo>
+                    <a:pt x="5768248" y="338712"/>
+                  </a:lnTo>
+                  <a:lnTo>
+                    <a:pt x="5838592" y="339698"/>
+                  </a:lnTo>
+                  <a:lnTo>
+                    <a:pt x="5908937" y="340680"/>
+                  </a:lnTo>
+                  <a:lnTo>
+                    <a:pt x="5979281" y="341659"/>
+                  </a:lnTo>
+                  <a:lnTo>
+                    <a:pt x="6049626" y="342634"/>
+                  </a:lnTo>
+                  <a:lnTo>
+                    <a:pt x="6119970" y="343605"/>
+                  </a:lnTo>
+                  <a:lnTo>
+                    <a:pt x="6190315" y="344572"/>
+                  </a:lnTo>
+                  <a:lnTo>
+                    <a:pt x="6260659" y="345536"/>
+                  </a:lnTo>
+                  <a:lnTo>
+                    <a:pt x="6331004" y="346496"/>
+                  </a:lnTo>
+                  <a:lnTo>
+                    <a:pt x="6401348" y="347452"/>
+                  </a:lnTo>
+                  <a:lnTo>
+                    <a:pt x="6471693" y="348405"/>
+                  </a:lnTo>
+                  <a:lnTo>
+                    <a:pt x="6542037" y="349354"/>
+                  </a:lnTo>
+                  <a:lnTo>
+                    <a:pt x="6612382" y="350299"/>
+                  </a:lnTo>
+                  <a:lnTo>
+                    <a:pt x="6682726" y="351241"/>
+                  </a:lnTo>
+                  <a:lnTo>
+                    <a:pt x="6753071" y="352179"/>
+                  </a:lnTo>
+                  <a:lnTo>
+                    <a:pt x="6823415" y="353114"/>
+                  </a:lnTo>
+                  <a:lnTo>
+                    <a:pt x="6893760" y="354045"/>
+                  </a:lnTo>
+                  <a:lnTo>
+                    <a:pt x="6964104" y="354972"/>
+                  </a:lnTo>
+                </a:path>
+              </a:pathLst>
+            </a:custGeom>
+          </p:spPr>
+          <p:txBody>
+            <a:bodyPr/>
+            <a:lstStyle/>
+            <a:p/>
+          </p:txBody>
+        </p:sp>
+        <p:sp>
+          <p:nvSpPr>
+            <p:cNvPr id="73" name="pl73"/>
+            <p:cNvSpPr/>
+            <p:nvPr/>
+          </p:nvSpPr>
+          <p:spPr>
+            <a:xfrm>
+              <a:off x="1235312" y="5240224"/>
+              <a:ext cx="6964104" cy="229587"/>
+            </a:xfrm>
+            <a:custGeom>
+              <a:avLst/>
+              <a:pathLst>
+                <a:path w="6964104" h="229587">
+                  <a:moveTo>
+                    <a:pt x="6964104" y="229587"/>
+                  </a:moveTo>
+                  <a:lnTo>
+                    <a:pt x="6893760" y="227604"/>
+                  </a:lnTo>
+                  <a:lnTo>
+                    <a:pt x="6823415" y="225588"/>
+                  </a:lnTo>
+                  <a:lnTo>
+                    <a:pt x="6753071" y="223541"/>
+                  </a:lnTo>
+                  <a:lnTo>
+                    <a:pt x="6682726" y="221460"/>
+                  </a:lnTo>
+                  <a:lnTo>
+                    <a:pt x="6612382" y="219347"/>
+                  </a:lnTo>
+                  <a:lnTo>
+                    <a:pt x="6542037" y="217199"/>
+                  </a:lnTo>
+                  <a:lnTo>
+                    <a:pt x="6471693" y="215017"/>
+                  </a:lnTo>
+                  <a:lnTo>
+                    <a:pt x="6401348" y="212800"/>
+                  </a:lnTo>
+                  <a:lnTo>
+                    <a:pt x="6331004" y="210548"/>
+                  </a:lnTo>
+                  <a:lnTo>
+                    <a:pt x="6260659" y="208260"/>
+                  </a:lnTo>
+                  <a:lnTo>
+                    <a:pt x="6190315" y="205934"/>
+                  </a:lnTo>
+                  <a:lnTo>
+                    <a:pt x="6119970" y="203572"/>
+                  </a:lnTo>
+                  <a:lnTo>
+                    <a:pt x="6049626" y="201172"/>
+                  </a:lnTo>
+                  <a:lnTo>
+                    <a:pt x="5979281" y="198734"/>
+                  </a:lnTo>
+                  <a:lnTo>
+                    <a:pt x="5908937" y="196256"/>
+                  </a:lnTo>
+                  <a:lnTo>
+                    <a:pt x="5838592" y="193739"/>
+                  </a:lnTo>
+                  <a:lnTo>
+                    <a:pt x="5768248" y="191181"/>
+                  </a:lnTo>
+                  <a:lnTo>
+                    <a:pt x="5697903" y="188583"/>
+                  </a:lnTo>
+                  <a:lnTo>
+                    <a:pt x="5627559" y="185942"/>
+                  </a:lnTo>
+                  <a:lnTo>
+                    <a:pt x="5557214" y="183260"/>
+                  </a:lnTo>
+                  <a:lnTo>
+                    <a:pt x="5486870" y="180535"/>
+                  </a:lnTo>
+                  <a:lnTo>
+                    <a:pt x="5416525" y="177766"/>
+                  </a:lnTo>
+                  <a:lnTo>
+                    <a:pt x="5346181" y="174952"/>
+                  </a:lnTo>
+                  <a:lnTo>
+                    <a:pt x="5275836" y="172094"/>
+                  </a:lnTo>
+                  <a:lnTo>
+                    <a:pt x="5205492" y="169190"/>
+                  </a:lnTo>
+                  <a:lnTo>
+                    <a:pt x="5135147" y="166239"/>
+                  </a:lnTo>
+                  <a:lnTo>
+                    <a:pt x="5064803" y="163241"/>
+                  </a:lnTo>
+                  <a:lnTo>
+                    <a:pt x="4994458" y="160195"/>
+                  </a:lnTo>
+                  <a:lnTo>
+                    <a:pt x="4924114" y="157101"/>
+                  </a:lnTo>
+                  <a:lnTo>
+                    <a:pt x="4853769" y="153956"/>
+                  </a:lnTo>
+                  <a:lnTo>
+                    <a:pt x="4783425" y="150762"/>
+                  </a:lnTo>
+                  <a:lnTo>
+                    <a:pt x="4713080" y="147516"/>
+                  </a:lnTo>
+                  <a:lnTo>
+                    <a:pt x="4642736" y="144218"/>
+                  </a:lnTo>
+                  <a:lnTo>
+                    <a:pt x="4572391" y="140868"/>
+                  </a:lnTo>
+                  <a:lnTo>
+                    <a:pt x="4502047" y="137464"/>
+                  </a:lnTo>
+                  <a:lnTo>
+                    <a:pt x="4431702" y="134005"/>
+                  </a:lnTo>
+                  <a:lnTo>
+                    <a:pt x="4361358" y="130491"/>
+                  </a:lnTo>
+                  <a:lnTo>
+                    <a:pt x="4291013" y="126920"/>
+                  </a:lnTo>
+                  <a:lnTo>
+                    <a:pt x="4220669" y="123293"/>
+                  </a:lnTo>
+                  <a:lnTo>
+                    <a:pt x="4150324" y="119607"/>
+                  </a:lnTo>
+                  <a:lnTo>
+                    <a:pt x="4079980" y="115863"/>
+                  </a:lnTo>
+                  <a:lnTo>
+                    <a:pt x="4009635" y="112058"/>
+                  </a:lnTo>
+                  <a:lnTo>
+                    <a:pt x="3939291" y="108193"/>
+                  </a:lnTo>
+                  <a:lnTo>
+                    <a:pt x="3868946" y="104265"/>
+                  </a:lnTo>
+                  <a:lnTo>
+                    <a:pt x="3798602" y="100275"/>
+                  </a:lnTo>
+                  <a:lnTo>
+                    <a:pt x="3728257" y="96221"/>
+                  </a:lnTo>
+                  <a:lnTo>
+                    <a:pt x="3657913" y="92102"/>
+                  </a:lnTo>
+                  <a:lnTo>
+                    <a:pt x="3587569" y="87917"/>
+                  </a:lnTo>
+                  <a:lnTo>
+                    <a:pt x="3517224" y="83665"/>
+                  </a:lnTo>
+                  <a:lnTo>
+                    <a:pt x="3446880" y="79345"/>
+                  </a:lnTo>
+                  <a:lnTo>
+                    <a:pt x="3376535" y="74955"/>
+                  </a:lnTo>
+                  <a:lnTo>
+                    <a:pt x="3306191" y="70496"/>
+                  </a:lnTo>
+                  <a:lnTo>
+                    <a:pt x="3235846" y="65965"/>
+                  </a:lnTo>
+                  <a:lnTo>
+                    <a:pt x="3165502" y="61361"/>
+                  </a:lnTo>
+                  <a:lnTo>
+                    <a:pt x="3095157" y="56684"/>
+                  </a:lnTo>
+                  <a:lnTo>
+                    <a:pt x="3024813" y="53601"/>
+                  </a:lnTo>
+                  <a:lnTo>
+                    <a:pt x="2954468" y="52452"/>
+                  </a:lnTo>
+                  <a:lnTo>
+                    <a:pt x="2884124" y="51298"/>
+                  </a:lnTo>
+                  <a:lnTo>
+                    <a:pt x="2813779" y="50141"/>
+                  </a:lnTo>
+                  <a:lnTo>
+                    <a:pt x="2743435" y="48978"/>
+                  </a:lnTo>
+                  <a:lnTo>
+                    <a:pt x="2673090" y="47811"/>
+                  </a:lnTo>
+                  <a:lnTo>
+                    <a:pt x="2602746" y="46640"/>
+                  </a:lnTo>
+                  <a:lnTo>
+                    <a:pt x="2532401" y="45465"/>
+                  </a:lnTo>
+                  <a:lnTo>
+                    <a:pt x="2462057" y="44284"/>
+                  </a:lnTo>
+                  <a:lnTo>
+                    <a:pt x="2391712" y="43100"/>
+                  </a:lnTo>
+                  <a:lnTo>
+                    <a:pt x="2321368" y="41910"/>
+                  </a:lnTo>
+                  <a:lnTo>
+                    <a:pt x="2251023" y="40716"/>
+                  </a:lnTo>
+                  <a:lnTo>
+                    <a:pt x="2180679" y="39518"/>
+                  </a:lnTo>
+                  <a:lnTo>
+                    <a:pt x="2110334" y="38315"/>
+                  </a:lnTo>
+                  <a:lnTo>
+                    <a:pt x="2039990" y="37107"/>
+                  </a:lnTo>
+                  <a:lnTo>
+                    <a:pt x="1969645" y="35895"/>
+                  </a:lnTo>
+                  <a:lnTo>
+                    <a:pt x="1899301" y="34678"/>
+                  </a:lnTo>
+                  <a:lnTo>
+                    <a:pt x="1828956" y="33457"/>
+                  </a:lnTo>
+                  <a:lnTo>
+                    <a:pt x="1758612" y="32230"/>
+                  </a:lnTo>
+                  <a:lnTo>
+                    <a:pt x="1688267" y="30999"/>
+                  </a:lnTo>
+                  <a:lnTo>
+                    <a:pt x="1617923" y="29764"/>
+                  </a:lnTo>
+                  <a:lnTo>
+                    <a:pt x="1547578" y="28523"/>
+                  </a:lnTo>
+                  <a:lnTo>
+                    <a:pt x="1477234" y="27278"/>
+                  </a:lnTo>
+                  <a:lnTo>
+                    <a:pt x="1406889" y="26028"/>
+                  </a:lnTo>
+                  <a:lnTo>
+                    <a:pt x="1336545" y="24774"/>
+                  </a:lnTo>
+                  <a:lnTo>
+                    <a:pt x="1266200" y="23514"/>
+                  </a:lnTo>
+                  <a:lnTo>
+                    <a:pt x="1195856" y="22250"/>
+                  </a:lnTo>
+                  <a:lnTo>
+                    <a:pt x="1125511" y="20981"/>
+                  </a:lnTo>
+                  <a:lnTo>
+                    <a:pt x="1055167" y="19707"/>
+                  </a:lnTo>
+                  <a:lnTo>
+                    <a:pt x="984822" y="18428"/>
+                  </a:lnTo>
+                  <a:lnTo>
+                    <a:pt x="914478" y="17144"/>
+                  </a:lnTo>
+                  <a:lnTo>
+                    <a:pt x="844133" y="15855"/>
+                  </a:lnTo>
+                  <a:lnTo>
+                    <a:pt x="773789" y="14561"/>
+                  </a:lnTo>
+                  <a:lnTo>
+                    <a:pt x="703444" y="13263"/>
+                  </a:lnTo>
+                  <a:lnTo>
+                    <a:pt x="633100" y="11959"/>
+                  </a:lnTo>
+                  <a:lnTo>
+                    <a:pt x="562755" y="10651"/>
+                  </a:lnTo>
+                  <a:lnTo>
+                    <a:pt x="492411" y="9337"/>
+                  </a:lnTo>
+                  <a:lnTo>
+                    <a:pt x="422066" y="8018"/>
+                  </a:lnTo>
+                  <a:lnTo>
+                    <a:pt x="351722" y="6695"/>
+                  </a:lnTo>
+                  <a:lnTo>
+                    <a:pt x="281377" y="5366"/>
+                  </a:lnTo>
+                  <a:lnTo>
+                    <a:pt x="211033" y="4032"/>
+                  </a:lnTo>
+                  <a:lnTo>
+                    <a:pt x="140688" y="2693"/>
+                  </a:lnTo>
+                  <a:lnTo>
+                    <a:pt x="70344" y="1349"/>
+                  </a:lnTo>
+                  <a:lnTo>
+                    <a:pt x="0" y="0"/>
+                  </a:lnTo>
+                </a:path>
+              </a:pathLst>
+            </a:custGeom>
+          </p:spPr>
+          <p:txBody>
+            <a:bodyPr/>
+            <a:lstStyle/>
+            <a:p/>
+          </p:txBody>
+        </p:sp>
+        <p:sp>
+          <p:nvSpPr>
+            <p:cNvPr id="74" name="pl74"/>
+            <p:cNvSpPr/>
+            <p:nvPr/>
+          </p:nvSpPr>
+          <p:spPr>
+            <a:xfrm>
+              <a:off x="1235312" y="5134312"/>
+              <a:ext cx="6964104" cy="286216"/>
+            </a:xfrm>
+            <a:custGeom>
+              <a:avLst/>
+              <a:pathLst>
+                <a:path w="6964104" h="286216">
+                  <a:moveTo>
+                    <a:pt x="0" y="0"/>
+                  </a:moveTo>
+                  <a:lnTo>
+                    <a:pt x="70344" y="4504"/>
+                  </a:lnTo>
+                  <a:lnTo>
+                    <a:pt x="140688" y="8965"/>
+                  </a:lnTo>
+                  <a:lnTo>
+                    <a:pt x="211033" y="13382"/>
+                  </a:lnTo>
+                  <a:lnTo>
+                    <a:pt x="281377" y="17756"/>
+                  </a:lnTo>
+                  <a:lnTo>
+                    <a:pt x="351722" y="22087"/>
+                  </a:lnTo>
+                  <a:lnTo>
+                    <a:pt x="422066" y="26375"/>
+                  </a:lnTo>
+                  <a:lnTo>
+                    <a:pt x="492411" y="30622"/>
+                  </a:lnTo>
+                  <a:lnTo>
+                    <a:pt x="562755" y="34826"/>
+                  </a:lnTo>
+                  <a:lnTo>
+                    <a:pt x="633100" y="38990"/>
+                  </a:lnTo>
+                  <a:lnTo>
+                    <a:pt x="703444" y="43112"/>
+                  </a:lnTo>
+                  <a:lnTo>
+                    <a:pt x="773789" y="47194"/>
+                  </a:lnTo>
+                  <a:lnTo>
+                    <a:pt x="844133" y="51237"/>
+                  </a:lnTo>
+                  <a:lnTo>
+                    <a:pt x="914478" y="55239"/>
+                  </a:lnTo>
+                  <a:lnTo>
+                    <a:pt x="984822" y="59202"/>
+                  </a:lnTo>
+                  <a:lnTo>
+                    <a:pt x="1055167" y="63127"/>
+                  </a:lnTo>
+                  <a:lnTo>
+                    <a:pt x="1125511" y="67013"/>
+                  </a:lnTo>
+                  <a:lnTo>
+                    <a:pt x="1195856" y="70860"/>
+                  </a:lnTo>
+                  <a:lnTo>
+                    <a:pt x="1266200" y="74670"/>
+                  </a:lnTo>
+                  <a:lnTo>
+                    <a:pt x="1336545" y="78443"/>
+                  </a:lnTo>
+                  <a:lnTo>
+                    <a:pt x="1406889" y="82179"/>
+                  </a:lnTo>
+                  <a:lnTo>
+                    <a:pt x="1477234" y="85878"/>
+                  </a:lnTo>
+                  <a:lnTo>
+                    <a:pt x="1547578" y="89541"/>
+                  </a:lnTo>
+                  <a:lnTo>
+                    <a:pt x="1617923" y="93167"/>
+                  </a:lnTo>
+                  <a:lnTo>
+                    <a:pt x="1688267" y="96759"/>
+                  </a:lnTo>
+                  <a:lnTo>
+                    <a:pt x="1758612" y="100315"/>
+                  </a:lnTo>
+                  <a:lnTo>
+                    <a:pt x="1828956" y="103836"/>
+                  </a:lnTo>
+                  <a:lnTo>
+                    <a:pt x="1899301" y="107323"/>
+                  </a:lnTo>
+                  <a:lnTo>
+                    <a:pt x="1969645" y="110775"/>
+                  </a:lnTo>
+                  <a:lnTo>
+                    <a:pt x="2039990" y="114194"/>
+                  </a:lnTo>
+                  <a:lnTo>
+                    <a:pt x="2110334" y="117579"/>
+                  </a:lnTo>
+                  <a:lnTo>
+                    <a:pt x="2180679" y="120931"/>
+                  </a:lnTo>
+                  <a:lnTo>
+                    <a:pt x="2251023" y="124250"/>
+                  </a:lnTo>
+                  <a:lnTo>
+                    <a:pt x="2321368" y="127536"/>
+                  </a:lnTo>
+                  <a:lnTo>
+                    <a:pt x="2391712" y="130791"/>
+                  </a:lnTo>
+                  <a:lnTo>
+                    <a:pt x="2462057" y="134013"/>
+                  </a:lnTo>
+                  <a:lnTo>
+                    <a:pt x="2532401" y="137204"/>
+                  </a:lnTo>
+                  <a:lnTo>
+                    <a:pt x="2602746" y="140363"/>
+                  </a:lnTo>
+                  <a:lnTo>
+                    <a:pt x="2673090" y="143491"/>
+                  </a:lnTo>
+                  <a:lnTo>
+                    <a:pt x="2743435" y="146589"/>
+                  </a:lnTo>
+                  <a:lnTo>
+                    <a:pt x="2813779" y="149657"/>
+                  </a:lnTo>
+                  <a:lnTo>
+                    <a:pt x="2884124" y="152694"/>
+                  </a:lnTo>
+                  <a:lnTo>
+                    <a:pt x="2954468" y="155702"/>
+                  </a:lnTo>
+                  <a:lnTo>
+                    <a:pt x="3024813" y="158680"/>
+                  </a:lnTo>
+                  <a:lnTo>
+                    <a:pt x="3095157" y="161628"/>
+                  </a:lnTo>
+                  <a:lnTo>
+                    <a:pt x="3165502" y="164548"/>
+                  </a:lnTo>
+                  <a:lnTo>
+                    <a:pt x="3235846" y="167440"/>
+                  </a:lnTo>
+                  <a:lnTo>
+                    <a:pt x="3306191" y="170302"/>
+                  </a:lnTo>
+                  <a:lnTo>
+                    <a:pt x="3376535" y="173137"/>
+                  </a:lnTo>
+                  <a:lnTo>
+                    <a:pt x="3446880" y="175944"/>
+                  </a:lnTo>
+                  <a:lnTo>
+                    <a:pt x="3517224" y="178724"/>
+                  </a:lnTo>
+                  <a:lnTo>
+                    <a:pt x="3587569" y="181476"/>
+                  </a:lnTo>
+                  <a:lnTo>
+                    <a:pt x="3657913" y="184201"/>
+                  </a:lnTo>
+                  <a:lnTo>
+                    <a:pt x="3728257" y="186900"/>
+                  </a:lnTo>
+                  <a:lnTo>
+                    <a:pt x="3798602" y="189572"/>
+                  </a:lnTo>
+                  <a:lnTo>
+                    <a:pt x="3868946" y="192218"/>
+                  </a:lnTo>
+                  <a:lnTo>
+                    <a:pt x="3939291" y="194838"/>
+                  </a:lnTo>
+                  <a:lnTo>
+                    <a:pt x="4009635" y="197432"/>
+                  </a:lnTo>
+                  <a:lnTo>
+                    <a:pt x="4079980" y="200001"/>
+                  </a:lnTo>
+                  <a:lnTo>
+                    <a:pt x="4150324" y="202545"/>
+                  </a:lnTo>
+                  <a:lnTo>
+                    <a:pt x="4220669" y="205063"/>
+                  </a:lnTo>
+                  <a:lnTo>
+                    <a:pt x="4291013" y="207557"/>
+                  </a:lnTo>
+                  <a:lnTo>
+                    <a:pt x="4361358" y="210027"/>
+                  </a:lnTo>
+                  <a:lnTo>
+                    <a:pt x="4431702" y="212472"/>
+                  </a:lnTo>
+                  <a:lnTo>
+                    <a:pt x="4502047" y="214893"/>
+                  </a:lnTo>
+                  <a:lnTo>
+                    <a:pt x="4572391" y="217291"/>
+                  </a:lnTo>
+                  <a:lnTo>
+                    <a:pt x="4642736" y="219665"/>
+                  </a:lnTo>
+                  <a:lnTo>
+                    <a:pt x="4713080" y="222016"/>
+                  </a:lnTo>
+                  <a:lnTo>
+                    <a:pt x="4783425" y="224343"/>
+                  </a:lnTo>
+                  <a:lnTo>
+                    <a:pt x="4853769" y="226648"/>
+                  </a:lnTo>
+                  <a:lnTo>
+                    <a:pt x="4924114" y="228930"/>
+                  </a:lnTo>
+                  <a:lnTo>
+                    <a:pt x="4994458" y="231190"/>
+                  </a:lnTo>
+                  <a:lnTo>
+                    <a:pt x="5064803" y="233428"/>
+                  </a:lnTo>
+                  <a:lnTo>
+                    <a:pt x="5135147" y="235644"/>
+                  </a:lnTo>
+                  <a:lnTo>
+                    <a:pt x="5205492" y="237838"/>
+                  </a:lnTo>
+                  <a:lnTo>
+                    <a:pt x="5275836" y="240011"/>
+                  </a:lnTo>
+                  <a:lnTo>
+                    <a:pt x="5346181" y="242162"/>
+                  </a:lnTo>
+                  <a:lnTo>
+                    <a:pt x="5416525" y="244292"/>
+                  </a:lnTo>
+                  <a:lnTo>
+                    <a:pt x="5486870" y="246401"/>
+                  </a:lnTo>
+                  <a:lnTo>
+                    <a:pt x="5557214" y="248490"/>
+                  </a:lnTo>
+                  <a:lnTo>
+                    <a:pt x="5627559" y="250558"/>
+                  </a:lnTo>
+                  <a:lnTo>
+                    <a:pt x="5697903" y="252606"/>
+                  </a:lnTo>
+                  <a:lnTo>
+                    <a:pt x="5768248" y="254633"/>
+                  </a:lnTo>
+                  <a:lnTo>
+                    <a:pt x="5838592" y="256641"/>
+                  </a:lnTo>
+                  <a:lnTo>
+                    <a:pt x="5908937" y="258629"/>
+                  </a:lnTo>
+                  <a:lnTo>
+                    <a:pt x="5979281" y="260598"/>
+                  </a:lnTo>
+                  <a:lnTo>
+                    <a:pt x="6049626" y="262547"/>
+                  </a:lnTo>
+                  <a:lnTo>
+                    <a:pt x="6119970" y="264478"/>
+                  </a:lnTo>
+                  <a:lnTo>
+                    <a:pt x="6190315" y="266389"/>
+                  </a:lnTo>
+                  <a:lnTo>
+                    <a:pt x="6260659" y="268281"/>
+                  </a:lnTo>
+                  <a:lnTo>
+                    <a:pt x="6331004" y="270155"/>
+                  </a:lnTo>
+                  <a:lnTo>
+                    <a:pt x="6401348" y="272011"/>
+                  </a:lnTo>
+                  <a:lnTo>
+                    <a:pt x="6471693" y="273848"/>
+                  </a:lnTo>
+                  <a:lnTo>
+                    <a:pt x="6542037" y="275668"/>
+                  </a:lnTo>
+                  <a:lnTo>
+                    <a:pt x="6612382" y="277469"/>
+                  </a:lnTo>
+                  <a:lnTo>
+                    <a:pt x="6682726" y="279253"/>
+                  </a:lnTo>
+                  <a:lnTo>
+                    <a:pt x="6753071" y="281020"/>
+                  </a:lnTo>
+                  <a:lnTo>
+                    <a:pt x="6823415" y="282769"/>
+                  </a:lnTo>
+                  <a:lnTo>
+                    <a:pt x="6893760" y="284501"/>
+                  </a:lnTo>
+                  <a:lnTo>
+                    <a:pt x="6964104" y="286216"/>
+                  </a:lnTo>
+                </a:path>
+              </a:pathLst>
+            </a:custGeom>
+            <a:ln w="27101" cap="flat">
+              <a:solidFill>
+                <a:srgbClr val="FF8C00">
+                  <a:alpha val="100000"/>
+                </a:srgbClr>
+              </a:solidFill>
+              <a:prstDash val="solid"/>
+              <a:round/>
+            </a:ln>
+          </p:spPr>
+          <p:txBody>
+            <a:bodyPr/>
+            <a:lstStyle/>
+            <a:p/>
+          </p:txBody>
+        </p:sp>
+        <p:sp>
+          <p:nvSpPr>
+            <p:cNvPr id="75" name="pl75"/>
+            <p:cNvSpPr/>
+            <p:nvPr/>
+          </p:nvSpPr>
+          <p:spPr>
+            <a:xfrm>
+              <a:off x="887106" y="5294352"/>
+              <a:ext cx="7660515" cy="0"/>
+            </a:xfrm>
+            <a:custGeom>
+              <a:avLst/>
+              <a:pathLst>
+                <a:path w="7660515" h="0">
+                  <a:moveTo>
+                    <a:pt x="0" y="0"/>
+                  </a:moveTo>
+                  <a:lnTo>
+                    <a:pt x="7660515" y="0"/>
+                  </a:lnTo>
+                  <a:lnTo>
+                    <a:pt x="7660515" y="0"/>
+                  </a:lnTo>
+                </a:path>
+              </a:pathLst>
+            </a:custGeom>
+            <a:ln w="13550" cap="flat">
+              <a:solidFill>
+                <a:srgbClr val="7F7F7F">
+                  <a:alpha val="100000"/>
+                </a:srgbClr>
+              </a:solidFill>
+              <a:prstDash val="dash"/>
+              <a:round/>
+            </a:ln>
+          </p:spPr>
+          <p:txBody>
+            <a:bodyPr/>
+            <a:lstStyle/>
+            <a:p/>
+          </p:txBody>
+        </p:sp>
+        <p:sp>
+          <p:nvSpPr>
+            <p:cNvPr id="76" name="pl76"/>
+            <p:cNvSpPr/>
+            <p:nvPr/>
+          </p:nvSpPr>
+          <p:spPr>
+            <a:xfrm>
+              <a:off x="4292500" y="4336484"/>
+              <a:ext cx="0" cy="1317069"/>
+            </a:xfrm>
+            <a:custGeom>
+              <a:avLst/>
+              <a:pathLst>
+                <a:path w="0" h="1317069">
+                  <a:moveTo>
+                    <a:pt x="0" y="1317069"/>
+                  </a:moveTo>
+                  <a:lnTo>
+                    <a:pt x="0" y="0"/>
+                  </a:lnTo>
+                  <a:lnTo>
+                    <a:pt x="0" y="0"/>
+                  </a:lnTo>
+                </a:path>
+              </a:pathLst>
+            </a:custGeom>
+            <a:ln w="13550" cap="flat">
+              <a:solidFill>
+                <a:srgbClr val="666666">
+                  <a:alpha val="100000"/>
+                </a:srgbClr>
+              </a:solidFill>
+              <a:prstDash val="dot"/>
+              <a:round/>
+            </a:ln>
+          </p:spPr>
+          <p:txBody>
+            <a:bodyPr/>
+            <a:lstStyle/>
+            <a:p/>
+          </p:txBody>
+        </p:sp>
+        <p:sp>
+          <p:nvSpPr>
+            <p:cNvPr id="77" name="pl77"/>
+            <p:cNvSpPr/>
+            <p:nvPr/>
+          </p:nvSpPr>
+          <p:spPr>
+            <a:xfrm>
+              <a:off x="3124839" y="4336484"/>
+              <a:ext cx="0" cy="1317069"/>
+            </a:xfrm>
+            <a:custGeom>
+              <a:avLst/>
+              <a:pathLst>
+                <a:path w="0" h="1317069">
+                  <a:moveTo>
+                    <a:pt x="0" y="1317069"/>
+                  </a:moveTo>
+                  <a:lnTo>
+                    <a:pt x="0" y="0"/>
+                  </a:lnTo>
+                  <a:lnTo>
+                    <a:pt x="0" y="0"/>
+                  </a:lnTo>
+                </a:path>
+              </a:pathLst>
+            </a:custGeom>
+            <a:ln w="13550" cap="flat">
+              <a:solidFill>
+                <a:srgbClr val="4682B4">
+                  <a:alpha val="69803"/>
+                </a:srgbClr>
+              </a:solidFill>
+              <a:prstDash val="dash"/>
+              <a:round/>
+            </a:ln>
+          </p:spPr>
+          <p:txBody>
+            <a:bodyPr/>
+            <a:lstStyle/>
+            <a:p/>
+          </p:txBody>
+        </p:sp>
+        <p:sp>
+          <p:nvSpPr>
+            <p:cNvPr id="78" name="pl78"/>
+            <p:cNvSpPr/>
+            <p:nvPr/>
+          </p:nvSpPr>
+          <p:spPr>
+            <a:xfrm>
+              <a:off x="5508592" y="4336484"/>
+              <a:ext cx="0" cy="1317069"/>
+            </a:xfrm>
+            <a:custGeom>
+              <a:avLst/>
+              <a:pathLst>
+                <a:path w="0" h="1317069">
+                  <a:moveTo>
+                    <a:pt x="0" y="1317069"/>
+                  </a:moveTo>
+                  <a:lnTo>
+                    <a:pt x="0" y="0"/>
+                  </a:lnTo>
+                  <a:lnTo>
+                    <a:pt x="0" y="0"/>
+                  </a:lnTo>
+                </a:path>
+              </a:pathLst>
+            </a:custGeom>
+            <a:ln w="13550" cap="flat">
+              <a:solidFill>
+                <a:srgbClr val="4682B4">
+                  <a:alpha val="69803"/>
+                </a:srgbClr>
+              </a:solidFill>
+              <a:prstDash val="dash"/>
+              <a:round/>
+            </a:ln>
+          </p:spPr>
+          <p:txBody>
+            <a:bodyPr/>
+            <a:lstStyle/>
+            <a:p/>
+          </p:txBody>
+        </p:sp>
+        <p:sp>
+          <p:nvSpPr>
+            <p:cNvPr id="79" name="tx79"/>
+            <p:cNvSpPr/>
+            <p:nvPr/>
+          </p:nvSpPr>
+          <p:spPr>
+            <a:xfrm>
+              <a:off x="762297" y="5553636"/>
+              <a:ext cx="62179" cy="80101"/>
+            </a:xfrm>
+            <a:prstGeom prst="rect">
+              <a:avLst/>
+            </a:prstGeom>
+            <a:noFill/>
+          </p:spPr>
+          <p:txBody>
+            <a:bodyPr lIns="0" rIns="0" tIns="0" bIns="0" anchorCtr="1" anchor="ctr" wrap="none"/>
+            <a:lstStyle/>
+            <a:p>
+              <a:pPr algn="l" marL="0" marR="0" indent="0">
+                <a:lnSpc>
+                  <a:spcPts val="880"/>
+                </a:lnSpc>
+                <a:spcBef>
+                  <a:spcPts val="0"/>
+                </a:spcBef>
+                <a:spcAft>
+                  <a:spcPts val="0"/>
+                </a:spcAft>
+              </a:pPr>
+              <a:r>
+                <a:rPr sz="880">
+                  <a:solidFill>
+                    <a:srgbClr val="4D4D4D">
+                      <a:alpha val="100000"/>
+                    </a:srgbClr>
+                  </a:solidFill>
+                  <a:latin typeface="Helvetica"/>
+                  <a:cs typeface="Helvetica"/>
+                </a:rPr>
+                <a:t>0</a:t>
+              </a:r>
+            </a:p>
+          </p:txBody>
+        </p:sp>
+        <p:sp>
+          <p:nvSpPr>
+            <p:cNvPr id="80" name="tx80"/>
+            <p:cNvSpPr/>
+            <p:nvPr/>
+          </p:nvSpPr>
+          <p:spPr>
+            <a:xfrm>
+              <a:off x="762297" y="5254302"/>
+              <a:ext cx="62179" cy="80101"/>
+            </a:xfrm>
+            <a:prstGeom prst="rect">
+              <a:avLst/>
+            </a:prstGeom>
+            <a:noFill/>
+          </p:spPr>
+          <p:txBody>
+            <a:bodyPr lIns="0" rIns="0" tIns="0" bIns="0" anchorCtr="1" anchor="ctr" wrap="none"/>
+            <a:lstStyle/>
+            <a:p>
+              <a:pPr algn="l" marL="0" marR="0" indent="0">
+                <a:lnSpc>
+                  <a:spcPts val="880"/>
+                </a:lnSpc>
+                <a:spcBef>
+                  <a:spcPts val="0"/>
+                </a:spcBef>
+                <a:spcAft>
+                  <a:spcPts val="0"/>
+                </a:spcAft>
+              </a:pPr>
+              <a:r>
+                <a:rPr sz="880">
+                  <a:solidFill>
+                    <a:srgbClr val="4D4D4D">
+                      <a:alpha val="100000"/>
+                    </a:srgbClr>
+                  </a:solidFill>
+                  <a:latin typeface="Helvetica"/>
+                  <a:cs typeface="Helvetica"/>
+                </a:rPr>
+                <a:t>1</a:t>
+              </a:r>
+            </a:p>
+          </p:txBody>
+        </p:sp>
+        <p:sp>
+          <p:nvSpPr>
+            <p:cNvPr id="81" name="tx81"/>
+            <p:cNvSpPr/>
+            <p:nvPr/>
+          </p:nvSpPr>
+          <p:spPr>
+            <a:xfrm>
+              <a:off x="762297" y="4954968"/>
+              <a:ext cx="62179" cy="80101"/>
+            </a:xfrm>
+            <a:prstGeom prst="rect">
+              <a:avLst/>
+            </a:prstGeom>
+            <a:noFill/>
+          </p:spPr>
+          <p:txBody>
+            <a:bodyPr lIns="0" rIns="0" tIns="0" bIns="0" anchorCtr="1" anchor="ctr" wrap="none"/>
+            <a:lstStyle/>
+            <a:p>
+              <a:pPr algn="l" marL="0" marR="0" indent="0">
+                <a:lnSpc>
+                  <a:spcPts val="880"/>
+                </a:lnSpc>
+                <a:spcBef>
+                  <a:spcPts val="0"/>
+                </a:spcBef>
+                <a:spcAft>
+                  <a:spcPts val="0"/>
+                </a:spcAft>
+              </a:pPr>
+              <a:r>
+                <a:rPr sz="880">
+                  <a:solidFill>
+                    <a:srgbClr val="4D4D4D">
+                      <a:alpha val="100000"/>
+                    </a:srgbClr>
+                  </a:solidFill>
+                  <a:latin typeface="Helvetica"/>
+                  <a:cs typeface="Helvetica"/>
+                </a:rPr>
+                <a:t>2</a:t>
+              </a:r>
+            </a:p>
+          </p:txBody>
+        </p:sp>
+        <p:sp>
+          <p:nvSpPr>
+            <p:cNvPr id="82" name="tx82"/>
+            <p:cNvSpPr/>
+            <p:nvPr/>
+          </p:nvSpPr>
+          <p:spPr>
+            <a:xfrm>
+              <a:off x="762297" y="4655634"/>
+              <a:ext cx="62179" cy="80101"/>
+            </a:xfrm>
+            <a:prstGeom prst="rect">
+              <a:avLst/>
+            </a:prstGeom>
+            <a:noFill/>
+          </p:spPr>
+          <p:txBody>
+            <a:bodyPr lIns="0" rIns="0" tIns="0" bIns="0" anchorCtr="1" anchor="ctr" wrap="none"/>
+            <a:lstStyle/>
+            <a:p>
+              <a:pPr algn="l" marL="0" marR="0" indent="0">
+                <a:lnSpc>
+                  <a:spcPts val="880"/>
+                </a:lnSpc>
+                <a:spcBef>
+                  <a:spcPts val="0"/>
+                </a:spcBef>
+                <a:spcAft>
+                  <a:spcPts val="0"/>
+                </a:spcAft>
+              </a:pPr>
+              <a:r>
+                <a:rPr sz="880">
+                  <a:solidFill>
+                    <a:srgbClr val="4D4D4D">
+                      <a:alpha val="100000"/>
+                    </a:srgbClr>
+                  </a:solidFill>
+                  <a:latin typeface="Helvetica"/>
+                  <a:cs typeface="Helvetica"/>
+                </a:rPr>
+                <a:t>3</a:t>
+              </a:r>
+            </a:p>
+          </p:txBody>
+        </p:sp>
+        <p:sp>
+          <p:nvSpPr>
+            <p:cNvPr id="83" name="tx83"/>
+            <p:cNvSpPr/>
+            <p:nvPr/>
+          </p:nvSpPr>
+          <p:spPr>
+            <a:xfrm>
+              <a:off x="762297" y="4356300"/>
+              <a:ext cx="62179" cy="80101"/>
+            </a:xfrm>
+            <a:prstGeom prst="rect">
+              <a:avLst/>
+            </a:prstGeom>
+            <a:noFill/>
+          </p:spPr>
+          <p:txBody>
+            <a:bodyPr lIns="0" rIns="0" tIns="0" bIns="0" anchorCtr="1" anchor="ctr" wrap="none"/>
+            <a:lstStyle/>
+            <a:p>
+              <a:pPr algn="l" marL="0" marR="0" indent="0">
+                <a:lnSpc>
+                  <a:spcPts val="880"/>
+                </a:lnSpc>
+                <a:spcBef>
+                  <a:spcPts val="0"/>
+                </a:spcBef>
+                <a:spcAft>
+                  <a:spcPts val="0"/>
+                </a:spcAft>
+              </a:pPr>
+              <a:r>
+                <a:rPr sz="880">
+                  <a:solidFill>
+                    <a:srgbClr val="4D4D4D">
+                      <a:alpha val="100000"/>
+                    </a:srgbClr>
+                  </a:solidFill>
+                  <a:latin typeface="Helvetica"/>
+                  <a:cs typeface="Helvetica"/>
+                </a:rPr>
+                <a:t>4</a:t>
+              </a:r>
+            </a:p>
+          </p:txBody>
+        </p:sp>
+        <p:sp>
+          <p:nvSpPr>
+            <p:cNvPr id="84" name="tx84"/>
+            <p:cNvSpPr/>
+            <p:nvPr/>
+          </p:nvSpPr>
+          <p:spPr>
+            <a:xfrm>
+              <a:off x="1346003" y="5716183"/>
+              <a:ext cx="161574" cy="80101"/>
+            </a:xfrm>
+            <a:prstGeom prst="rect">
+              <a:avLst/>
+            </a:prstGeom>
+            <a:noFill/>
+          </p:spPr>
+          <p:txBody>
+            <a:bodyPr lIns="0" rIns="0" tIns="0" bIns="0" anchorCtr="1" anchor="ctr" wrap="none"/>
+            <a:lstStyle/>
+            <a:p>
+              <a:pPr algn="l" marL="0" marR="0" indent="0">
+                <a:lnSpc>
+                  <a:spcPts val="880"/>
+                </a:lnSpc>
+                <a:spcBef>
+                  <a:spcPts val="0"/>
+                </a:spcBef>
+                <a:spcAft>
+                  <a:spcPts val="0"/>
+                </a:spcAft>
+              </a:pPr>
+              <a:r>
+                <a:rPr sz="880">
+                  <a:solidFill>
+                    <a:srgbClr val="4D4D4D">
+                      <a:alpha val="100000"/>
+                    </a:srgbClr>
+                  </a:solidFill>
+                  <a:latin typeface="Helvetica"/>
+                  <a:cs typeface="Helvetica"/>
+                </a:rPr>
+                <a:t>-50</a:t>
+              </a:r>
+            </a:p>
+          </p:txBody>
+        </p:sp>
+        <p:sp>
+          <p:nvSpPr>
+            <p:cNvPr id="85" name="tx85"/>
+            <p:cNvSpPr/>
+            <p:nvPr/>
+          </p:nvSpPr>
+          <p:spPr>
+            <a:xfrm>
+              <a:off x="2196512" y="5716183"/>
+              <a:ext cx="161574" cy="80101"/>
+            </a:xfrm>
+            <a:prstGeom prst="rect">
+              <a:avLst/>
+            </a:prstGeom>
+            <a:noFill/>
+          </p:spPr>
+          <p:txBody>
+            <a:bodyPr lIns="0" rIns="0" tIns="0" bIns="0" anchorCtr="1" anchor="ctr" wrap="none"/>
+            <a:lstStyle/>
+            <a:p>
+              <a:pPr algn="l" marL="0" marR="0" indent="0">
+                <a:lnSpc>
+                  <a:spcPts val="880"/>
+                </a:lnSpc>
+                <a:spcBef>
+                  <a:spcPts val="0"/>
+                </a:spcBef>
+                <a:spcAft>
+                  <a:spcPts val="0"/>
+                </a:spcAft>
+              </a:pPr>
+              <a:r>
+                <a:rPr sz="880">
+                  <a:solidFill>
+                    <a:srgbClr val="4D4D4D">
+                      <a:alpha val="100000"/>
+                    </a:srgbClr>
+                  </a:solidFill>
+                  <a:latin typeface="Helvetica"/>
+                  <a:cs typeface="Helvetica"/>
+                </a:rPr>
+                <a:t>-40</a:t>
+              </a:r>
+            </a:p>
+          </p:txBody>
+        </p:sp>
+        <p:sp>
+          <p:nvSpPr>
+            <p:cNvPr id="86" name="tx86"/>
+            <p:cNvSpPr/>
+            <p:nvPr/>
+          </p:nvSpPr>
+          <p:spPr>
+            <a:xfrm>
+              <a:off x="3047022" y="5716183"/>
+              <a:ext cx="161574" cy="80101"/>
+            </a:xfrm>
+            <a:prstGeom prst="rect">
+              <a:avLst/>
+            </a:prstGeom>
+            <a:noFill/>
+          </p:spPr>
+          <p:txBody>
+            <a:bodyPr lIns="0" rIns="0" tIns="0" bIns="0" anchorCtr="1" anchor="ctr" wrap="none"/>
+            <a:lstStyle/>
+            <a:p>
+              <a:pPr algn="l" marL="0" marR="0" indent="0">
+                <a:lnSpc>
+                  <a:spcPts val="880"/>
+                </a:lnSpc>
+                <a:spcBef>
+                  <a:spcPts val="0"/>
+                </a:spcBef>
+                <a:spcAft>
+                  <a:spcPts val="0"/>
+                </a:spcAft>
+              </a:pPr>
+              <a:r>
+                <a:rPr sz="880">
+                  <a:solidFill>
+                    <a:srgbClr val="4D4D4D">
+                      <a:alpha val="100000"/>
+                    </a:srgbClr>
+                  </a:solidFill>
+                  <a:latin typeface="Helvetica"/>
+                  <a:cs typeface="Helvetica"/>
+                </a:rPr>
+                <a:t>-30</a:t>
+              </a:r>
+            </a:p>
+          </p:txBody>
+        </p:sp>
+        <p:sp>
+          <p:nvSpPr>
+            <p:cNvPr id="87" name="tx87"/>
+            <p:cNvSpPr/>
+            <p:nvPr/>
+          </p:nvSpPr>
+          <p:spPr>
+            <a:xfrm>
+              <a:off x="3897531" y="5716183"/>
+              <a:ext cx="161574" cy="80101"/>
+            </a:xfrm>
+            <a:prstGeom prst="rect">
+              <a:avLst/>
+            </a:prstGeom>
+            <a:noFill/>
+          </p:spPr>
+          <p:txBody>
+            <a:bodyPr lIns="0" rIns="0" tIns="0" bIns="0" anchorCtr="1" anchor="ctr" wrap="none"/>
+            <a:lstStyle/>
+            <a:p>
+              <a:pPr algn="l" marL="0" marR="0" indent="0">
+                <a:lnSpc>
+                  <a:spcPts val="880"/>
+                </a:lnSpc>
+                <a:spcBef>
+                  <a:spcPts val="0"/>
+                </a:spcBef>
+                <a:spcAft>
+                  <a:spcPts val="0"/>
+                </a:spcAft>
+              </a:pPr>
+              <a:r>
+                <a:rPr sz="880">
+                  <a:solidFill>
+                    <a:srgbClr val="4D4D4D">
+                      <a:alpha val="100000"/>
+                    </a:srgbClr>
+                  </a:solidFill>
+                  <a:latin typeface="Helvetica"/>
+                  <a:cs typeface="Helvetica"/>
+                </a:rPr>
+                <a:t>-20</a:t>
+              </a:r>
+            </a:p>
+          </p:txBody>
+        </p:sp>
+        <p:sp>
+          <p:nvSpPr>
+            <p:cNvPr id="88" name="tx88"/>
+            <p:cNvSpPr/>
+            <p:nvPr/>
+          </p:nvSpPr>
+          <p:spPr>
+            <a:xfrm>
+              <a:off x="4748041" y="5716183"/>
+              <a:ext cx="161574" cy="80101"/>
+            </a:xfrm>
+            <a:prstGeom prst="rect">
+              <a:avLst/>
+            </a:prstGeom>
+            <a:noFill/>
+          </p:spPr>
+          <p:txBody>
+            <a:bodyPr lIns="0" rIns="0" tIns="0" bIns="0" anchorCtr="1" anchor="ctr" wrap="none"/>
+            <a:lstStyle/>
+            <a:p>
+              <a:pPr algn="l" marL="0" marR="0" indent="0">
+                <a:lnSpc>
+                  <a:spcPts val="880"/>
+                </a:lnSpc>
+                <a:spcBef>
+                  <a:spcPts val="0"/>
+                </a:spcBef>
+                <a:spcAft>
+                  <a:spcPts val="0"/>
+                </a:spcAft>
+              </a:pPr>
+              <a:r>
+                <a:rPr sz="880">
+                  <a:solidFill>
+                    <a:srgbClr val="4D4D4D">
+                      <a:alpha val="100000"/>
+                    </a:srgbClr>
+                  </a:solidFill>
+                  <a:latin typeface="Helvetica"/>
+                  <a:cs typeface="Helvetica"/>
+                </a:rPr>
+                <a:t>-10</a:t>
+              </a:r>
+            </a:p>
+          </p:txBody>
+        </p:sp>
+        <p:sp>
+          <p:nvSpPr>
+            <p:cNvPr id="89" name="tx89"/>
+            <p:cNvSpPr/>
+            <p:nvPr/>
+          </p:nvSpPr>
+          <p:spPr>
+            <a:xfrm>
+              <a:off x="5648248" y="5716183"/>
+              <a:ext cx="62179" cy="80101"/>
+            </a:xfrm>
+            <a:prstGeom prst="rect">
+              <a:avLst/>
+            </a:prstGeom>
+            <a:noFill/>
+          </p:spPr>
+          <p:txBody>
+            <a:bodyPr lIns="0" rIns="0" tIns="0" bIns="0" anchorCtr="1" anchor="ctr" wrap="none"/>
+            <a:lstStyle/>
+            <a:p>
+              <a:pPr algn="l" marL="0" marR="0" indent="0">
+                <a:lnSpc>
+                  <a:spcPts val="880"/>
+                </a:lnSpc>
+                <a:spcBef>
+                  <a:spcPts val="0"/>
+                </a:spcBef>
+                <a:spcAft>
+                  <a:spcPts val="0"/>
+                </a:spcAft>
+              </a:pPr>
+              <a:r>
+                <a:rPr sz="880">
+                  <a:solidFill>
+                    <a:srgbClr val="4D4D4D">
+                      <a:alpha val="100000"/>
+                    </a:srgbClr>
+                  </a:solidFill>
+                  <a:latin typeface="Helvetica"/>
+                  <a:cs typeface="Helvetica"/>
+                </a:rPr>
+                <a:t>0</a:t>
+              </a:r>
+            </a:p>
+          </p:txBody>
+        </p:sp>
+        <p:sp>
+          <p:nvSpPr>
+            <p:cNvPr id="90" name="tx90"/>
+            <p:cNvSpPr/>
+            <p:nvPr/>
+          </p:nvSpPr>
+          <p:spPr>
+            <a:xfrm>
+              <a:off x="6467667" y="5716183"/>
+              <a:ext cx="124358" cy="80101"/>
+            </a:xfrm>
+            <a:prstGeom prst="rect">
+              <a:avLst/>
+            </a:prstGeom>
+            <a:noFill/>
+          </p:spPr>
+          <p:txBody>
+            <a:bodyPr lIns="0" rIns="0" tIns="0" bIns="0" anchorCtr="1" anchor="ctr" wrap="none"/>
+            <a:lstStyle/>
+            <a:p>
+              <a:pPr algn="l" marL="0" marR="0" indent="0">
+                <a:lnSpc>
+                  <a:spcPts val="880"/>
+                </a:lnSpc>
+                <a:spcBef>
+                  <a:spcPts val="0"/>
+                </a:spcBef>
+                <a:spcAft>
+                  <a:spcPts val="0"/>
+                </a:spcAft>
+              </a:pPr>
+              <a:r>
+                <a:rPr sz="880">
+                  <a:solidFill>
+                    <a:srgbClr val="4D4D4D">
+                      <a:alpha val="100000"/>
+                    </a:srgbClr>
+                  </a:solidFill>
+                  <a:latin typeface="Helvetica"/>
+                  <a:cs typeface="Helvetica"/>
+                </a:rPr>
+                <a:t>10</a:t>
+              </a:r>
+            </a:p>
+          </p:txBody>
+        </p:sp>
+        <p:sp>
+          <p:nvSpPr>
+            <p:cNvPr id="91" name="tx91"/>
+            <p:cNvSpPr/>
+            <p:nvPr/>
+          </p:nvSpPr>
+          <p:spPr>
+            <a:xfrm>
+              <a:off x="7318177" y="5716183"/>
+              <a:ext cx="124358" cy="80101"/>
+            </a:xfrm>
+            <a:prstGeom prst="rect">
+              <a:avLst/>
+            </a:prstGeom>
+            <a:noFill/>
+          </p:spPr>
+          <p:txBody>
+            <a:bodyPr lIns="0" rIns="0" tIns="0" bIns="0" anchorCtr="1" anchor="ctr" wrap="none"/>
+            <a:lstStyle/>
+            <a:p>
+              <a:pPr algn="l" marL="0" marR="0" indent="0">
+                <a:lnSpc>
+                  <a:spcPts val="880"/>
+                </a:lnSpc>
+                <a:spcBef>
+                  <a:spcPts val="0"/>
+                </a:spcBef>
+                <a:spcAft>
+                  <a:spcPts val="0"/>
+                </a:spcAft>
+              </a:pPr>
+              <a:r>
+                <a:rPr sz="880">
+                  <a:solidFill>
+                    <a:srgbClr val="4D4D4D">
+                      <a:alpha val="100000"/>
+                    </a:srgbClr>
+                  </a:solidFill>
+                  <a:latin typeface="Helvetica"/>
+                  <a:cs typeface="Helvetica"/>
+                </a:rPr>
+                <a:t>20</a:t>
+              </a:r>
+            </a:p>
+          </p:txBody>
+        </p:sp>
+        <p:sp>
+          <p:nvSpPr>
+            <p:cNvPr id="92" name="tx92"/>
+            <p:cNvSpPr/>
+            <p:nvPr/>
+          </p:nvSpPr>
+          <p:spPr>
+            <a:xfrm>
+              <a:off x="8168686" y="5716183"/>
+              <a:ext cx="124358" cy="80101"/>
+            </a:xfrm>
+            <a:prstGeom prst="rect">
+              <a:avLst/>
+            </a:prstGeom>
+            <a:noFill/>
+          </p:spPr>
+          <p:txBody>
+            <a:bodyPr lIns="0" rIns="0" tIns="0" bIns="0" anchorCtr="1" anchor="ctr" wrap="none"/>
+            <a:lstStyle/>
+            <a:p>
+              <a:pPr algn="l" marL="0" marR="0" indent="0">
+                <a:lnSpc>
+                  <a:spcPts val="880"/>
+                </a:lnSpc>
+                <a:spcBef>
+                  <a:spcPts val="0"/>
+                </a:spcBef>
+                <a:spcAft>
+                  <a:spcPts val="0"/>
+                </a:spcAft>
+              </a:pPr>
+              <a:r>
+                <a:rPr sz="880">
+                  <a:solidFill>
+                    <a:srgbClr val="4D4D4D">
+                      <a:alpha val="100000"/>
+                    </a:srgbClr>
+                  </a:solidFill>
+                  <a:latin typeface="Helvetica"/>
+                  <a:cs typeface="Helvetica"/>
+                </a:rPr>
+                <a:t>30</a:t>
+              </a:r>
+            </a:p>
+          </p:txBody>
+        </p:sp>
+        <p:sp>
+          <p:nvSpPr>
+            <p:cNvPr id="93" name="tx93"/>
+            <p:cNvSpPr/>
+            <p:nvPr/>
+          </p:nvSpPr>
+          <p:spPr>
+            <a:xfrm>
+              <a:off x="1561815" y="5855859"/>
+              <a:ext cx="6311097" cy="100218"/>
+            </a:xfrm>
+            <a:prstGeom prst="rect">
+              <a:avLst/>
+            </a:prstGeom>
+            <a:noFill/>
+          </p:spPr>
+          <p:txBody>
+            <a:bodyPr lIns="0" rIns="0" tIns="0" bIns="0" anchorCtr="1" anchor="ctr" wrap="none"/>
+            <a:lstStyle/>
+            <a:p>
+              <a:pPr algn="l" marL="0" marR="0" indent="0">
+                <a:lnSpc>
+                  <a:spcPts val="1100"/>
+                </a:lnSpc>
+                <a:spcBef>
+                  <a:spcPts val="0"/>
+                </a:spcBef>
+                <a:spcAft>
+                  <a:spcPts val="0"/>
+                </a:spcAft>
+              </a:pPr>
+              <a:r>
+                <a:rPr sz="1100">
+                  <a:solidFill>
+                    <a:srgbClr val="000000">
+                      <a:alpha val="100000"/>
+                    </a:srgbClr>
+                  </a:solidFill>
+                  <a:latin typeface="Helvetica"/>
+                  <a:cs typeface="Helvetica"/>
+                </a:rPr>
+                <a:t>Sensitivity eGFR Difference (%): 100 × (CKD-EPI 2012 CysC − CKD-EPI 2021 Cr) / CKD-EPI 2021 Cr</a:t>
+              </a:r>
+            </a:p>
+          </p:txBody>
+        </p:sp>
+        <p:sp>
+          <p:nvSpPr>
+            <p:cNvPr id="94" name="tx94"/>
+            <p:cNvSpPr/>
+            <p:nvPr/>
+          </p:nvSpPr>
+          <p:spPr>
+            <a:xfrm rot="-5400000">
+              <a:off x="138035" y="4944909"/>
+              <a:ext cx="1016904" cy="100218"/>
+            </a:xfrm>
+            <a:prstGeom prst="rect">
+              <a:avLst/>
+            </a:prstGeom>
+            <a:noFill/>
+          </p:spPr>
+          <p:txBody>
+            <a:bodyPr lIns="0" rIns="0" tIns="0" bIns="0" anchorCtr="1" anchor="ctr" wrap="none"/>
+            <a:lstStyle/>
+            <a:p>
+              <a:pPr algn="l" marL="0" marR="0" indent="0">
+                <a:lnSpc>
+                  <a:spcPts val="1100"/>
+                </a:lnSpc>
+                <a:spcBef>
+                  <a:spcPts val="0"/>
+                </a:spcBef>
+                <a:spcAft>
+                  <a:spcPts val="0"/>
+                </a:spcAft>
+              </a:pPr>
+              <a:r>
+                <a:rPr sz="1100">
+                  <a:solidFill>
+                    <a:srgbClr val="000000">
+                      <a:alpha val="100000"/>
+                    </a:srgbClr>
+                  </a:solidFill>
+                  <a:latin typeface="Helvetica"/>
+                  <a:cs typeface="Helvetica"/>
+                </a:rPr>
+                <a:t>subHR (95% CI)</a:t>
+              </a:r>
+            </a:p>
+          </p:txBody>
+        </p:sp>
+        <p:sp>
+          <p:nvSpPr>
+            <p:cNvPr id="95" name="tx95"/>
+            <p:cNvSpPr/>
+            <p:nvPr/>
+          </p:nvSpPr>
+          <p:spPr>
+            <a:xfrm>
+              <a:off x="887106" y="4159544"/>
+              <a:ext cx="6959864" cy="82021"/>
+            </a:xfrm>
+            <a:prstGeom prst="rect">
+              <a:avLst/>
+            </a:prstGeom>
+            <a:noFill/>
+          </p:spPr>
+          <p:txBody>
+            <a:bodyPr lIns="0" rIns="0" tIns="0" bIns="0" anchorCtr="1" anchor="ctr" wrap="none"/>
+            <a:lstStyle/>
+            <a:p>
+              <a:pPr algn="l" marL="0" marR="0" indent="0">
+                <a:lnSpc>
+                  <a:spcPts val="900"/>
+                </a:lnSpc>
+                <a:spcBef>
+                  <a:spcPts val="0"/>
+                </a:spcBef>
+                <a:spcAft>
+                  <a:spcPts val="0"/>
+                </a:spcAft>
+              </a:pPr>
+              <a:r>
+                <a:rPr sz="900">
+                  <a:solidFill>
+                    <a:srgbClr val="404040">
+                      <a:alpha val="100000"/>
+                    </a:srgbClr>
+                  </a:solidFill>
+                  <a:latin typeface="Helvetica"/>
+                  <a:cs typeface="Helvetica"/>
+                </a:rPr>
+                <a:t>subHR per 10 % decline: 1.13 (1.05-1.21), p_Bonf = 0.008 (n = 6)  |  per IQR decline (Δ = 28.0 %): 1.40 (1.14-1.71)  |  IQR: [-30.0, -2.0] %</a:t>
+              </a:r>
+            </a:p>
+          </p:txBody>
+        </p:sp>
+        <p:sp>
+          <p:nvSpPr>
+            <p:cNvPr id="96" name="tx96"/>
+            <p:cNvSpPr/>
+            <p:nvPr/>
+          </p:nvSpPr>
+          <p:spPr>
+            <a:xfrm>
+              <a:off x="887106" y="3932770"/>
               <a:ext cx="3081985" cy="120152"/>
             </a:xfrm>
             <a:prstGeom prst="rect">
